--- a/presentation/split/2-Mehemud.pptx
+++ b/presentation/split/2-Mehemud.pptx
@@ -5,6 +5,7 @@
     <p:sldMasterId id="2147483648" r:id="rId1"/>
   </p:sldMasterIdLst>
   <p:sldIdLst>
+    <p:sldId id="265" r:id="rId11"/>
     <p:sldId id="266" r:id="rId12"/>
     <p:sldId id="267" r:id="rId13"/>
     <p:sldId id="268" r:id="rId14"/>
@@ -13,10 +14,9 @@
     <p:sldId id="271" r:id="rId17"/>
     <p:sldId id="272" r:id="rId18"/>
     <p:sldId id="273" r:id="rId19"/>
-    <p:sldId id="274" r:id="rId20"/>
   </p:sldIdLst>
   <p:notesMasterIdLst>
-    <p:notesMasterId r:id="rId39"/>
+    <p:notesMasterId r:id="rId38"/>
   </p:notesMasterIdLst>
   <p:sldSz cx="12192000" cy="6858000"/>
   <p:notesSz cx="6858000" cy="12192000"/>
@@ -464,6 +464,94 @@
 </p:notesMaster>
 </file>
 
+<file path=ppt/notesSlides/notesSlide10.xml><?xml version="1.0" encoding="utf-8"?>
+<p:notes xmlns:a="http://schemas.openxmlformats.org/drawingml/2006/main" xmlns:r="http://schemas.openxmlformats.org/officeDocument/2006/relationships" xmlns:p="http://schemas.openxmlformats.org/presentationml/2006/main">
+  <p:cSld>
+    <p:spTree>
+      <p:nvGrpSpPr>
+        <p:cNvPr id="1" name=""/>
+        <p:cNvGrpSpPr/>
+        <p:nvPr/>
+      </p:nvGrpSpPr>
+      <p:grpSpPr>
+        <a:xfrm>
+          <a:off x="0" y="0"/>
+          <a:ext cx="0" cy="0"/>
+          <a:chOff x="0" y="0"/>
+          <a:chExt cx="0" cy="0"/>
+        </a:xfrm>
+      </p:grpSpPr>
+      <p:sp>
+        <p:nvSpPr>
+          <p:cNvPr id="2" name="Slide Image Placeholder 1"/>
+          <p:cNvSpPr>
+            <a:spLocks noGrp="1" noRot="1" noChangeAspect="1"/>
+          </p:cNvSpPr>
+          <p:nvPr>
+            <p:ph type="sldImg"/>
+          </p:nvPr>
+        </p:nvSpPr>
+        <p:spPr/>
+      </p:sp>
+      <p:sp>
+        <p:nvSpPr>
+          <p:cNvPr id="3" name="Notes Placeholder 2"/>
+          <p:cNvSpPr>
+            <a:spLocks noGrp="1"/>
+          </p:cNvSpPr>
+          <p:nvPr>
+            <p:ph type="body" idx="1"/>
+          </p:nvPr>
+        </p:nvSpPr>
+        <p:spPr/>
+        <p:txBody>
+          <a:bodyPr/>
+          <a:lstStyle/>
+          <a:p>
+            <a:r>
+              <a:rPr lang="en-US" dirty="0"/>
+              <a:t>About 40 seconds. [Opening, after the intro] Thank you. I'll take you inside the first of the three agents, the planner. Its job is to choose the single most useful test to run next. It cannot see the phone, so everything it knows, it reads from the graph. There are six kinds of knowledge: the specification, split into individual requirements; the screens we have actually seen, 79 on the contacts app; learned routes to each screen; findings from earlier runs; coverage, meaning what is still untested; and past bug reports when a project has them. All of it is capped, so the prompt does not grow as a campaign goes on. The summary of earlier runs used to be 35,000 characters, 69 percent of a prompt; stored as findings, it is about 2,000. [Transition] So where does all of this live?</a:t>
+            </a:r>
+            <a:endParaRPr lang="en-US" dirty="0"/>
+          </a:p>
+        </p:txBody>
+      </p:sp>
+      <p:sp>
+        <p:nvSpPr>
+          <p:cNvPr id="4" name="Slide Number Placeholder 3"/>
+          <p:cNvSpPr>
+            <a:spLocks noGrp="1"/>
+          </p:cNvSpPr>
+          <p:nvPr>
+            <p:ph type="sldNum" sz="quarter" idx="10"/>
+          </p:nvPr>
+        </p:nvSpPr>
+        <p:spPr/>
+        <p:txBody>
+          <a:bodyPr/>
+          <a:lstStyle/>
+          <a:p>
+            <a:fld id="{F7021451-1387-4CA6-816F-3879F97B5CBC}" type="slidenum">
+              <a:rPr lang="en-US"/>
+              <a:t>10</a:t>
+            </a:fld>
+            <a:endParaRPr lang="en-US"/>
+          </a:p>
+        </p:txBody>
+      </p:sp>
+    </p:spTree>
+    <p:extLst>
+      <p:ext uri="{BB962C8B-B14F-4D97-AF65-F5344CB8AC3E}">
+        <p14:creationId xmlns:p14="http://schemas.microsoft.com/office/powerpoint/2010/main" val="1024086991"/>
+      </p:ext>
+    </p:extLst>
+  </p:cSld>
+  <p:clrMapOvr>
+    <a:masterClrMapping/>
+  </p:clrMapOvr>
+</p:notes>
+</file>
+
 <file path=ppt/notesSlides/notesSlide11.xml><?xml version="1.0" encoding="utf-8"?>
 <p:notes xmlns:a="http://schemas.openxmlformats.org/drawingml/2006/main" xmlns:r="http://schemas.openxmlformats.org/officeDocument/2006/relationships" xmlns:p="http://schemas.openxmlformats.org/presentationml/2006/main">
   <p:cSld>
@@ -510,7 +598,7 @@
           <a:p>
             <a:r>
               <a:rPr lang="en-US" dirty="0"/>
-              <a:t>About 45 seconds. Before it writes anything, the planner can draw on six kinds of knowledge. The specification, as individual requirements it can search by meaning or keyword. A live map of every screen the agent has actually seen, 79 screens on the contacts app. Learned navigation paths. Findings from earlier runs. Coverage, meaning what is still untested. And defect history when a project has it. All of it is capped, so the prompt does not grow with the campaign. The clearest example: the block describing earlier runs used to be 35,000 characters, 69 percent of one prompt. Storing findings as structured knowledge brought it down to about 2,000.</a:t>
+              <a:t>About 40 seconds. In one Neo4j graph. Orange is the specification: each requirement is traced to the passage of the document it came from. Purple is testing: test cases, the requirements they cover, and a log for every run, including the ordered path of screens it went through. Blue is the app map the executor builds: one node per distinct screen, and the transitions between them. Red is findings, each tied to the run that found it, the screen it is about and the requirement it concerns. Every agent reads and writes this one structure, and nothing else survives between calls. [Transition] The planner reads this graph in one of two modes. The first is a fixed pipeline.</a:t>
             </a:r>
             <a:endParaRPr lang="en-US" dirty="0"/>
           </a:p>
@@ -598,7 +686,7 @@
           <a:p>
             <a:r>
               <a:rPr lang="en-US" dirty="0"/>
-              <a:t>About 50 seconds. The planner is a LangGraph state machine. It first loads what is already known, with no model call. Then the key step: planner_step asks the model what it still needs. It either picks tools to fetch more, from the specification, the screens it has seen, navigation paths or past defects, and execute_retrieval runs them, or it decides it has enough. That loop is what lets it reason about its own knowledge gaps instead of taking a fixed bundle of context. Then it writes the test, and a duplicate check compares it with every earlier test by title and by meaning, and forces a rewrite if it is too similar. The loop stops when the model says it is ready, after two rounds, which is what our runner asks for, when the context passes 9,000 characters, or when a retrieval brings nothing new. This pipeline planned the contacts campaign. The commerce campaign used the tools mode, two slides on.</a:t>
+              <a:t>About 40 seconds. The pipeline is a LangGraph state machine. It first loads what is known, with no model call. Then a small model call asks: what do I still need? The model can pick up to three lookups: search the specification, pull up a screen it has seen, find a route to a screen, or check past defects there. Those run, the answers come back, and it asks again, for at most two rounds. Then one large call writes the test, and a duplicate check compares it with every earlier test, by wording and by meaning. This mode planned the contacts campaign. [Transition] Here is the same pipeline in full.</a:t>
             </a:r>
             <a:endParaRPr lang="en-US" dirty="0"/>
           </a:p>
@@ -686,7 +774,7 @@
           <a:p>
             <a:r>
               <a:rPr lang="en-US" dirty="0"/>
-              <a:t>About 40 seconds. The planning pipeline in full, left to right. Read it by colour. Blue is where the planner uses its tools: in planner_step the model looks at what it has and names up to three lookups, each a source and a query. It can search the specification, pull up a screen it has already seen, ask how to reach a screen, or check past failures there. execute_retrieval runs those lookups, with no model call, and the results go back into the context for the next planner_step. Green steps are plain graph reads and writes; red steps are model calls; amber steps are decisions. Only two model calls are guaranteed per test, the small planner_step and the large generate_testcase; the retry fires only when the duplicate check rejects a draft. The test is logged to the graph as planned before the executor ever sees it. The next slide is the planner's other mode, where the model calls its tools directly.</a:t>
+              <a:t>About 30 seconds; skip if short of time. Read it by colour, and follow the numbers. Red boxes are model calls: only two are guaranteed per test, the small planner_step and the large generate_testcase. Blue is the planner's tools, the lookups it asked for. Green is plain graph work, and amber are decisions. The loop between steps 2 and 3 is the planner deciding whether it knows enough. The retry at the bottom only fires when a draft is too similar to an earlier test, and every test is stored as planned before the executor ever sees it. The weakness is in that loop: the model lists its lookups up front and gets them back as a batch, so one answer cannot shape the next question. [Transition] That is what the second mode fixes.</a:t>
             </a:r>
             <a:endParaRPr lang="en-US" dirty="0"/>
           </a:p>
@@ -774,7 +862,7 @@
           <a:p>
             <a:r>
               <a:rPr lang="en-US" dirty="0"/>
-              <a:t>About 40 seconds. This is the planner's second mode, and it is the one that planned the 45-test commerce campaign. In the pipeline, the model writes down which lookups it wants and code runs them as a batch. Here the loop of planner_step and execute_retrieval is replaced by real function calls. The model starts from a short brief: the coverage map, the last few runs and the open questions. Then it investigates: it calls a tool, reads the answer, and decides what to ask next, so each question can depend on the last result. Finally it proposes one test case, and that proposal goes through a validation gate: a screen it has never seen, a requirement id that does not exist, a repeat, a precondition the tester cannot create, or something out of scope is rejected with a reason it can act on, up to three times. Across all its runs on the commerce app it made 989 tool calls for 101 proposals and used all nine tools. The next slides show the tools, a real round, and what it emits. The contacts campaign ran on the pipeline.</a:t>
+              <a:t>About 40 seconds. In tools mode, the model calls the graph itself. It calls one tool, reads the answer, and decides what to ask next, so each question can depend on the last result. It has nine read-only tools: two for what the specification says should exist, three for what the app actually has, three for what earlier runs established, and one for coverage. The right-hand column is the safety rule: a tool is offered only when its source has data. On a brand-new app with no screens yet, get_screen does not exist for the model, so an empty answer can never mislead it. This mode planned the 45-test commerce campaign. [Transition] Here is what one planning round actually looked like.</a:t>
             </a:r>
             <a:endParaRPr lang="en-US" dirty="0"/>
           </a:p>
@@ -862,7 +950,7 @@
           <a:p>
             <a:r>
               <a:rPr lang="en-US" dirty="0"/>
-              <a:t>About 40 seconds. These are the nine tools the planner can call in tools mode. All of them only read; none can change the graph. Two answer what the specification says should exist. Three answer what the app actually has: a screen's real controls, the list of screens seen, and a known route to a screen. Three answer what earlier runs already established: a summary count, the findings themselves, and the questions still open. And one reports coverage: where tests have gone, what keeps failing, and what is exhausted. The right-hand column is the safety rule: a tool is only offered when its source has data. On a brand-new app with no screens yet, get_screen simply does not exist for the model, so it cannot be misled by an empty answer into planning against a screen that is not there.</a:t>
+              <a:t>About 45 seconds. We measured this from 62 real planning rounds on the commerce app. It starts from a short brief: the coverage map, the last few runs and the open questions. Nothing in the code fixes the order after that; the model chose it. It orients first, with a summary of the findings, the coverage state and the list of screens. Then it picks up an unfinished thread, usually an open question from an earlier run. Only then does it ground the test in a real requirement and a real screen. That is about 13 calls a round. After six free turns it is forced to propose, because on our first live run it investigated for ten turns and never wrote a test. And every proposal must pass the gate on the right: a screen we have really seen, requirement ids that exist, not a repeat, and no precondition the tester cannot create. If it fails, the model is told why and tries again, up to three times. [Transition] Whichever mode runs, it also has to decide where to test next without going in circles.</a:t>
             </a:r>
             <a:endParaRPr lang="en-US" dirty="0"/>
           </a:p>
@@ -950,7 +1038,7 @@
           <a:p>
             <a:r>
               <a:rPr lang="en-US" dirty="0"/>
-              <a:t>About 40 seconds. This is what a planning round actually looks like, measured from the logs of 62 rounds on the commerce app rather than how we hoped it would behave. Nothing in the code fixes this order; the prompt only sets rules, such as never naming a screen you have not confirmed. In practice the model orients first: a summary of what earlier runs found, the coverage state, and the list of screens. Then it picks up an unfinished thread, an open question or an existing finding. Only then does it ground the test: searching the specification for the exact requirement and confirming the screen exists. A round takes a median of 13 tool calls, often several in one turn. After six free turns it is told to propose, and the tool choice is pinned so that it must. That rule exists because the first live run investigated for ten turns and never produced a test at all. The proposal then goes through the validation gate from slide 14.</a:t>
+              <a:t>About 40 seconds. Three mechanisms steer it. A coverage map points it at untested requirements and feature areas. A cap retires an area after five tests, whatever happened in them. And a duplicate check runs against every earlier test. The cap came from a real failure: in one campaign, 9 of 13 tests landed on the same screen, because a failing area kept being promoted. The obvious fix, stopping when an area stops yielding new findings, would never have fired, because the ninth test was still producing technically new ones. [Transition] So after all of this, what does the planner actually hand over?</a:t>
             </a:r>
             <a:endParaRPr lang="en-US" dirty="0"/>
           </a:p>
@@ -1038,7 +1126,7 @@
           <a:p>
             <a:r>
               <a:rPr lang="en-US" dirty="0"/>
-              <a:t>About 35 seconds. This is the contract between the planner and the executor, and both planner modes produce exactly these fields. It is a test case in plain language: a title, an objective, an expected result, preconditions, the screen to start from, and labels for area, priority and type. Never a sequence of taps; the executor works those out on the device. Two fields do the most work. requirement_ids are what let us report requirement coverage at all, instead of counting screens visited as a proxy. And addresses links the test to an open question from an earlier run. Here, TC-003 from the commerce campaign: an earlier run suspected the farm name was never validated, so the planner wrote a test aimed at exactly that, citing FR-FARM-04, the requirement that mandatory fields show a specific error.</a:t>
+              <a:t>About 30 seconds. A test case in plain language, never a sequence of taps; the executor works those out on the device. Both modes emit exactly these fields, so the executor does not care which planner ran. Two fields do the most work. requirement_ids are what let us report requirement coverage at all. And addresses links the test to the open question it settles. Here, TC-003 from the commerce app: an earlier run suspected farm names were never validated, so the planner aimed a test at exactly that, citing FR-FARM-04. [Transition] Let me finish with one test followed all the way through.</a:t>
             </a:r>
             <a:endParaRPr lang="en-US" dirty="0"/>
           </a:p>
@@ -1126,7 +1214,7 @@
           <a:p>
             <a:r>
               <a:rPr lang="en-US" dirty="0"/>
-              <a:t>About 45 seconds. Three mechanisms decide where the next test goes. A coverage map points the planner at requirements and areas nobody has tested. A cap retires an area after five tests, whatever happened in them. And a duplicate check compares each new title with every earlier test, both by word overlap and by meaning. The cap exists because of a real failure: in one 13-round campaign, nine tests landed on the same screen. A failing area kept getting promoted and nothing retired it. We considered stopping when an area stops yielding new findings, and rejected it: the ninth test was still technically producing new ones, so that rule would never have fired.</a:t>
+              <a:t>About 45 seconds. TC-018, from the contacts campaign. Earlier runs had seen duplicate contacts saved silently, but whether a matching phone number alone triggers detection was still unverified. The planner picked that up and gave the new contact a completely different name, so that only the phone number matched. That isolates one requirement, FR-DUP-02. The executor saved the contact and found both entries side by side in the list: no duplicate dialog. The investigator marked the objective refuted, a high-severity spec violation, and in its words this directly answers the earlier open question. Nobody told the agent to look at duplicates; it chose this from the specification and from what earlier runs had left open. If asked about the 48 steps: the evidence is in the first 15, and the rest went to a search box that did not respond, which the investigator's summary says itself. [Handover] That run was driven on a real phone by the executor, which [next presenter] will now explain.</a:t>
             </a:r>
             <a:endParaRPr lang="en-US" dirty="0"/>
           </a:p>
@@ -1150,94 +1238,6 @@
             <a:fld id="{F7021451-1387-4CA6-816F-3879F97B5CBC}" type="slidenum">
               <a:rPr lang="en-US"/>
               <a:t>18</a:t>
-            </a:fld>
-            <a:endParaRPr lang="en-US"/>
-          </a:p>
-        </p:txBody>
-      </p:sp>
-    </p:spTree>
-    <p:extLst>
-      <p:ext uri="{BB962C8B-B14F-4D97-AF65-F5344CB8AC3E}">
-        <p14:creationId xmlns:p14="http://schemas.microsoft.com/office/powerpoint/2010/main" val="1024086991"/>
-      </p:ext>
-    </p:extLst>
-  </p:cSld>
-  <p:clrMapOvr>
-    <a:masterClrMapping/>
-  </p:clrMapOvr>
-</p:notes>
-</file>
-
-<file path=ppt/notesSlides/notesSlide19.xml><?xml version="1.0" encoding="utf-8"?>
-<p:notes xmlns:a="http://schemas.openxmlformats.org/drawingml/2006/main" xmlns:r="http://schemas.openxmlformats.org/officeDocument/2006/relationships" xmlns:p="http://schemas.openxmlformats.org/presentationml/2006/main">
-  <p:cSld>
-    <p:spTree>
-      <p:nvGrpSpPr>
-        <p:cNvPr id="1" name=""/>
-        <p:cNvGrpSpPr/>
-        <p:nvPr/>
-      </p:nvGrpSpPr>
-      <p:grpSpPr>
-        <a:xfrm>
-          <a:off x="0" y="0"/>
-          <a:ext cx="0" cy="0"/>
-          <a:chOff x="0" y="0"/>
-          <a:chExt cx="0" cy="0"/>
-        </a:xfrm>
-      </p:grpSpPr>
-      <p:sp>
-        <p:nvSpPr>
-          <p:cNvPr id="2" name="Slide Image Placeholder 1"/>
-          <p:cNvSpPr>
-            <a:spLocks noGrp="1" noRot="1" noChangeAspect="1"/>
-          </p:cNvSpPr>
-          <p:nvPr>
-            <p:ph type="sldImg"/>
-          </p:nvPr>
-        </p:nvSpPr>
-        <p:spPr/>
-      </p:sp>
-      <p:sp>
-        <p:nvSpPr>
-          <p:cNvPr id="3" name="Notes Placeholder 2"/>
-          <p:cNvSpPr>
-            <a:spLocks noGrp="1"/>
-          </p:cNvSpPr>
-          <p:nvPr>
-            <p:ph type="body" idx="1"/>
-          </p:nvPr>
-        </p:nvSpPr>
-        <p:spPr/>
-        <p:txBody>
-          <a:bodyPr/>
-          <a:lstStyle/>
-          <a:p>
-            <a:r>
-              <a:rPr lang="en-US" dirty="0"/>
-              <a:t>About 45 seconds. This is one real test from the contacts campaign, and it shows the loop working. Earlier runs had seen duplicate contacts saved silently, but detection on a phone-number match alone was still marked unverified, an open question the investigator had left in the graph. The planner picked it up. Its own rationale: give the new contact a completely different name, so that only the phone number matches, which tests FR-DUP-02 on its own instead of mixing it up with the name rule. The executor created the contact with an existing contact’s number, saved it, and found both entries side by side in the list: no duplicate dialog. It took 48 steps, but the evidence is in the first 15; the rest went to a search box that did not respond, and the investigator’s summary says so. The verdict: objective refuted, a high-severity spec violation of FR-DUP-02 and FR-DUP-04, and in its words it directly answers the earlier open question. Nobody told the agent to look at duplicates. It chose this from the specification and from what earlier runs had left unresolved.</a:t>
-            </a:r>
-            <a:endParaRPr lang="en-US" dirty="0"/>
-          </a:p>
-        </p:txBody>
-      </p:sp>
-      <p:sp>
-        <p:nvSpPr>
-          <p:cNvPr id="4" name="Slide Number Placeholder 3"/>
-          <p:cNvSpPr>
-            <a:spLocks noGrp="1"/>
-          </p:cNvSpPr>
-          <p:nvPr>
-            <p:ph type="sldNum" sz="quarter" idx="10"/>
-          </p:nvPr>
-        </p:nvSpPr>
-        <p:spPr/>
-        <p:txBody>
-          <a:bodyPr/>
-          <a:lstStyle/>
-          <a:p>
-            <a:fld id="{F7021451-1387-4CA6-816F-3879F97B5CBC}" type="slidenum">
-              <a:rPr lang="en-US"/>
-              <a:t>19</a:t>
             </a:fld>
             <a:endParaRPr lang="en-US"/>
           </a:p>
@@ -1563,9 +1563,9 @@
 </p:sldMaster>
 </file>
 
-<file path=ppt/slides/slide11.xml><?xml version="1.0" encoding="utf-8"?>
+<file path=ppt/slides/slide10.xml><?xml version="1.0" encoding="utf-8"?>
 <p:sld xmlns:a="http://schemas.openxmlformats.org/drawingml/2006/main" xmlns:r="http://schemas.openxmlformats.org/officeDocument/2006/relationships" xmlns:p="http://schemas.openxmlformats.org/presentationml/2006/main">
-  <p:cSld name="Slide 11">
+  <p:cSld name="Slide 10">
     <p:bg>
       <p:bgPr>
         <a:solidFill>
@@ -2522,6 +2522,329 @@
       <p:sp>
         <p:nvSpPr>
           <p:cNvPr id="26" name="Text 24"/>
+          <p:cNvSpPr/>
+          <p:nvPr/>
+        </p:nvSpPr>
+        <p:spPr>
+          <a:xfrm>
+            <a:off x="11196290" y="6238280"/>
+            <a:ext cx="233710" cy="238720"/>
+          </a:xfrm>
+          <a:prstGeom prst="rect">
+            <a:avLst/>
+          </a:prstGeom>
+          <a:noFill/>
+          <a:ln/>
+        </p:spPr>
+        <p:txBody>
+          <a:bodyPr wrap="square" lIns="0" tIns="0" rIns="0" bIns="0" rtlCol="0" anchor="t">
+            <a:normAutofit/>
+          </a:bodyPr>
+          <a:lstStyle/>
+          <a:p>
+            <a:pPr algn="l" indent="0" marL="0">
+              <a:lnSpc>
+                <a:spcPts val="1680"/>
+              </a:lnSpc>
+              <a:buNone/>
+            </a:pPr>
+            <a:r>
+              <a:rPr lang="en-US" sz="1200" dirty="0">
+                <a:solidFill>
+                  <a:srgbClr val="55697A"/>
+                </a:solidFill>
+                <a:latin typeface="IBM Plex Sans" pitchFamily="34" charset="0"/>
+                <a:ea typeface="IBM Plex Sans" pitchFamily="34" charset="-122"/>
+                <a:cs typeface="IBM Plex Sans" pitchFamily="34" charset="-120"/>
+              </a:rPr>
+              <a:t>10</a:t>
+            </a:r>
+            <a:endParaRPr lang="en-US" sz="1200" dirty="0"/>
+          </a:p>
+        </p:txBody>
+      </p:sp>
+    </p:spTree>
+  </p:cSld>
+  <p:clrMapOvr>
+    <a:masterClrMapping/>
+  </p:clrMapOvr>
+</p:sld>
+</file>
+
+<file path=ppt/slides/slide11.xml><?xml version="1.0" encoding="utf-8"?>
+<p:sld xmlns:a="http://schemas.openxmlformats.org/drawingml/2006/main" xmlns:r="http://schemas.openxmlformats.org/officeDocument/2006/relationships" xmlns:p="http://schemas.openxmlformats.org/presentationml/2006/main">
+  <p:cSld name="Slide 11">
+    <p:bg>
+      <p:bgPr>
+        <a:solidFill>
+          <a:srgbClr val="EDF2F4"/>
+        </a:solidFill>
+      </p:bgPr>
+    </p:bg>
+    <p:spTree>
+      <p:nvGrpSpPr>
+        <p:cNvPr id="1" name=""/>
+        <p:cNvGrpSpPr/>
+        <p:nvPr/>
+      </p:nvGrpSpPr>
+      <p:grpSpPr>
+        <a:xfrm>
+          <a:off x="0" y="0"/>
+          <a:ext cx="0" cy="0"/>
+          <a:chOff x="0" y="0"/>
+          <a:chExt cx="0" cy="0"/>
+        </a:xfrm>
+      </p:grpSpPr>
+      <p:sp>
+        <p:nvSpPr>
+          <p:cNvPr id="2" name="Text 0"/>
+          <p:cNvSpPr/>
+          <p:nvPr/>
+        </p:nvSpPr>
+        <p:spPr>
+          <a:xfrm>
+            <a:off x="812800" y="508000"/>
+            <a:ext cx="10883392" cy="231279"/>
+          </a:xfrm>
+          <a:prstGeom prst="rect">
+            <a:avLst/>
+          </a:prstGeom>
+          <a:noFill/>
+          <a:ln/>
+        </p:spPr>
+        <p:txBody>
+          <a:bodyPr wrap="square" lIns="0" tIns="0" rIns="0" bIns="0" rtlCol="0" anchor="t">
+            <a:normAutofit/>
+          </a:bodyPr>
+          <a:lstStyle/>
+          <a:p>
+            <a:pPr algn="l" indent="0" marL="0">
+              <a:lnSpc>
+                <a:spcPts val="1622"/>
+              </a:lnSpc>
+              <a:buNone/>
+            </a:pPr>
+            <a:r>
+              <a:rPr lang="en-US" sz="1159" b="1" spc="100" kern="0" dirty="0">
+                <a:solidFill>
+                  <a:srgbClr val="0B6A8F"/>
+                </a:solidFill>
+                <a:latin typeface="IBM Plex Sans" pitchFamily="34" charset="0"/>
+                <a:ea typeface="IBM Plex Sans" pitchFamily="34" charset="-122"/>
+                <a:cs typeface="IBM Plex Sans" pitchFamily="34" charset="-120"/>
+              </a:rPr>
+              <a:t>PLANNER · WHERE IT ALL LIVES</a:t>
+            </a:r>
+            <a:endParaRPr lang="en-US" sz="1159" dirty="0"/>
+          </a:p>
+        </p:txBody>
+      </p:sp>
+      <p:sp>
+        <p:nvSpPr>
+          <p:cNvPr id="3" name="Text 1"/>
+          <p:cNvSpPr/>
+          <p:nvPr/>
+        </p:nvSpPr>
+        <p:spPr>
+          <a:xfrm>
+            <a:off x="812800" y="790079"/>
+            <a:ext cx="10883392" cy="429816"/>
+          </a:xfrm>
+          <a:prstGeom prst="rect">
+            <a:avLst/>
+          </a:prstGeom>
+          <a:noFill/>
+          <a:ln/>
+        </p:spPr>
+        <p:txBody>
+          <a:bodyPr wrap="square" lIns="0" tIns="0" rIns="0" bIns="0" rtlCol="0" anchor="t">
+            <a:normAutofit/>
+          </a:bodyPr>
+          <a:lstStyle/>
+          <a:p>
+            <a:pPr algn="l" indent="0" marL="0">
+              <a:lnSpc>
+                <a:spcPts val="3218"/>
+              </a:lnSpc>
+              <a:buNone/>
+            </a:pPr>
+            <a:r>
+              <a:rPr lang="en-US" sz="2925" b="1" dirty="0">
+                <a:solidFill>
+                  <a:srgbClr val="14303D"/>
+                </a:solidFill>
+                <a:latin typeface="Source Serif 4" pitchFamily="34" charset="0"/>
+                <a:ea typeface="Source Serif 4" pitchFamily="34" charset="-122"/>
+                <a:cs typeface="Source Serif 4" pitchFamily="34" charset="-120"/>
+              </a:rPr>
+              <a:t>What the knowledge graph stores</a:t>
+            </a:r>
+            <a:endParaRPr lang="en-US" sz="2925" dirty="0"/>
+          </a:p>
+        </p:txBody>
+      </p:sp>
+      <p:sp>
+        <p:nvSpPr>
+          <p:cNvPr id="4" name="Shape 2"/>
+          <p:cNvSpPr/>
+          <p:nvPr/>
+        </p:nvSpPr>
+        <p:spPr>
+          <a:xfrm>
+            <a:off x="812800" y="1346895"/>
+            <a:ext cx="10566400" cy="4183410"/>
+          </a:xfrm>
+          <a:prstGeom prst="roundRect">
+            <a:avLst>
+              <a:gd name="adj" fmla="val 2429"/>
+            </a:avLst>
+          </a:prstGeom>
+          <a:solidFill>
+            <a:srgbClr val="FDFEFE"/>
+          </a:solidFill>
+          <a:ln/>
+        </p:spPr>
+      </p:sp>
+      <p:pic>
+        <p:nvPicPr>
+          <p:cNvPr id="5" name="Image 0" descr="Neo4j schema. Specification side: SRS has chunks; each Requirement is derived from a chunk, has validation rules and involves entities. Tests: a TestCase covers requirements and a feature area and has runs; an ExecutionLog points to its test case and stores the ordered path of screens. App model: UIState transitions to UIState, and navigation-tree nodes lead to screens. A Finding is found by an execution log, is about a screen, concerns a requirement, and can be generalised by another finding.">    </p:cNvPr>
+          <p:cNvPicPr>
+            <a:picLocks noChangeAspect="1"/>
+          </p:cNvPicPr>
+          <p:nvPr/>
+        </p:nvPicPr>
+        <p:blipFill>
+          <a:blip r:embed="rId1"/>
+          <a:stretch>
+            <a:fillRect/>
+          </a:stretch>
+        </p:blipFill>
+        <p:spPr>
+          <a:xfrm>
+            <a:off x="1330082" y="1353245"/>
+            <a:ext cx="9531836" cy="4170710"/>
+          </a:xfrm>
+          <a:prstGeom prst="rect">
+            <a:avLst/>
+          </a:prstGeom>
+        </p:spPr>
+      </p:pic>
+      <p:sp>
+        <p:nvSpPr>
+          <p:cNvPr id="6" name="Shape 3"/>
+          <p:cNvSpPr/>
+          <p:nvPr/>
+        </p:nvSpPr>
+        <p:spPr>
+          <a:xfrm>
+            <a:off x="815975" y="1350070"/>
+            <a:ext cx="10560050" cy="4177060"/>
+          </a:xfrm>
+          <a:prstGeom prst="roundRect">
+            <a:avLst>
+              <a:gd name="adj" fmla="val 2356"/>
+            </a:avLst>
+          </a:prstGeom>
+          <a:noFill/>
+          <a:ln w="6350">
+            <a:solidFill>
+              <a:srgbClr val="D6E1E6"/>
+            </a:solidFill>
+            <a:prstDash val="solid"/>
+          </a:ln>
+        </p:spPr>
+      </p:sp>
+      <p:sp>
+        <p:nvSpPr>
+          <p:cNvPr id="7" name="Text 4"/>
+          <p:cNvSpPr/>
+          <p:nvPr/>
+        </p:nvSpPr>
+        <p:spPr>
+          <a:xfrm>
+            <a:off x="812800" y="5682704"/>
+            <a:ext cx="10883392" cy="438696"/>
+          </a:xfrm>
+          <a:prstGeom prst="rect">
+            <a:avLst/>
+          </a:prstGeom>
+          <a:noFill/>
+          <a:ln/>
+        </p:spPr>
+        <p:txBody>
+          <a:bodyPr wrap="square" lIns="0" tIns="0" rIns="0" bIns="0" rtlCol="0" anchor="t">
+            <a:normAutofit/>
+          </a:bodyPr>
+          <a:lstStyle/>
+          <a:p>
+            <a:pPr algn="l" indent="0" marL="0">
+              <a:lnSpc>
+                <a:spcPts val="1633"/>
+              </a:lnSpc>
+              <a:buNone/>
+            </a:pPr>
+            <a:r>
+              <a:rPr lang="en-US" sz="1166" dirty="0">
+                <a:solidFill>
+                  <a:srgbClr val="46596A"/>
+                </a:solidFill>
+                <a:latin typeface="IBM Plex Sans" pitchFamily="34" charset="0"/>
+                <a:ea typeface="IBM Plex Sans" pitchFamily="34" charset="-122"/>
+                <a:cs typeface="IBM Plex Sans" pitchFamily="34" charset="-120"/>
+              </a:rPr>
+              <a:t>Orange: from the specification · Purple: tests and runs · Blue: the app model · Red: findings · Dashed: stored as a property, not a relationship. Every node belongs to one project.</a:t>
+            </a:r>
+            <a:endParaRPr lang="en-US" sz="1166" dirty="0"/>
+          </a:p>
+        </p:txBody>
+      </p:sp>
+      <p:sp>
+        <p:nvSpPr>
+          <p:cNvPr id="8" name="Text 5"/>
+          <p:cNvSpPr/>
+          <p:nvPr/>
+        </p:nvSpPr>
+        <p:spPr>
+          <a:xfrm>
+            <a:off x="812800" y="6238280"/>
+            <a:ext cx="3459976" cy="238720"/>
+          </a:xfrm>
+          <a:prstGeom prst="rect">
+            <a:avLst/>
+          </a:prstGeom>
+          <a:noFill/>
+          <a:ln/>
+        </p:spPr>
+        <p:txBody>
+          <a:bodyPr wrap="square" lIns="0" tIns="0" rIns="0" bIns="0" rtlCol="0" anchor="t">
+            <a:normAutofit/>
+          </a:bodyPr>
+          <a:lstStyle/>
+          <a:p>
+            <a:pPr algn="l" indent="0" marL="0">
+              <a:lnSpc>
+                <a:spcPts val="1680"/>
+              </a:lnSpc>
+              <a:buNone/>
+            </a:pPr>
+            <a:r>
+              <a:rPr lang="en-US" sz="1200" dirty="0">
+                <a:solidFill>
+                  <a:srgbClr val="55697A"/>
+                </a:solidFill>
+                <a:latin typeface="IBM Plex Sans" pitchFamily="34" charset="0"/>
+                <a:ea typeface="IBM Plex Sans" pitchFamily="34" charset="-122"/>
+                <a:cs typeface="IBM Plex Sans" pitchFamily="34" charset="-120"/>
+              </a:rPr>
+              <a:t>Exploratory Testing Automation · CSE 450 · BUET</a:t>
+            </a:r>
+            <a:endParaRPr lang="en-US" sz="1200" dirty="0"/>
+          </a:p>
+        </p:txBody>
+      </p:sp>
+      <p:sp>
+        <p:nvSpPr>
+          <p:cNvPr id="9" name="Text 6"/>
           <p:cNvSpPr/>
           <p:nvPr/>
         </p:nvSpPr>
@@ -2800,7 +3123,7 @@
       </p:sp>
       <p:sp>
         <p:nvSpPr>
-          <p:cNvPr id="7" name="Shape 5"/>
+          <p:cNvPr id="7" name="Text 5"/>
           <p:cNvSpPr/>
           <p:nvPr/>
         </p:nvSpPr>
@@ -2819,31 +3142,13 @@
           </a:solidFill>
           <a:ln/>
         </p:spPr>
-      </p:sp>
-      <p:sp>
-        <p:nvSpPr>
-          <p:cNvPr id="8" name="Text 6"/>
-          <p:cNvSpPr/>
-          <p:nvPr/>
-        </p:nvSpPr>
-        <p:spPr>
-          <a:xfrm>
-            <a:off x="1047750" y="3349030"/>
-            <a:ext cx="966738" cy="238720"/>
-          </a:xfrm>
-          <a:prstGeom prst="rect">
-            <a:avLst/>
-          </a:prstGeom>
-          <a:noFill/>
-          <a:ln/>
-        </p:spPr>
-        <p:txBody>
-          <a:bodyPr wrap="square" lIns="0" tIns="0" rIns="0" bIns="0" rtlCol="0" anchor="t">
-            <a:normAutofit/>
-          </a:bodyPr>
-          <a:lstStyle/>
-          <a:p>
-            <a:pPr algn="l" indent="0" marL="0">
+        <p:txBody>
+          <a:bodyPr wrap="none" lIns="0" tIns="0" rIns="0" bIns="0" rtlCol="0" anchor="ctr">
+            <a:normAutofit/>
+          </a:bodyPr>
+          <a:lstStyle/>
+          <a:p>
+            <a:pPr algn="ctr" indent="0" marL="0">
               <a:lnSpc>
                 <a:spcPts val="1680"/>
               </a:lnSpc>
@@ -2866,7 +3171,7 @@
       </p:sp>
       <p:sp>
         <p:nvSpPr>
-          <p:cNvPr id="9" name="Shape 7"/>
+          <p:cNvPr id="8" name="Shape 6"/>
           <p:cNvSpPr/>
           <p:nvPr/>
         </p:nvSpPr>
@@ -2893,7 +3198,7 @@
       </p:sp>
       <p:sp>
         <p:nvSpPr>
-          <p:cNvPr id="10" name="Shape 8"/>
+          <p:cNvPr id="9" name="Shape 7"/>
           <p:cNvSpPr/>
           <p:nvPr/>
         </p:nvSpPr>
@@ -2915,7 +3220,7 @@
       </p:sp>
       <p:sp>
         <p:nvSpPr>
-          <p:cNvPr id="11" name="Text 9"/>
+          <p:cNvPr id="10" name="Text 8"/>
           <p:cNvSpPr/>
           <p:nvPr/>
         </p:nvSpPr>
@@ -2959,7 +3264,7 @@
       </p:sp>
       <p:sp>
         <p:nvSpPr>
-          <p:cNvPr id="12" name="Text 10"/>
+          <p:cNvPr id="11" name="Text 9"/>
           <p:cNvSpPr/>
           <p:nvPr/>
         </p:nvSpPr>
@@ -3003,7 +3308,7 @@
       </p:sp>
       <p:sp>
         <p:nvSpPr>
-          <p:cNvPr id="13" name="Shape 11"/>
+          <p:cNvPr id="12" name="Shape 10"/>
           <p:cNvSpPr/>
           <p:nvPr/>
         </p:nvSpPr>
@@ -3025,7 +3330,7 @@
       </p:sp>
       <p:sp>
         <p:nvSpPr>
-          <p:cNvPr id="14" name="Text 12"/>
+          <p:cNvPr id="13" name="Text 11"/>
           <p:cNvSpPr/>
           <p:nvPr/>
         </p:nvSpPr>
@@ -3069,7 +3374,7 @@
       </p:sp>
       <p:sp>
         <p:nvSpPr>
-          <p:cNvPr id="15" name="Text 13"/>
+          <p:cNvPr id="14" name="Text 12"/>
           <p:cNvSpPr/>
           <p:nvPr/>
         </p:nvSpPr>
@@ -3113,7 +3418,7 @@
       </p:sp>
       <p:sp>
         <p:nvSpPr>
-          <p:cNvPr id="16" name="Text 14"/>
+          <p:cNvPr id="15" name="Text 13"/>
           <p:cNvSpPr/>
           <p:nvPr/>
         </p:nvSpPr>
@@ -3157,7 +3462,7 @@
       </p:sp>
       <p:sp>
         <p:nvSpPr>
-          <p:cNvPr id="17" name="Shape 15"/>
+          <p:cNvPr id="16" name="Shape 14"/>
           <p:cNvSpPr/>
           <p:nvPr/>
         </p:nvSpPr>
@@ -3184,7 +3489,7 @@
       </p:sp>
       <p:sp>
         <p:nvSpPr>
-          <p:cNvPr id="18" name="Text 16"/>
+          <p:cNvPr id="17" name="Text 15"/>
           <p:cNvSpPr/>
           <p:nvPr/>
         </p:nvSpPr>
@@ -3228,7 +3533,7 @@
       </p:sp>
       <p:sp>
         <p:nvSpPr>
-          <p:cNvPr id="19" name="Text 17"/>
+          <p:cNvPr id="18" name="Text 16"/>
           <p:cNvSpPr/>
           <p:nvPr/>
         </p:nvSpPr>
@@ -3272,7 +3577,7 @@
       </p:sp>
       <p:sp>
         <p:nvSpPr>
-          <p:cNvPr id="20" name="Shape 18"/>
+          <p:cNvPr id="19" name="Text 17"/>
           <p:cNvSpPr/>
           <p:nvPr/>
         </p:nvSpPr>
@@ -3291,31 +3596,13 @@
           </a:solidFill>
           <a:ln/>
         </p:spPr>
-      </p:sp>
-      <p:sp>
-        <p:nvSpPr>
-          <p:cNvPr id="21" name="Text 19"/>
-          <p:cNvSpPr/>
-          <p:nvPr/>
-        </p:nvSpPr>
-        <p:spPr>
-          <a:xfrm>
-            <a:off x="7207250" y="3349030"/>
-            <a:ext cx="1260723" cy="238720"/>
-          </a:xfrm>
-          <a:prstGeom prst="rect">
-            <a:avLst/>
-          </a:prstGeom>
-          <a:noFill/>
-          <a:ln/>
-        </p:spPr>
-        <p:txBody>
-          <a:bodyPr wrap="square" lIns="0" tIns="0" rIns="0" bIns="0" rtlCol="0" anchor="t">
-            <a:normAutofit/>
-          </a:bodyPr>
-          <a:lstStyle/>
-          <a:p>
-            <a:pPr algn="l" indent="0" marL="0">
+        <p:txBody>
+          <a:bodyPr wrap="none" lIns="0" tIns="0" rIns="0" bIns="0" rtlCol="0" anchor="ctr">
+            <a:normAutofit/>
+          </a:bodyPr>
+          <a:lstStyle/>
+          <a:p>
+            <a:pPr algn="ctr" indent="0" marL="0">
               <a:lnSpc>
                 <a:spcPts val="1680"/>
               </a:lnSpc>
@@ -3338,7 +3625,7 @@
       </p:sp>
       <p:sp>
         <p:nvSpPr>
-          <p:cNvPr id="22" name="Shape 20"/>
+          <p:cNvPr id="20" name="Shape 18"/>
           <p:cNvSpPr/>
           <p:nvPr/>
         </p:nvSpPr>
@@ -3365,7 +3652,7 @@
       </p:sp>
       <p:sp>
         <p:nvSpPr>
-          <p:cNvPr id="23" name="Text 21"/>
+          <p:cNvPr id="21" name="Text 19"/>
           <p:cNvSpPr/>
           <p:nvPr/>
         </p:nvSpPr>
@@ -3409,7 +3696,7 @@
       </p:sp>
       <p:sp>
         <p:nvSpPr>
-          <p:cNvPr id="24" name="Text 22"/>
+          <p:cNvPr id="22" name="Text 20"/>
           <p:cNvSpPr/>
           <p:nvPr/>
         </p:nvSpPr>
@@ -3453,7 +3740,7 @@
       </p:sp>
       <p:sp>
         <p:nvSpPr>
-          <p:cNvPr id="25" name="Shape 23"/>
+          <p:cNvPr id="23" name="Text 21"/>
           <p:cNvSpPr/>
           <p:nvPr/>
         </p:nvSpPr>
@@ -3472,31 +3759,13 @@
           </a:solidFill>
           <a:ln/>
         </p:spPr>
-      </p:sp>
-      <p:sp>
-        <p:nvSpPr>
-          <p:cNvPr id="26" name="Text 24"/>
-          <p:cNvSpPr/>
-          <p:nvPr/>
-        </p:nvSpPr>
-        <p:spPr>
-          <a:xfrm>
-            <a:off x="9715500" y="3349030"/>
-            <a:ext cx="1231454" cy="238720"/>
-          </a:xfrm>
-          <a:prstGeom prst="rect">
-            <a:avLst/>
-          </a:prstGeom>
-          <a:noFill/>
-          <a:ln/>
-        </p:spPr>
-        <p:txBody>
-          <a:bodyPr wrap="square" lIns="0" tIns="0" rIns="0" bIns="0" rtlCol="0" anchor="t">
-            <a:normAutofit/>
-          </a:bodyPr>
-          <a:lstStyle/>
-          <a:p>
-            <a:pPr algn="l" indent="0" marL="0">
+        <p:txBody>
+          <a:bodyPr wrap="none" lIns="0" tIns="0" rIns="0" bIns="0" rtlCol="0" anchor="ctr">
+            <a:normAutofit/>
+          </a:bodyPr>
+          <a:lstStyle/>
+          <a:p>
+            <a:pPr algn="ctr" indent="0" marL="0">
               <a:lnSpc>
                 <a:spcPts val="1680"/>
               </a:lnSpc>
@@ -3519,7 +3788,7 @@
       </p:sp>
       <p:pic>
         <p:nvPicPr>
-          <p:cNvPr id="27" name="Image 0" descr="connector">    </p:cNvPr>
+          <p:cNvPr id="24" name="Image 0" descr="connector">    </p:cNvPr>
           <p:cNvPicPr>
             <a:picLocks noChangeAspect="1"/>
           </p:cNvPicPr>
@@ -3542,7 +3811,7 @@
       </p:pic>
       <p:pic>
         <p:nvPicPr>
-          <p:cNvPr id="28" name="Image 1" descr="connector">    </p:cNvPr>
+          <p:cNvPr id="25" name="Image 1" descr="connector">    </p:cNvPr>
           <p:cNvPicPr>
             <a:picLocks noChangeAspect="1"/>
           </p:cNvPicPr>
@@ -3565,7 +3834,7 @@
       </p:pic>
       <p:pic>
         <p:nvPicPr>
-          <p:cNvPr id="29" name="Image 2" descr="connector">    </p:cNvPr>
+          <p:cNvPr id="26" name="Image 2" descr="connector">    </p:cNvPr>
           <p:cNvPicPr>
             <a:picLocks noChangeAspect="1"/>
           </p:cNvPicPr>
@@ -3588,7 +3857,7 @@
       </p:pic>
       <p:sp>
         <p:nvSpPr>
-          <p:cNvPr id="30" name="Shape 25"/>
+          <p:cNvPr id="27" name="Shape 22"/>
           <p:cNvSpPr/>
           <p:nvPr/>
         </p:nvSpPr>
@@ -3615,7 +3884,7 @@
       </p:sp>
       <p:sp>
         <p:nvSpPr>
-          <p:cNvPr id="31" name="Text 26"/>
+          <p:cNvPr id="28" name="Text 23"/>
           <p:cNvSpPr/>
           <p:nvPr/>
         </p:nvSpPr>
@@ -3659,7 +3928,7 @@
       </p:sp>
       <p:sp>
         <p:nvSpPr>
-          <p:cNvPr id="32" name="Text 27"/>
+          <p:cNvPr id="29" name="Text 24"/>
           <p:cNvSpPr/>
           <p:nvPr/>
         </p:nvSpPr>
@@ -3703,7 +3972,7 @@
       </p:sp>
       <p:sp>
         <p:nvSpPr>
-          <p:cNvPr id="33" name="Shape 28"/>
+          <p:cNvPr id="30" name="Shape 25"/>
           <p:cNvSpPr/>
           <p:nvPr/>
         </p:nvSpPr>
@@ -3730,7 +3999,7 @@
       </p:sp>
       <p:sp>
         <p:nvSpPr>
-          <p:cNvPr id="34" name="Text 29"/>
+          <p:cNvPr id="31" name="Text 26"/>
           <p:cNvSpPr/>
           <p:nvPr/>
         </p:nvSpPr>
@@ -3774,7 +4043,7 @@
       </p:sp>
       <p:sp>
         <p:nvSpPr>
-          <p:cNvPr id="35" name="Text 30"/>
+          <p:cNvPr id="32" name="Text 27"/>
           <p:cNvSpPr/>
           <p:nvPr/>
         </p:nvSpPr>
@@ -3818,7 +4087,7 @@
       </p:sp>
       <p:sp>
         <p:nvSpPr>
-          <p:cNvPr id="36" name="Text 31"/>
+          <p:cNvPr id="33" name="Text 28"/>
           <p:cNvSpPr/>
           <p:nvPr/>
         </p:nvSpPr>
@@ -3862,7 +4131,7 @@
       </p:sp>
       <p:sp>
         <p:nvSpPr>
-          <p:cNvPr id="37" name="Text 32"/>
+          <p:cNvPr id="34" name="Text 29"/>
           <p:cNvSpPr/>
           <p:nvPr/>
         </p:nvSpPr>
@@ -3944,8 +4213,8 @@
         </p:nvSpPr>
         <p:spPr>
           <a:xfrm>
-            <a:off x="812800" y="6238280"/>
-            <a:ext cx="3459976" cy="238720"/>
+            <a:off x="812800" y="609600"/>
+            <a:ext cx="10883392" cy="238720"/>
           </a:xfrm>
           <a:prstGeom prst="rect">
             <a:avLst/>
@@ -3966,15 +4235,15 @@
               <a:buNone/>
             </a:pPr>
             <a:r>
-              <a:rPr lang="en-US" sz="1200" dirty="0">
-                <a:solidFill>
-                  <a:srgbClr val="55697A"/>
+              <a:rPr lang="en-US" sz="1200" b="1" spc="100" kern="0" dirty="0">
+                <a:solidFill>
+                  <a:srgbClr val="0B6A8F"/>
                 </a:solidFill>
                 <a:latin typeface="IBM Plex Sans" pitchFamily="34" charset="0"/>
                 <a:ea typeface="IBM Plex Sans" pitchFamily="34" charset="-122"/>
                 <a:cs typeface="IBM Plex Sans" pitchFamily="34" charset="-120"/>
               </a:rPr>
-              <a:t>Exploratory Testing Automation · CSE 450 · BUET</a:t>
+              <a:t>PLANNER · IN DETAIL</a:t>
             </a:r>
             <a:endParaRPr lang="en-US" sz="1200" dirty="0"/>
           </a:p>
@@ -3988,8 +4257,8 @@
         </p:nvSpPr>
         <p:spPr>
           <a:xfrm>
-            <a:off x="11196290" y="6238280"/>
-            <a:ext cx="233710" cy="238720"/>
+            <a:off x="812800" y="899120"/>
+            <a:ext cx="10883392" cy="444500"/>
           </a:xfrm>
           <a:prstGeom prst="rect">
             <a:avLst/>
@@ -4005,20 +4274,135 @@
           <a:p>
             <a:pPr algn="l" indent="0" marL="0">
               <a:lnSpc>
+                <a:spcPts val="3300"/>
+              </a:lnSpc>
+              <a:buNone/>
+            </a:pPr>
+            <a:r>
+              <a:rPr lang="en-US" sz="3000" b="1" dirty="0">
+                <a:solidFill>
+                  <a:srgbClr val="14303D"/>
+                </a:solidFill>
+                <a:latin typeface="Source Serif 4" pitchFamily="34" charset="0"/>
+                <a:ea typeface="Source Serif 4" pitchFamily="34" charset="-122"/>
+                <a:cs typeface="Source Serif 4" pitchFamily="34" charset="-120"/>
+              </a:rPr>
+              <a:t>The full planning pipeline</a:t>
+            </a:r>
+            <a:endParaRPr lang="en-US" sz="3000" dirty="0"/>
+          </a:p>
+        </p:txBody>
+      </p:sp>
+      <p:sp>
+        <p:nvSpPr>
+          <p:cNvPr id="4" name="Shape 2"/>
+          <p:cNvSpPr/>
+          <p:nvPr/>
+        </p:nvSpPr>
+        <p:spPr>
+          <a:xfrm>
+            <a:off x="819150" y="1730970"/>
+            <a:ext cx="2019300" cy="1257300"/>
+          </a:xfrm>
+          <a:prstGeom prst="roundRect">
+            <a:avLst>
+              <a:gd name="adj" fmla="val 6566"/>
+            </a:avLst>
+          </a:prstGeom>
+          <a:solidFill>
+            <a:srgbClr val="D3F9D8"/>
+          </a:solidFill>
+          <a:ln w="12700">
+            <a:solidFill>
+              <a:srgbClr val="2F9E44"/>
+            </a:solidFill>
+            <a:prstDash val="solid"/>
+          </a:ln>
+        </p:spPr>
+      </p:sp>
+      <p:sp>
+        <p:nvSpPr>
+          <p:cNvPr id="5" name="Text 3"/>
+          <p:cNvSpPr/>
+          <p:nvPr/>
+        </p:nvSpPr>
+        <p:spPr>
+          <a:xfrm>
+            <a:off x="977900" y="1877020"/>
+            <a:ext cx="1752854" cy="238720"/>
+          </a:xfrm>
+          <a:prstGeom prst="rect">
+            <a:avLst/>
+          </a:prstGeom>
+          <a:noFill/>
+          <a:ln/>
+        </p:spPr>
+        <p:txBody>
+          <a:bodyPr wrap="square" lIns="0" tIns="0" rIns="0" bIns="0" rtlCol="0" anchor="t">
+            <a:normAutofit/>
+          </a:bodyPr>
+          <a:lstStyle/>
+          <a:p>
+            <a:pPr algn="l" indent="0" marL="0">
+              <a:lnSpc>
                 <a:spcPts val="1680"/>
               </a:lnSpc>
               <a:buNone/>
             </a:pPr>
             <a:r>
+              <a:rPr lang="en-US" sz="1200" b="1" dirty="0">
+                <a:solidFill>
+                  <a:srgbClr val="1B5E27"/>
+                </a:solidFill>
+                <a:latin typeface="IBM Plex Mono" pitchFamily="34" charset="0"/>
+                <a:ea typeface="IBM Plex Mono" pitchFamily="34" charset="-122"/>
+                <a:cs typeface="IBM Plex Mono" pitchFamily="34" charset="-120"/>
+              </a:rPr>
+              <a:t>bootstrap_context</a:t>
+            </a:r>
+            <a:endParaRPr lang="en-US" sz="1200" dirty="0"/>
+          </a:p>
+        </p:txBody>
+      </p:sp>
+      <p:sp>
+        <p:nvSpPr>
+          <p:cNvPr id="6" name="Text 4"/>
+          <p:cNvSpPr/>
+          <p:nvPr/>
+        </p:nvSpPr>
+        <p:spPr>
+          <a:xfrm>
+            <a:off x="977900" y="2128441"/>
+            <a:ext cx="1752854" cy="642590"/>
+          </a:xfrm>
+          <a:prstGeom prst="rect">
+            <a:avLst/>
+          </a:prstGeom>
+          <a:noFill/>
+          <a:ln/>
+        </p:spPr>
+        <p:txBody>
+          <a:bodyPr wrap="square" lIns="0" tIns="0" rIns="0" bIns="0" rtlCol="0" anchor="t">
+            <a:normAutofit/>
+          </a:bodyPr>
+          <a:lstStyle/>
+          <a:p>
+            <a:pPr algn="l" indent="0" marL="0">
+              <a:lnSpc>
+                <a:spcPts val="1620"/>
+              </a:lnSpc>
+              <a:buNone/>
+            </a:pPr>
+            <a:r>
               <a:rPr lang="en-US" sz="1200" dirty="0">
                 <a:solidFill>
-                  <a:srgbClr val="55697A"/>
+                  <a:srgbClr val="1B5E27"/>
                 </a:solidFill>
                 <a:latin typeface="IBM Plex Sans" pitchFamily="34" charset="0"/>
                 <a:ea typeface="IBM Plex Sans" pitchFamily="34" charset="-122"/>
                 <a:cs typeface="IBM Plex Sans" pitchFamily="34" charset="-120"/>
               </a:rPr>
-              <a:t>13</a:t>
+              <a:t>1 · loads coverage, tests and findings · no model call</a:t>
             </a:r>
             <a:endParaRPr lang="en-US" sz="1200" dirty="0"/>
           </a:p>
@@ -4026,14 +4410,41 @@
       </p:sp>
       <p:sp>
         <p:nvSpPr>
-          <p:cNvPr id="4" name="Text 2"/>
-          <p:cNvSpPr/>
-          <p:nvPr/>
-        </p:nvSpPr>
-        <p:spPr>
-          <a:xfrm>
-            <a:off x="812800" y="812800"/>
-            <a:ext cx="10883392" cy="238720"/>
+          <p:cNvPr id="7" name="Shape 5"/>
+          <p:cNvSpPr/>
+          <p:nvPr/>
+        </p:nvSpPr>
+        <p:spPr>
+          <a:xfrm>
+            <a:off x="3359150" y="1730970"/>
+            <a:ext cx="2400300" cy="1257300"/>
+          </a:xfrm>
+          <a:prstGeom prst="roundRect">
+            <a:avLst>
+              <a:gd name="adj" fmla="val 6566"/>
+            </a:avLst>
+          </a:prstGeom>
+          <a:solidFill>
+            <a:srgbClr val="FFE3E3"/>
+          </a:solidFill>
+          <a:ln w="12700">
+            <a:solidFill>
+              <a:srgbClr val="E03131"/>
+            </a:solidFill>
+            <a:prstDash val="solid"/>
+          </a:ln>
+        </p:spPr>
+      </p:sp>
+      <p:sp>
+        <p:nvSpPr>
+          <p:cNvPr id="8" name="Text 6"/>
+          <p:cNvSpPr/>
+          <p:nvPr/>
+        </p:nvSpPr>
+        <p:spPr>
+          <a:xfrm>
+            <a:off x="3517900" y="1877020"/>
+            <a:ext cx="2145284" cy="238720"/>
           </a:xfrm>
           <a:prstGeom prst="rect">
             <a:avLst/>
@@ -4054,15 +4465,59 @@
               <a:buNone/>
             </a:pPr>
             <a:r>
-              <a:rPr lang="en-US" sz="1200" b="1" spc="100" kern="0" dirty="0">
-                <a:solidFill>
-                  <a:srgbClr val="0B6A8F"/>
+              <a:rPr lang="en-US" sz="1200" b="1" dirty="0">
+                <a:solidFill>
+                  <a:srgbClr val="8B1A1A"/>
+                </a:solidFill>
+                <a:latin typeface="IBM Plex Mono" pitchFamily="34" charset="0"/>
+                <a:ea typeface="IBM Plex Mono" pitchFamily="34" charset="-122"/>
+                <a:cs typeface="IBM Plex Mono" pitchFamily="34" charset="-120"/>
+              </a:rPr>
+              <a:t>planner_step</a:t>
+            </a:r>
+            <a:endParaRPr lang="en-US" sz="1200" dirty="0"/>
+          </a:p>
+        </p:txBody>
+      </p:sp>
+      <p:sp>
+        <p:nvSpPr>
+          <p:cNvPr id="9" name="Text 7"/>
+          <p:cNvSpPr/>
+          <p:nvPr/>
+        </p:nvSpPr>
+        <p:spPr>
+          <a:xfrm>
+            <a:off x="3517900" y="2128441"/>
+            <a:ext cx="2145284" cy="642590"/>
+          </a:xfrm>
+          <a:prstGeom prst="rect">
+            <a:avLst/>
+          </a:prstGeom>
+          <a:noFill/>
+          <a:ln/>
+        </p:spPr>
+        <p:txBody>
+          <a:bodyPr wrap="square" lIns="0" tIns="0" rIns="0" bIns="0" rtlCol="0" anchor="t">
+            <a:normAutofit/>
+          </a:bodyPr>
+          <a:lstStyle/>
+          <a:p>
+            <a:pPr algn="l" indent="0" marL="0">
+              <a:lnSpc>
+                <a:spcPts val="1620"/>
+              </a:lnSpc>
+              <a:buNone/>
+            </a:pPr>
+            <a:r>
+              <a:rPr lang="en-US" sz="1200" dirty="0">
+                <a:solidFill>
+                  <a:srgbClr val="8B1A1A"/>
                 </a:solidFill>
                 <a:latin typeface="IBM Plex Sans" pitchFamily="34" charset="0"/>
                 <a:ea typeface="IBM Plex Sans" pitchFamily="34" charset="-122"/>
                 <a:cs typeface="IBM Plex Sans" pitchFamily="34" charset="-120"/>
               </a:rPr>
-              <a:t>PLANNER · IN DETAIL</a:t>
+              <a:t>2 · small model call: “what do I still need?” Picks up to 3 lookups.</a:t>
             </a:r>
             <a:endParaRPr lang="en-US" sz="1200" dirty="0"/>
           </a:p>
@@ -4070,73 +4525,697 @@
       </p:sp>
       <p:sp>
         <p:nvSpPr>
-          <p:cNvPr id="5" name="Text 3"/>
-          <p:cNvSpPr/>
-          <p:nvPr/>
-        </p:nvSpPr>
-        <p:spPr>
-          <a:xfrm>
-            <a:off x="812800" y="1102320"/>
-            <a:ext cx="10883392" cy="444500"/>
-          </a:xfrm>
-          <a:prstGeom prst="rect">
-            <a:avLst/>
-          </a:prstGeom>
-          <a:noFill/>
-          <a:ln/>
-        </p:spPr>
-        <p:txBody>
-          <a:bodyPr wrap="square" lIns="0" tIns="0" rIns="0" bIns="0" rtlCol="0" anchor="t">
-            <a:normAutofit/>
-          </a:bodyPr>
-          <a:lstStyle/>
-          <a:p>
-            <a:pPr algn="l" indent="0" marL="0">
-              <a:lnSpc>
-                <a:spcPts val="3300"/>
-              </a:lnSpc>
-              <a:buNone/>
-            </a:pPr>
-            <a:r>
-              <a:rPr lang="en-US" sz="3000" b="1" dirty="0">
-                <a:solidFill>
-                  <a:srgbClr val="14303D"/>
-                </a:solidFill>
-                <a:latin typeface="Source Serif 4" pitchFamily="34" charset="0"/>
-                <a:ea typeface="Source Serif 4" pitchFamily="34" charset="-122"/>
-                <a:cs typeface="Source Serif 4" pitchFamily="34" charset="-120"/>
-              </a:rPr>
-              <a:t>The full planning pipeline</a:t>
-            </a:r>
-            <a:endParaRPr lang="en-US" sz="3000" dirty="0"/>
-          </a:p>
-        </p:txBody>
-      </p:sp>
-      <p:sp>
-        <p:nvSpPr>
-          <p:cNvPr id="6" name="Shape 4"/>
-          <p:cNvSpPr/>
-          <p:nvPr/>
-        </p:nvSpPr>
-        <p:spPr>
-          <a:xfrm>
-            <a:off x="812800" y="1634133"/>
-            <a:ext cx="10566400" cy="2489200"/>
+          <p:cNvPr id="10" name="Shape 8"/>
+          <p:cNvSpPr/>
+          <p:nvPr/>
+        </p:nvSpPr>
+        <p:spPr>
+          <a:xfrm>
+            <a:off x="6280150" y="1730970"/>
+            <a:ext cx="1892300" cy="1257300"/>
           </a:xfrm>
           <a:prstGeom prst="roundRect">
             <a:avLst>
-              <a:gd name="adj" fmla="val 4082"/>
+              <a:gd name="adj" fmla="val 6566"/>
             </a:avLst>
           </a:prstGeom>
           <a:solidFill>
-            <a:srgbClr val="FDFEFE"/>
+            <a:srgbClr val="FFF3BF"/>
           </a:solidFill>
-          <a:ln/>
-        </p:spPr>
+          <a:ln w="12700">
+            <a:solidFill>
+              <a:srgbClr val="F08C00"/>
+            </a:solidFill>
+            <a:prstDash val="solid"/>
+          </a:ln>
+        </p:spPr>
+      </p:sp>
+      <p:sp>
+        <p:nvSpPr>
+          <p:cNvPr id="11" name="Text 9"/>
+          <p:cNvSpPr/>
+          <p:nvPr/>
+        </p:nvSpPr>
+        <p:spPr>
+          <a:xfrm>
+            <a:off x="6438900" y="1877020"/>
+            <a:ext cx="1625600" cy="238720"/>
+          </a:xfrm>
+          <a:prstGeom prst="rect">
+            <a:avLst/>
+          </a:prstGeom>
+          <a:noFill/>
+          <a:ln/>
+        </p:spPr>
+        <p:txBody>
+          <a:bodyPr wrap="square" lIns="0" tIns="0" rIns="0" bIns="0" rtlCol="0" anchor="t">
+            <a:normAutofit/>
+          </a:bodyPr>
+          <a:lstStyle/>
+          <a:p>
+            <a:pPr algn="l" indent="0" marL="0">
+              <a:lnSpc>
+                <a:spcPts val="1680"/>
+              </a:lnSpc>
+              <a:buNone/>
+            </a:pPr>
+            <a:r>
+              <a:rPr lang="en-US" sz="1200" b="1" dirty="0">
+                <a:solidFill>
+                  <a:srgbClr val="7A4A10"/>
+                </a:solidFill>
+                <a:latin typeface="IBM Plex Mono" pitchFamily="34" charset="0"/>
+                <a:ea typeface="IBM Plex Mono" pitchFamily="34" charset="-122"/>
+                <a:cs typeface="IBM Plex Mono" pitchFamily="34" charset="-120"/>
+              </a:rPr>
+              <a:t>should_continue?</a:t>
+            </a:r>
+            <a:endParaRPr lang="en-US" sz="1200" dirty="0"/>
+          </a:p>
+        </p:txBody>
+      </p:sp>
+      <p:sp>
+        <p:nvSpPr>
+          <p:cNvPr id="12" name="Text 10"/>
+          <p:cNvSpPr/>
+          <p:nvPr/>
+        </p:nvSpPr>
+        <p:spPr>
+          <a:xfrm>
+            <a:off x="6438900" y="2128441"/>
+            <a:ext cx="1625600" cy="642590"/>
+          </a:xfrm>
+          <a:prstGeom prst="rect">
+            <a:avLst/>
+          </a:prstGeom>
+          <a:noFill/>
+          <a:ln/>
+        </p:spPr>
+        <p:txBody>
+          <a:bodyPr wrap="square" lIns="0" tIns="0" rIns="0" bIns="0" rtlCol="0" anchor="t">
+            <a:normAutofit/>
+          </a:bodyPr>
+          <a:lstStyle/>
+          <a:p>
+            <a:pPr algn="l" indent="0" marL="0">
+              <a:lnSpc>
+                <a:spcPts val="1620"/>
+              </a:lnSpc>
+              <a:buNone/>
+            </a:pPr>
+            <a:r>
+              <a:rPr lang="en-US" sz="1200" dirty="0">
+                <a:solidFill>
+                  <a:srgbClr val="7A4A10"/>
+                </a:solidFill>
+                <a:latin typeface="IBM Plex Sans" pitchFamily="34" charset="0"/>
+                <a:ea typeface="IBM Plex Sans" pitchFamily="34" charset="-122"/>
+                <a:cs typeface="IBM Plex Sans" pitchFamily="34" charset="-120"/>
+              </a:rPr>
+              <a:t>3 · write when ready, after 2 rounds, or nothing new</a:t>
+            </a:r>
+            <a:endParaRPr lang="en-US" sz="1200" dirty="0"/>
+          </a:p>
+        </p:txBody>
+      </p:sp>
+      <p:sp>
+        <p:nvSpPr>
+          <p:cNvPr id="13" name="Shape 11"/>
+          <p:cNvSpPr/>
+          <p:nvPr/>
+        </p:nvSpPr>
+        <p:spPr>
+          <a:xfrm>
+            <a:off x="8693150" y="1730970"/>
+            <a:ext cx="2679700" cy="1257300"/>
+          </a:xfrm>
+          <a:prstGeom prst="roundRect">
+            <a:avLst>
+              <a:gd name="adj" fmla="val 6566"/>
+            </a:avLst>
+          </a:prstGeom>
+          <a:solidFill>
+            <a:srgbClr val="FFE3E3"/>
+          </a:solidFill>
+          <a:ln w="12700">
+            <a:solidFill>
+              <a:srgbClr val="E03131"/>
+            </a:solidFill>
+            <a:prstDash val="solid"/>
+          </a:ln>
+        </p:spPr>
+      </p:sp>
+      <p:sp>
+        <p:nvSpPr>
+          <p:cNvPr id="14" name="Text 12"/>
+          <p:cNvSpPr/>
+          <p:nvPr/>
+        </p:nvSpPr>
+        <p:spPr>
+          <a:xfrm>
+            <a:off x="8851900" y="1877020"/>
+            <a:ext cx="2433066" cy="238720"/>
+          </a:xfrm>
+          <a:prstGeom prst="rect">
+            <a:avLst/>
+          </a:prstGeom>
+          <a:noFill/>
+          <a:ln/>
+        </p:spPr>
+        <p:txBody>
+          <a:bodyPr wrap="square" lIns="0" tIns="0" rIns="0" bIns="0" rtlCol="0" anchor="t">
+            <a:normAutofit/>
+          </a:bodyPr>
+          <a:lstStyle/>
+          <a:p>
+            <a:pPr algn="l" indent="0" marL="0">
+              <a:lnSpc>
+                <a:spcPts val="1680"/>
+              </a:lnSpc>
+              <a:buNone/>
+            </a:pPr>
+            <a:r>
+              <a:rPr lang="en-US" sz="1200" b="1" dirty="0">
+                <a:solidFill>
+                  <a:srgbClr val="8B1A1A"/>
+                </a:solidFill>
+                <a:latin typeface="IBM Plex Mono" pitchFamily="34" charset="0"/>
+                <a:ea typeface="IBM Plex Mono" pitchFamily="34" charset="-122"/>
+                <a:cs typeface="IBM Plex Mono" pitchFamily="34" charset="-120"/>
+              </a:rPr>
+              <a:t>generate_testcase</a:t>
+            </a:r>
+            <a:endParaRPr lang="en-US" sz="1200" dirty="0"/>
+          </a:p>
+        </p:txBody>
+      </p:sp>
+      <p:sp>
+        <p:nvSpPr>
+          <p:cNvPr id="15" name="Text 13"/>
+          <p:cNvSpPr/>
+          <p:nvPr/>
+        </p:nvSpPr>
+        <p:spPr>
+          <a:xfrm>
+            <a:off x="8851900" y="2128441"/>
+            <a:ext cx="2433066" cy="436860"/>
+          </a:xfrm>
+          <a:prstGeom prst="rect">
+            <a:avLst/>
+          </a:prstGeom>
+          <a:noFill/>
+          <a:ln/>
+        </p:spPr>
+        <p:txBody>
+          <a:bodyPr wrap="square" lIns="0" tIns="0" rIns="0" bIns="0" rtlCol="0" anchor="t">
+            <a:normAutofit/>
+          </a:bodyPr>
+          <a:lstStyle/>
+          <a:p>
+            <a:pPr algn="l" indent="0" marL="0">
+              <a:lnSpc>
+                <a:spcPts val="1620"/>
+              </a:lnSpc>
+              <a:buNone/>
+            </a:pPr>
+            <a:r>
+              <a:rPr lang="en-US" sz="1200" dirty="0">
+                <a:solidFill>
+                  <a:srgbClr val="8B1A1A"/>
+                </a:solidFill>
+                <a:latin typeface="IBM Plex Sans" pitchFamily="34" charset="0"/>
+                <a:ea typeface="IBM Plex Sans" pitchFamily="34" charset="-122"/>
+                <a:cs typeface="IBM Plex Sans" pitchFamily="34" charset="-120"/>
+              </a:rPr>
+              <a:t>4 · large model call · writes the test as JSON</a:t>
+            </a:r>
+            <a:endParaRPr lang="en-US" sz="1200" dirty="0"/>
+          </a:p>
+        </p:txBody>
+      </p:sp>
+      <p:sp>
+        <p:nvSpPr>
+          <p:cNvPr id="16" name="Shape 14"/>
+          <p:cNvSpPr/>
+          <p:nvPr/>
+        </p:nvSpPr>
+        <p:spPr>
+          <a:xfrm>
+            <a:off x="3359150" y="3318470"/>
+            <a:ext cx="4813300" cy="1066800"/>
+          </a:xfrm>
+          <a:prstGeom prst="roundRect">
+            <a:avLst>
+              <a:gd name="adj" fmla="val 7738"/>
+            </a:avLst>
+          </a:prstGeom>
+          <a:solidFill>
+            <a:srgbClr val="D0EBFF"/>
+          </a:solidFill>
+          <a:ln w="12700">
+            <a:solidFill>
+              <a:srgbClr val="1971C2"/>
+            </a:solidFill>
+            <a:prstDash val="solid"/>
+          </a:ln>
+        </p:spPr>
+      </p:sp>
+      <p:sp>
+        <p:nvSpPr>
+          <p:cNvPr id="17" name="Text 15"/>
+          <p:cNvSpPr/>
+          <p:nvPr/>
+        </p:nvSpPr>
+        <p:spPr>
+          <a:xfrm>
+            <a:off x="3543300" y="3451820"/>
+            <a:ext cx="4578350" cy="238720"/>
+          </a:xfrm>
+          <a:prstGeom prst="rect">
+            <a:avLst/>
+          </a:prstGeom>
+          <a:noFill/>
+          <a:ln/>
+        </p:spPr>
+        <p:txBody>
+          <a:bodyPr wrap="square" lIns="0" tIns="0" rIns="0" bIns="0" rtlCol="0" anchor="t">
+            <a:normAutofit/>
+          </a:bodyPr>
+          <a:lstStyle/>
+          <a:p>
+            <a:pPr algn="l" indent="0" marL="0">
+              <a:lnSpc>
+                <a:spcPts val="1680"/>
+              </a:lnSpc>
+              <a:buNone/>
+            </a:pPr>
+            <a:r>
+              <a:rPr lang="en-US" sz="1200" b="1" dirty="0">
+                <a:solidFill>
+                  <a:srgbClr val="0B4A87"/>
+                </a:solidFill>
+                <a:latin typeface="IBM Plex Sans" pitchFamily="34" charset="0"/>
+                <a:ea typeface="IBM Plex Sans" pitchFamily="34" charset="-122"/>
+                <a:cs typeface="IBM Plex Sans" pitchFamily="34" charset="-120"/>
+              </a:rPr>
+              <a:t>execute_retrieval · the planner's tools</a:t>
+            </a:r>
+            <a:endParaRPr lang="en-US" sz="1200" dirty="0"/>
+          </a:p>
+        </p:txBody>
+      </p:sp>
+      <p:sp>
+        <p:nvSpPr>
+          <p:cNvPr id="18" name="Text 16"/>
+          <p:cNvSpPr/>
+          <p:nvPr/>
+        </p:nvSpPr>
+        <p:spPr>
+          <a:xfrm>
+            <a:off x="3543300" y="3703241"/>
+            <a:ext cx="4578350" cy="436860"/>
+          </a:xfrm>
+          <a:prstGeom prst="rect">
+            <a:avLst/>
+          </a:prstGeom>
+          <a:noFill/>
+          <a:ln/>
+        </p:spPr>
+        <p:txBody>
+          <a:bodyPr wrap="square" lIns="0" tIns="0" rIns="0" bIns="0" rtlCol="0" anchor="t">
+            <a:normAutofit/>
+          </a:bodyPr>
+          <a:lstStyle/>
+          <a:p>
+            <a:pPr algn="l" indent="0" marL="0">
+              <a:lnSpc>
+                <a:spcPts val="1620"/>
+              </a:lnSpc>
+              <a:buNone/>
+            </a:pPr>
+            <a:r>
+              <a:rPr lang="en-US" sz="1200" dirty="0">
+                <a:solidFill>
+                  <a:srgbClr val="0B4A87"/>
+                </a:solidFill>
+                <a:latin typeface="IBM Plex Sans" pitchFamily="34" charset="0"/>
+                <a:ea typeface="IBM Plex Sans" pitchFamily="34" charset="-122"/>
+                <a:cs typeface="IBM Plex Sans" pitchFamily="34" charset="-120"/>
+              </a:rPr>
+              <a:t>no model call · srs: search the spec · live_ui: a screen already seen · navtree: a route to it · defects: past failures there</a:t>
+            </a:r>
+            <a:endParaRPr lang="en-US" sz="1200" dirty="0"/>
+          </a:p>
+        </p:txBody>
+      </p:sp>
+      <p:sp>
+        <p:nvSpPr>
+          <p:cNvPr id="19" name="Shape 17"/>
+          <p:cNvSpPr/>
+          <p:nvPr/>
+        </p:nvSpPr>
+        <p:spPr>
+          <a:xfrm>
+            <a:off x="8693150" y="4651970"/>
+            <a:ext cx="2679700" cy="876300"/>
+          </a:xfrm>
+          <a:prstGeom prst="roundRect">
+            <a:avLst>
+              <a:gd name="adj" fmla="val 9420"/>
+            </a:avLst>
+          </a:prstGeom>
+          <a:solidFill>
+            <a:srgbClr val="FFF3BF"/>
+          </a:solidFill>
+          <a:ln w="12700">
+            <a:solidFill>
+              <a:srgbClr val="F08C00"/>
+            </a:solidFill>
+            <a:prstDash val="solid"/>
+          </a:ln>
+        </p:spPr>
+      </p:sp>
+      <p:sp>
+        <p:nvSpPr>
+          <p:cNvPr id="20" name="Text 18"/>
+          <p:cNvSpPr/>
+          <p:nvPr/>
+        </p:nvSpPr>
+        <p:spPr>
+          <a:xfrm>
+            <a:off x="8851900" y="4785320"/>
+            <a:ext cx="2433066" cy="220514"/>
+          </a:xfrm>
+          <a:prstGeom prst="rect">
+            <a:avLst/>
+          </a:prstGeom>
+          <a:noFill/>
+          <a:ln/>
+        </p:spPr>
+        <p:txBody>
+          <a:bodyPr wrap="square" lIns="0" tIns="0" rIns="0" bIns="0" rtlCol="0" anchor="t">
+            <a:normAutofit/>
+          </a:bodyPr>
+          <a:lstStyle/>
+          <a:p>
+            <a:pPr algn="l" indent="0" marL="0">
+              <a:lnSpc>
+                <a:spcPts val="1570"/>
+              </a:lnSpc>
+              <a:buNone/>
+            </a:pPr>
+            <a:r>
+              <a:rPr lang="en-US" sz="1121" b="1" dirty="0">
+                <a:solidFill>
+                  <a:srgbClr val="7A4A10"/>
+                </a:solidFill>
+                <a:latin typeface="IBM Plex Mono" pitchFamily="34" charset="0"/>
+                <a:ea typeface="IBM Plex Mono" pitchFamily="34" charset="-122"/>
+                <a:cs typeface="IBM Plex Mono" pitchFamily="34" charset="-120"/>
+              </a:rPr>
+              <a:t>duplicate_check</a:t>
+            </a:r>
+            <a:endParaRPr lang="en-US" sz="1121" dirty="0"/>
+          </a:p>
+        </p:txBody>
+      </p:sp>
+      <p:sp>
+        <p:nvSpPr>
+          <p:cNvPr id="21" name="Text 19"/>
+          <p:cNvSpPr/>
+          <p:nvPr/>
+        </p:nvSpPr>
+        <p:spPr>
+          <a:xfrm>
+            <a:off x="8851900" y="5018534"/>
+            <a:ext cx="2433066" cy="401786"/>
+          </a:xfrm>
+          <a:prstGeom prst="rect">
+            <a:avLst/>
+          </a:prstGeom>
+          <a:noFill/>
+          <a:ln/>
+        </p:spPr>
+        <p:txBody>
+          <a:bodyPr wrap="square" lIns="0" tIns="0" rIns="0" bIns="0" rtlCol="0" anchor="t">
+            <a:normAutofit/>
+          </a:bodyPr>
+          <a:lstStyle/>
+          <a:p>
+            <a:pPr algn="l" indent="0" marL="0">
+              <a:lnSpc>
+                <a:spcPts val="1483"/>
+              </a:lnSpc>
+              <a:buNone/>
+            </a:pPr>
+            <a:r>
+              <a:rPr lang="en-US" sz="1099" dirty="0">
+                <a:solidFill>
+                  <a:srgbClr val="7A4A10"/>
+                </a:solidFill>
+                <a:latin typeface="IBM Plex Sans" pitchFamily="34" charset="0"/>
+                <a:ea typeface="IBM Plex Sans" pitchFamily="34" charset="-122"/>
+                <a:cs typeface="IBM Plex Sans" pitchFamily="34" charset="-120"/>
+              </a:rPr>
+              <a:t>5 · wording and meaning against every earlier test</a:t>
+            </a:r>
+            <a:endParaRPr lang="en-US" sz="1099" dirty="0"/>
+          </a:p>
+        </p:txBody>
+      </p:sp>
+      <p:sp>
+        <p:nvSpPr>
+          <p:cNvPr id="22" name="Shape 20"/>
+          <p:cNvSpPr/>
+          <p:nvPr/>
+        </p:nvSpPr>
+        <p:spPr>
+          <a:xfrm>
+            <a:off x="3994150" y="4651970"/>
+            <a:ext cx="3035300" cy="876300"/>
+          </a:xfrm>
+          <a:prstGeom prst="roundRect">
+            <a:avLst>
+              <a:gd name="adj" fmla="val 9420"/>
+            </a:avLst>
+          </a:prstGeom>
+          <a:solidFill>
+            <a:srgbClr val="FFE3E3"/>
+          </a:solidFill>
+          <a:ln w="12700">
+            <a:solidFill>
+              <a:srgbClr val="E03131"/>
+            </a:solidFill>
+            <a:prstDash val="solid"/>
+          </a:ln>
+        </p:spPr>
+      </p:sp>
+      <p:sp>
+        <p:nvSpPr>
+          <p:cNvPr id="23" name="Text 21"/>
+          <p:cNvSpPr/>
+          <p:nvPr/>
+        </p:nvSpPr>
+        <p:spPr>
+          <a:xfrm>
+            <a:off x="4152900" y="4785320"/>
+            <a:ext cx="2799334" cy="220514"/>
+          </a:xfrm>
+          <a:prstGeom prst="rect">
+            <a:avLst/>
+          </a:prstGeom>
+          <a:noFill/>
+          <a:ln/>
+        </p:spPr>
+        <p:txBody>
+          <a:bodyPr wrap="square" lIns="0" tIns="0" rIns="0" bIns="0" rtlCol="0" anchor="t">
+            <a:normAutofit/>
+          </a:bodyPr>
+          <a:lstStyle/>
+          <a:p>
+            <a:pPr algn="l" indent="0" marL="0">
+              <a:lnSpc>
+                <a:spcPts val="1570"/>
+              </a:lnSpc>
+              <a:buNone/>
+            </a:pPr>
+            <a:r>
+              <a:rPr lang="en-US" sz="1121" b="1" dirty="0">
+                <a:solidFill>
+                  <a:srgbClr val="8B1A1A"/>
+                </a:solidFill>
+                <a:latin typeface="IBM Plex Sans" pitchFamily="34" charset="0"/>
+                <a:ea typeface="IBM Plex Sans" pitchFamily="34" charset="-122"/>
+                <a:cs typeface="IBM Plex Sans" pitchFamily="34" charset="-120"/>
+              </a:rPr>
+              <a:t>One more model call</a:t>
+            </a:r>
+            <a:endParaRPr lang="en-US" sz="1121" dirty="0"/>
+          </a:p>
+        </p:txBody>
+      </p:sp>
+      <p:sp>
+        <p:nvSpPr>
+          <p:cNvPr id="24" name="Text 22"/>
+          <p:cNvSpPr/>
+          <p:nvPr/>
+        </p:nvSpPr>
+        <p:spPr>
+          <a:xfrm>
+            <a:off x="4152900" y="5018534"/>
+            <a:ext cx="2799334" cy="401786"/>
+          </a:xfrm>
+          <a:prstGeom prst="rect">
+            <a:avLst/>
+          </a:prstGeom>
+          <a:noFill/>
+          <a:ln/>
+        </p:spPr>
+        <p:txBody>
+          <a:bodyPr wrap="square" lIns="0" tIns="0" rIns="0" bIns="0" rtlCol="0" anchor="t">
+            <a:normAutofit/>
+          </a:bodyPr>
+          <a:lstStyle/>
+          <a:p>
+            <a:pPr algn="l" indent="0" marL="0">
+              <a:lnSpc>
+                <a:spcPts val="1483"/>
+              </a:lnSpc>
+              <a:buNone/>
+            </a:pPr>
+            <a:r>
+              <a:rPr lang="en-US" sz="1099" dirty="0">
+                <a:solidFill>
+                  <a:srgbClr val="8B1A1A"/>
+                </a:solidFill>
+                <a:latin typeface="IBM Plex Sans" pitchFamily="34" charset="0"/>
+                <a:ea typeface="IBM Plex Sans" pitchFamily="34" charset="-122"/>
+                <a:cs typeface="IBM Plex Sans" pitchFamily="34" charset="-120"/>
+              </a:rPr>
+              <a:t>rewrite with other screens; similar titles blocked</a:t>
+            </a:r>
+            <a:endParaRPr lang="en-US" sz="1099" dirty="0"/>
+          </a:p>
+        </p:txBody>
+      </p:sp>
+      <p:sp>
+        <p:nvSpPr>
+          <p:cNvPr id="25" name="Shape 23"/>
+          <p:cNvSpPr/>
+          <p:nvPr/>
+        </p:nvSpPr>
+        <p:spPr>
+          <a:xfrm>
+            <a:off x="819150" y="4651970"/>
+            <a:ext cx="2654300" cy="876300"/>
+          </a:xfrm>
+          <a:prstGeom prst="roundRect">
+            <a:avLst>
+              <a:gd name="adj" fmla="val 9420"/>
+            </a:avLst>
+          </a:prstGeom>
+          <a:solidFill>
+            <a:srgbClr val="D3F9D8"/>
+          </a:solidFill>
+          <a:ln w="12700">
+            <a:solidFill>
+              <a:srgbClr val="2F9E44"/>
+            </a:solidFill>
+            <a:prstDash val="solid"/>
+          </a:ln>
+        </p:spPr>
+      </p:sp>
+      <p:sp>
+        <p:nvSpPr>
+          <p:cNvPr id="26" name="Text 24"/>
+          <p:cNvSpPr/>
+          <p:nvPr/>
+        </p:nvSpPr>
+        <p:spPr>
+          <a:xfrm>
+            <a:off x="977900" y="4785320"/>
+            <a:ext cx="2406904" cy="220514"/>
+          </a:xfrm>
+          <a:prstGeom prst="rect">
+            <a:avLst/>
+          </a:prstGeom>
+          <a:noFill/>
+          <a:ln/>
+        </p:spPr>
+        <p:txBody>
+          <a:bodyPr wrap="square" lIns="0" tIns="0" rIns="0" bIns="0" rtlCol="0" anchor="t">
+            <a:normAutofit/>
+          </a:bodyPr>
+          <a:lstStyle/>
+          <a:p>
+            <a:pPr algn="l" indent="0" marL="0">
+              <a:lnSpc>
+                <a:spcPts val="1570"/>
+              </a:lnSpc>
+              <a:buNone/>
+            </a:pPr>
+            <a:r>
+              <a:rPr lang="en-US" sz="1121" b="1" dirty="0">
+                <a:solidFill>
+                  <a:srgbClr val="1B5E27"/>
+                </a:solidFill>
+                <a:latin typeface="IBM Plex Sans" pitchFamily="34" charset="0"/>
+                <a:ea typeface="IBM Plex Sans" pitchFamily="34" charset="-122"/>
+                <a:cs typeface="IBM Plex Sans" pitchFamily="34" charset="-120"/>
+              </a:rPr>
+              <a:t>6 · Auto-log to Neo4j</a:t>
+            </a:r>
+            <a:endParaRPr lang="en-US" sz="1121" dirty="0"/>
+          </a:p>
+        </p:txBody>
+      </p:sp>
+      <p:sp>
+        <p:nvSpPr>
+          <p:cNvPr id="27" name="Text 25"/>
+          <p:cNvSpPr/>
+          <p:nvPr/>
+        </p:nvSpPr>
+        <p:spPr>
+          <a:xfrm>
+            <a:off x="977900" y="5018534"/>
+            <a:ext cx="2406904" cy="401786"/>
+          </a:xfrm>
+          <a:prstGeom prst="rect">
+            <a:avLst/>
+          </a:prstGeom>
+          <a:noFill/>
+          <a:ln/>
+        </p:spPr>
+        <p:txBody>
+          <a:bodyPr wrap="square" lIns="0" tIns="0" rIns="0" bIns="0" rtlCol="0" anchor="t">
+            <a:normAutofit/>
+          </a:bodyPr>
+          <a:lstStyle/>
+          <a:p>
+            <a:pPr algn="l" indent="0" marL="0">
+              <a:lnSpc>
+                <a:spcPts val="1483"/>
+              </a:lnSpc>
+              <a:buNone/>
+            </a:pPr>
+            <a:r>
+              <a:rPr lang="en-US" sz="1099" dirty="0">
+                <a:solidFill>
+                  <a:srgbClr val="1B5E27"/>
+                </a:solidFill>
+                <a:latin typeface="IBM Plex Sans" pitchFamily="34" charset="0"/>
+                <a:ea typeface="IBM Plex Sans" pitchFamily="34" charset="-122"/>
+                <a:cs typeface="IBM Plex Sans" pitchFamily="34" charset="-120"/>
+              </a:rPr>
+              <a:t>stored as planned, then handed to the executor</a:t>
+            </a:r>
+            <a:endParaRPr lang="en-US" sz="1099" dirty="0"/>
+          </a:p>
+        </p:txBody>
       </p:sp>
       <p:pic>
         <p:nvPicPr>
-          <p:cNvPr id="7" name="Image 0" descr="Planner pipeline, left to right: bootstrap_context, planner_step, a should_continue decision that loops through execute_retrieval, shown in blue as the planner's tools with its four sources srs, live_ui, navtree and defects, then generate_testcase, duplicate_check with a retry path, auto-log to Neo4j, and return to the executor">    </p:cNvPr>
+          <p:cNvPr id="28" name="Image 0" descr="connector">    </p:cNvPr>
           <p:cNvPicPr>
             <a:picLocks noChangeAspect="1"/>
           </p:cNvPicPr>
@@ -4144,82 +5223,259 @@
         </p:nvPicPr>
         <p:blipFill>
           <a:blip r:embed="rId1"/>
-          <a:stretch>
-            <a:fillRect/>
-          </a:stretch>
+          <a:srcRect l="0" r="0" t="0" b="0"/>
+          <a:stretch/>
         </p:blipFill>
         <p:spPr>
           <a:xfrm>
-            <a:off x="819150" y="1745219"/>
-            <a:ext cx="10553700" cy="2267028"/>
+            <a:off x="2794000" y="2308820"/>
+            <a:ext cx="609600" cy="101600"/>
           </a:xfrm>
           <a:prstGeom prst="rect">
             <a:avLst/>
           </a:prstGeom>
         </p:spPr>
       </p:pic>
-      <p:sp>
-        <p:nvSpPr>
-          <p:cNvPr id="8" name="Shape 5"/>
-          <p:cNvSpPr/>
-          <p:nvPr/>
-        </p:nvSpPr>
-        <p:spPr>
-          <a:xfrm>
-            <a:off x="815975" y="1637308"/>
-            <a:ext cx="10560050" cy="2482850"/>
-          </a:xfrm>
-          <a:prstGeom prst="roundRect">
-            <a:avLst>
-              <a:gd name="adj" fmla="val 3964"/>
-            </a:avLst>
-          </a:prstGeom>
-          <a:noFill/>
-          <a:ln w="6350">
-            <a:solidFill>
-              <a:srgbClr val="D6E1E6"/>
-            </a:solidFill>
-            <a:prstDash val="solid"/>
-          </a:ln>
-        </p:spPr>
-      </p:sp>
-      <p:sp>
-        <p:nvSpPr>
-          <p:cNvPr id="9" name="Shape 6"/>
-          <p:cNvSpPr/>
-          <p:nvPr/>
-        </p:nvSpPr>
-        <p:spPr>
-          <a:xfrm>
-            <a:off x="815975" y="4219575"/>
-            <a:ext cx="2540000" cy="1498600"/>
-          </a:xfrm>
-          <a:prstGeom prst="roundRect">
-            <a:avLst>
-              <a:gd name="adj" fmla="val 6568"/>
-            </a:avLst>
-          </a:prstGeom>
-          <a:solidFill>
-            <a:srgbClr val="FDFEFE"/>
-          </a:solidFill>
-          <a:ln w="6350">
-            <a:solidFill>
-              <a:srgbClr val="D6E1E6"/>
-            </a:solidFill>
-            <a:prstDash val="solid"/>
-          </a:ln>
-        </p:spPr>
-      </p:sp>
-      <p:sp>
-        <p:nvSpPr>
-          <p:cNvPr id="10" name="Text 7"/>
-          <p:cNvSpPr/>
-          <p:nvPr/>
-        </p:nvSpPr>
-        <p:spPr>
-          <a:xfrm>
-            <a:off x="996950" y="4400550"/>
-            <a:ext cx="2243392" cy="256530"/>
+      <p:pic>
+        <p:nvPicPr>
+          <p:cNvPr id="29" name="Image 1" descr="connector">    </p:cNvPr>
+          <p:cNvPicPr>
+            <a:picLocks noChangeAspect="1"/>
+          </p:cNvPicPr>
+          <p:nvPr/>
+        </p:nvPicPr>
+        <p:blipFill>
+          <a:blip r:embed="rId2"/>
+          <a:srcRect l="0" r="0" t="0" b="0"/>
+          <a:stretch/>
+        </p:blipFill>
+        <p:spPr>
+          <a:xfrm>
+            <a:off x="5715000" y="2308820"/>
+            <a:ext cx="609600" cy="101600"/>
+          </a:xfrm>
+          <a:prstGeom prst="rect">
+            <a:avLst/>
+          </a:prstGeom>
+        </p:spPr>
+      </p:pic>
+      <p:pic>
+        <p:nvPicPr>
+          <p:cNvPr id="30" name="Image 2" descr="connector">    </p:cNvPr>
+          <p:cNvPicPr>
+            <a:picLocks noChangeAspect="1"/>
+          </p:cNvPicPr>
+          <p:nvPr/>
+        </p:nvPicPr>
+        <p:blipFill>
+          <a:blip r:embed="rId3"/>
+          <a:srcRect l="0" r="0" t="0" b="0"/>
+          <a:stretch/>
+        </p:blipFill>
+        <p:spPr>
+          <a:xfrm>
+            <a:off x="8128000" y="2308820"/>
+            <a:ext cx="609600" cy="101600"/>
+          </a:xfrm>
+          <a:prstGeom prst="rect">
+            <a:avLst/>
+          </a:prstGeom>
+        </p:spPr>
+      </p:pic>
+      <p:pic>
+        <p:nvPicPr>
+          <p:cNvPr id="31" name="Image 3" descr="connector">    </p:cNvPr>
+          <p:cNvPicPr>
+            <a:picLocks noChangeAspect="1"/>
+          </p:cNvPicPr>
+          <p:nvPr/>
+        </p:nvPicPr>
+        <p:blipFill>
+          <a:blip r:embed="rId4"/>
+          <a:srcRect l="0" r="0" t="0" b="0"/>
+          <a:stretch/>
+        </p:blipFill>
+        <p:spPr>
+          <a:xfrm>
+            <a:off x="7175500" y="2943820"/>
+            <a:ext cx="101600" cy="419100"/>
+          </a:xfrm>
+          <a:prstGeom prst="rect">
+            <a:avLst/>
+          </a:prstGeom>
+        </p:spPr>
+      </p:pic>
+      <p:pic>
+        <p:nvPicPr>
+          <p:cNvPr id="32" name="Image 4" descr="connector">    </p:cNvPr>
+          <p:cNvPicPr>
+            <a:picLocks noChangeAspect="1"/>
+          </p:cNvPicPr>
+          <p:nvPr/>
+        </p:nvPicPr>
+        <p:blipFill>
+          <a:blip r:embed="rId5"/>
+          <a:srcRect l="0" r="0" t="0" b="0"/>
+          <a:stretch/>
+        </p:blipFill>
+        <p:spPr>
+          <a:xfrm>
+            <a:off x="4508500" y="2943820"/>
+            <a:ext cx="101600" cy="419100"/>
+          </a:xfrm>
+          <a:prstGeom prst="rect">
+            <a:avLst/>
+          </a:prstGeom>
+        </p:spPr>
+      </p:pic>
+      <p:pic>
+        <p:nvPicPr>
+          <p:cNvPr id="33" name="Image 5" descr="connector">    </p:cNvPr>
+          <p:cNvPicPr>
+            <a:picLocks noChangeAspect="1"/>
+          </p:cNvPicPr>
+          <p:nvPr/>
+        </p:nvPicPr>
+        <p:blipFill>
+          <a:blip r:embed="rId6"/>
+          <a:srcRect l="0" r="0" t="0" b="0"/>
+          <a:stretch/>
+        </p:blipFill>
+        <p:spPr>
+          <a:xfrm>
+            <a:off x="9982200" y="2943820"/>
+            <a:ext cx="101600" cy="1752600"/>
+          </a:xfrm>
+          <a:prstGeom prst="rect">
+            <a:avLst/>
+          </a:prstGeom>
+        </p:spPr>
+      </p:pic>
+      <p:pic>
+        <p:nvPicPr>
+          <p:cNvPr id="34" name="Image 6" descr="connector">    </p:cNvPr>
+          <p:cNvPicPr>
+            <a:picLocks noChangeAspect="1"/>
+          </p:cNvPicPr>
+          <p:nvPr/>
+        </p:nvPicPr>
+        <p:blipFill>
+          <a:blip r:embed="rId7"/>
+          <a:srcRect l="0" r="0" t="0" b="0"/>
+          <a:stretch/>
+        </p:blipFill>
+        <p:spPr>
+          <a:xfrm>
+            <a:off x="6985000" y="5039320"/>
+            <a:ext cx="1752600" cy="101600"/>
+          </a:xfrm>
+          <a:prstGeom prst="rect">
+            <a:avLst/>
+          </a:prstGeom>
+        </p:spPr>
+      </p:pic>
+      <p:pic>
+        <p:nvPicPr>
+          <p:cNvPr id="35" name="Image 7" descr="connector">    </p:cNvPr>
+          <p:cNvPicPr>
+            <a:picLocks noChangeAspect="1"/>
+          </p:cNvPicPr>
+          <p:nvPr/>
+        </p:nvPicPr>
+        <p:blipFill>
+          <a:blip r:embed="rId8"/>
+          <a:srcRect l="0" r="0" t="0" b="0"/>
+          <a:stretch/>
+        </p:blipFill>
+        <p:spPr>
+          <a:xfrm>
+            <a:off x="3429000" y="5039320"/>
+            <a:ext cx="609600" cy="101600"/>
+          </a:xfrm>
+          <a:prstGeom prst="rect">
+            <a:avLst/>
+          </a:prstGeom>
+        </p:spPr>
+      </p:pic>
+      <p:pic>
+        <p:nvPicPr>
+          <p:cNvPr id="36" name="Image 8" descr="connector">    </p:cNvPr>
+          <p:cNvPicPr>
+            <a:picLocks noChangeAspect="1"/>
+          </p:cNvPicPr>
+          <p:nvPr/>
+        </p:nvPicPr>
+        <p:blipFill>
+          <a:blip r:embed="rId9"/>
+          <a:srcRect l="0" r="0" t="0" b="0"/>
+          <a:stretch/>
+        </p:blipFill>
+        <p:spPr>
+          <a:xfrm>
+            <a:off x="9982200" y="5483820"/>
+            <a:ext cx="101600" cy="419100"/>
+          </a:xfrm>
+          <a:prstGeom prst="rect">
+            <a:avLst/>
+          </a:prstGeom>
+        </p:spPr>
+      </p:pic>
+      <p:pic>
+        <p:nvPicPr>
+          <p:cNvPr id="37" name="Image 9" descr="connector">    </p:cNvPr>
+          <p:cNvPicPr>
+            <a:picLocks noChangeAspect="1"/>
+          </p:cNvPicPr>
+          <p:nvPr/>
+        </p:nvPicPr>
+        <p:blipFill>
+          <a:blip r:embed="rId10"/>
+          <a:srcRect l="0" r="0" t="0" b="0"/>
+          <a:stretch/>
+        </p:blipFill>
+        <p:spPr>
+          <a:xfrm>
+            <a:off x="2095500" y="5801320"/>
+            <a:ext cx="7988300" cy="101600"/>
+          </a:xfrm>
+          <a:prstGeom prst="rect">
+            <a:avLst/>
+          </a:prstGeom>
+        </p:spPr>
+      </p:pic>
+      <p:pic>
+        <p:nvPicPr>
+          <p:cNvPr id="38" name="Image 10" descr="connector">    </p:cNvPr>
+          <p:cNvPicPr>
+            <a:picLocks noChangeAspect="1"/>
+          </p:cNvPicPr>
+          <p:nvPr/>
+        </p:nvPicPr>
+        <p:blipFill>
+          <a:blip r:embed="rId11"/>
+          <a:srcRect l="0" r="0" t="0" b="0"/>
+          <a:stretch/>
+        </p:blipFill>
+        <p:spPr>
+          <a:xfrm>
+            <a:off x="2095500" y="5483820"/>
+            <a:ext cx="101600" cy="419100"/>
+          </a:xfrm>
+          <a:prstGeom prst="rect">
+            <a:avLst/>
+          </a:prstGeom>
+        </p:spPr>
+      </p:pic>
+      <p:sp>
+        <p:nvSpPr>
+          <p:cNvPr id="39" name="Text 26"/>
+          <p:cNvSpPr/>
+          <p:nvPr/>
+        </p:nvSpPr>
+        <p:spPr>
+          <a:xfrm>
+            <a:off x="7302500" y="3051770"/>
+            <a:ext cx="1320800" cy="228054"/>
           </a:xfrm>
           <a:prstGeom prst="rect">
             <a:avLst/>
@@ -4235,35 +5491,35 @@
           <a:p>
             <a:pPr algn="l" indent="0" marL="0">
               <a:lnSpc>
-                <a:spcPts val="1820"/>
-              </a:lnSpc>
-              <a:buNone/>
-            </a:pPr>
-            <a:r>
-              <a:rPr lang="en-US" sz="1400" b="1" dirty="0">
-                <a:solidFill>
-                  <a:srgbClr val="1B5E27"/>
+                <a:spcPts val="1596"/>
+              </a:lnSpc>
+              <a:buNone/>
+            </a:pPr>
+            <a:r>
+              <a:rPr lang="en-US" sz="1200" b="1" dirty="0">
+                <a:solidFill>
+                  <a:srgbClr val="0B4A87"/>
                 </a:solidFill>
                 <a:latin typeface="IBM Plex Sans" pitchFamily="34" charset="0"/>
                 <a:ea typeface="IBM Plex Sans" pitchFamily="34" charset="-122"/>
                 <a:cs typeface="IBM Plex Sans" pitchFamily="34" charset="-120"/>
               </a:rPr>
-              <a:t>Green: no model call</a:t>
-            </a:r>
-            <a:endParaRPr lang="en-US" sz="1400" dirty="0"/>
-          </a:p>
-        </p:txBody>
-      </p:sp>
-      <p:sp>
-        <p:nvSpPr>
-          <p:cNvPr id="11" name="Text 8"/>
-          <p:cNvSpPr/>
-          <p:nvPr/>
-        </p:nvSpPr>
-        <p:spPr>
-          <a:xfrm>
-            <a:off x="996950" y="4682480"/>
-            <a:ext cx="2243392" cy="452041"/>
+              <a:t>retrieve more</a:t>
+            </a:r>
+            <a:endParaRPr lang="en-US" sz="1200" dirty="0"/>
+          </a:p>
+        </p:txBody>
+      </p:sp>
+      <p:sp>
+        <p:nvSpPr>
+          <p:cNvPr id="40" name="Text 27"/>
+          <p:cNvSpPr/>
+          <p:nvPr/>
+        </p:nvSpPr>
+        <p:spPr>
+          <a:xfrm>
+            <a:off x="3797300" y="3051770"/>
+            <a:ext cx="749300" cy="228054"/>
           </a:xfrm>
           <a:prstGeom prst="rect">
             <a:avLst/>
@@ -4279,20 +5535,20 @@
           <a:p>
             <a:pPr algn="l" indent="0" marL="0">
               <a:lnSpc>
-                <a:spcPts val="1680"/>
-              </a:lnSpc>
-              <a:buNone/>
-            </a:pPr>
-            <a:r>
-              <a:rPr lang="en-US" sz="1200" dirty="0">
-                <a:solidFill>
-                  <a:srgbClr val="46596A"/>
+                <a:spcPts val="1596"/>
+              </a:lnSpc>
+              <a:buNone/>
+            </a:pPr>
+            <a:r>
+              <a:rPr lang="en-US" sz="1200" b="1" dirty="0">
+                <a:solidFill>
+                  <a:srgbClr val="0B4A87"/>
                 </a:solidFill>
                 <a:latin typeface="IBM Plex Sans" pitchFamily="34" charset="0"/>
                 <a:ea typeface="IBM Plex Sans" pitchFamily="34" charset="-122"/>
                 <a:cs typeface="IBM Plex Sans" pitchFamily="34" charset="-120"/>
               </a:rPr>
-              <a:t>bootstrap_context and the final auto-log are plain graph work.</a:t>
+              <a:t>answers</a:t>
             </a:r>
             <a:endParaRPr lang="en-US" sz="1200" dirty="0"/>
           </a:p>
@@ -4300,41 +5556,14 @@
       </p:sp>
       <p:sp>
         <p:nvSpPr>
-          <p:cNvPr id="12" name="Shape 9"/>
-          <p:cNvSpPr/>
-          <p:nvPr/>
-        </p:nvSpPr>
-        <p:spPr>
-          <a:xfrm>
-            <a:off x="3489325" y="4219575"/>
-            <a:ext cx="2540000" cy="1498600"/>
-          </a:xfrm>
-          <a:prstGeom prst="roundRect">
-            <a:avLst>
-              <a:gd name="adj" fmla="val 6568"/>
-            </a:avLst>
-          </a:prstGeom>
-          <a:solidFill>
-            <a:srgbClr val="FDFEFE"/>
-          </a:solidFill>
-          <a:ln w="6350">
-            <a:solidFill>
-              <a:srgbClr val="D6E1E6"/>
-            </a:solidFill>
-            <a:prstDash val="solid"/>
-          </a:ln>
-        </p:spPr>
-      </p:sp>
-      <p:sp>
-        <p:nvSpPr>
-          <p:cNvPr id="13" name="Text 10"/>
-          <p:cNvSpPr/>
-          <p:nvPr/>
-        </p:nvSpPr>
-        <p:spPr>
-          <a:xfrm>
-            <a:off x="3670300" y="4400550"/>
-            <a:ext cx="2243392" cy="256530"/>
+          <p:cNvPr id="41" name="Text 28"/>
+          <p:cNvSpPr/>
+          <p:nvPr/>
+        </p:nvSpPr>
+        <p:spPr>
+          <a:xfrm>
+            <a:off x="7353300" y="4836120"/>
+            <a:ext cx="1257300" cy="228054"/>
           </a:xfrm>
           <a:prstGeom prst="rect">
             <a:avLst/>
@@ -4350,35 +5579,35 @@
           <a:p>
             <a:pPr algn="l" indent="0" marL="0">
               <a:lnSpc>
-                <a:spcPts val="1820"/>
-              </a:lnSpc>
-              <a:buNone/>
-            </a:pPr>
-            <a:r>
-              <a:rPr lang="en-US" sz="1400" b="1" dirty="0">
-                <a:solidFill>
-                  <a:srgbClr val="0B4A87"/>
+                <a:spcPts val="1596"/>
+              </a:lnSpc>
+              <a:buNone/>
+            </a:pPr>
+            <a:r>
+              <a:rPr lang="en-US" sz="1200" dirty="0">
+                <a:solidFill>
+                  <a:srgbClr val="46596A"/>
                 </a:solidFill>
                 <a:latin typeface="IBM Plex Sans" pitchFamily="34" charset="0"/>
                 <a:ea typeface="IBM Plex Sans" pitchFamily="34" charset="-122"/>
                 <a:cs typeface="IBM Plex Sans" pitchFamily="34" charset="-120"/>
               </a:rPr>
-              <a:t>Blue: the planner's tools</a:t>
-            </a:r>
-            <a:endParaRPr lang="en-US" sz="1400" dirty="0"/>
-          </a:p>
-        </p:txBody>
-      </p:sp>
-      <p:sp>
-        <p:nvSpPr>
-          <p:cNvPr id="14" name="Text 11"/>
-          <p:cNvSpPr/>
-          <p:nvPr/>
-        </p:nvSpPr>
-        <p:spPr>
-          <a:xfrm>
-            <a:off x="3670300" y="4682480"/>
-            <a:ext cx="2243392" cy="665361"/>
+              <a:t>too similar</a:t>
+            </a:r>
+            <a:endParaRPr lang="en-US" sz="1200" dirty="0"/>
+          </a:p>
+        </p:txBody>
+      </p:sp>
+      <p:sp>
+        <p:nvSpPr>
+          <p:cNvPr id="42" name="Text 29"/>
+          <p:cNvSpPr/>
+          <p:nvPr/>
+        </p:nvSpPr>
+        <p:spPr>
+          <a:xfrm>
+            <a:off x="9004300" y="5598120"/>
+            <a:ext cx="939800" cy="228054"/>
           </a:xfrm>
           <a:prstGeom prst="rect">
             <a:avLst/>
@@ -4394,7 +5623,7 @@
           <a:p>
             <a:pPr algn="l" indent="0" marL="0">
               <a:lnSpc>
-                <a:spcPts val="1680"/>
+                <a:spcPts val="1596"/>
               </a:lnSpc>
               <a:buNone/>
             </a:pPr>
@@ -4407,7 +5636,7 @@
                 <a:ea typeface="IBM Plex Sans" pitchFamily="34" charset="-122"/>
                 <a:cs typeface="IBM Plex Sans" pitchFamily="34" charset="-120"/>
               </a:rPr>
-              <a:t>planner_step picks up to 3 lookups, each a source and a query; this step runs them.</a:t>
+              <a:t>distinct</a:t>
             </a:r>
             <a:endParaRPr lang="en-US" sz="1200" dirty="0"/>
           </a:p>
@@ -4415,41 +5644,14 @@
       </p:sp>
       <p:sp>
         <p:nvSpPr>
-          <p:cNvPr id="15" name="Shape 12"/>
-          <p:cNvSpPr/>
-          <p:nvPr/>
-        </p:nvSpPr>
-        <p:spPr>
-          <a:xfrm>
-            <a:off x="6162675" y="4219575"/>
-            <a:ext cx="2540000" cy="1498600"/>
-          </a:xfrm>
-          <a:prstGeom prst="roundRect">
-            <a:avLst>
-              <a:gd name="adj" fmla="val 6568"/>
-            </a:avLst>
-          </a:prstGeom>
-          <a:solidFill>
-            <a:srgbClr val="FDFEFE"/>
-          </a:solidFill>
-          <a:ln w="6350">
-            <a:solidFill>
-              <a:srgbClr val="D6E1E6"/>
-            </a:solidFill>
-            <a:prstDash val="solid"/>
-          </a:ln>
-        </p:spPr>
-      </p:sp>
-      <p:sp>
-        <p:nvSpPr>
-          <p:cNvPr id="16" name="Text 13"/>
-          <p:cNvSpPr/>
-          <p:nvPr/>
-        </p:nvSpPr>
-        <p:spPr>
-          <a:xfrm>
-            <a:off x="6343650" y="4400550"/>
-            <a:ext cx="2243392" cy="256530"/>
+          <p:cNvPr id="43" name="Text 30"/>
+          <p:cNvSpPr/>
+          <p:nvPr/>
+        </p:nvSpPr>
+        <p:spPr>
+          <a:xfrm>
+            <a:off x="812800" y="6238280"/>
+            <a:ext cx="3459976" cy="238720"/>
           </a:xfrm>
           <a:prstGeom prst="rect">
             <a:avLst/>
@@ -4465,35 +5667,35 @@
           <a:p>
             <a:pPr algn="l" indent="0" marL="0">
               <a:lnSpc>
-                <a:spcPts val="1820"/>
-              </a:lnSpc>
-              <a:buNone/>
-            </a:pPr>
-            <a:r>
-              <a:rPr lang="en-US" sz="1400" b="1" dirty="0">
-                <a:solidFill>
-                  <a:srgbClr val="8B1A1A"/>
+                <a:spcPts val="1680"/>
+              </a:lnSpc>
+              <a:buNone/>
+            </a:pPr>
+            <a:r>
+              <a:rPr lang="en-US" sz="1200" dirty="0">
+                <a:solidFill>
+                  <a:srgbClr val="55697A"/>
                 </a:solidFill>
                 <a:latin typeface="IBM Plex Sans" pitchFamily="34" charset="0"/>
                 <a:ea typeface="IBM Plex Sans" pitchFamily="34" charset="-122"/>
                 <a:cs typeface="IBM Plex Sans" pitchFamily="34" charset="-120"/>
               </a:rPr>
-              <a:t>Red: a model call</a:t>
-            </a:r>
-            <a:endParaRPr lang="en-US" sz="1400" dirty="0"/>
-          </a:p>
-        </p:txBody>
-      </p:sp>
-      <p:sp>
-        <p:nvSpPr>
-          <p:cNvPr id="17" name="Text 14"/>
-          <p:cNvSpPr/>
-          <p:nvPr/>
-        </p:nvSpPr>
-        <p:spPr>
-          <a:xfrm>
-            <a:off x="6343650" y="4682480"/>
-            <a:ext cx="2243392" cy="878681"/>
+              <a:t>Exploratory Testing Automation · CSE 450 · BUET</a:t>
+            </a:r>
+            <a:endParaRPr lang="en-US" sz="1200" dirty="0"/>
+          </a:p>
+        </p:txBody>
+      </p:sp>
+      <p:sp>
+        <p:nvSpPr>
+          <p:cNvPr id="44" name="Text 31"/>
+          <p:cNvSpPr/>
+          <p:nvPr/>
+        </p:nvSpPr>
+        <p:spPr>
+          <a:xfrm>
+            <a:off x="11196290" y="6238280"/>
+            <a:ext cx="233710" cy="238720"/>
           </a:xfrm>
           <a:prstGeom prst="rect">
             <a:avLst/>
@@ -4516,128 +5718,13 @@
             <a:r>
               <a:rPr lang="en-US" sz="1200" dirty="0">
                 <a:solidFill>
-                  <a:srgbClr val="46596A"/>
+                  <a:srgbClr val="55697A"/>
                 </a:solidFill>
                 <a:latin typeface="IBM Plex Sans" pitchFamily="34" charset="0"/>
                 <a:ea typeface="IBM Plex Sans" pitchFamily="34" charset="-122"/>
                 <a:cs typeface="IBM Plex Sans" pitchFamily="34" charset="-120"/>
               </a:rPr>
-              <a:t>planner_step is small, generate_testcase is large, and the retry fires only on a near-duplicate.</a:t>
-            </a:r>
-            <a:endParaRPr lang="en-US" sz="1200" dirty="0"/>
-          </a:p>
-        </p:txBody>
-      </p:sp>
-      <p:sp>
-        <p:nvSpPr>
-          <p:cNvPr id="18" name="Shape 15"/>
-          <p:cNvSpPr/>
-          <p:nvPr/>
-        </p:nvSpPr>
-        <p:spPr>
-          <a:xfrm>
-            <a:off x="8836025" y="4219575"/>
-            <a:ext cx="2540000" cy="1498600"/>
-          </a:xfrm>
-          <a:prstGeom prst="roundRect">
-            <a:avLst>
-              <a:gd name="adj" fmla="val 6568"/>
-            </a:avLst>
-          </a:prstGeom>
-          <a:solidFill>
-            <a:srgbClr val="FDFEFE"/>
-          </a:solidFill>
-          <a:ln w="6350">
-            <a:solidFill>
-              <a:srgbClr val="D6E1E6"/>
-            </a:solidFill>
-            <a:prstDash val="solid"/>
-          </a:ln>
-        </p:spPr>
-      </p:sp>
-      <p:sp>
-        <p:nvSpPr>
-          <p:cNvPr id="19" name="Text 16"/>
-          <p:cNvSpPr/>
-          <p:nvPr/>
-        </p:nvSpPr>
-        <p:spPr>
-          <a:xfrm>
-            <a:off x="9017000" y="4400550"/>
-            <a:ext cx="2243392" cy="256530"/>
-          </a:xfrm>
-          <a:prstGeom prst="rect">
-            <a:avLst/>
-          </a:prstGeom>
-          <a:noFill/>
-          <a:ln/>
-        </p:spPr>
-        <p:txBody>
-          <a:bodyPr wrap="square" lIns="0" tIns="0" rIns="0" bIns="0" rtlCol="0" anchor="t">
-            <a:normAutofit/>
-          </a:bodyPr>
-          <a:lstStyle/>
-          <a:p>
-            <a:pPr algn="l" indent="0" marL="0">
-              <a:lnSpc>
-                <a:spcPts val="1820"/>
-              </a:lnSpc>
-              <a:buNone/>
-            </a:pPr>
-            <a:r>
-              <a:rPr lang="en-US" sz="1400" b="1" dirty="0">
-                <a:solidFill>
-                  <a:srgbClr val="7A4A10"/>
-                </a:solidFill>
-                <a:latin typeface="IBM Plex Sans" pitchFamily="34" charset="0"/>
-                <a:ea typeface="IBM Plex Sans" pitchFamily="34" charset="-122"/>
-                <a:cs typeface="IBM Plex Sans" pitchFamily="34" charset="-120"/>
-              </a:rPr>
-              <a:t>Amber: a decision</a:t>
-            </a:r>
-            <a:endParaRPr lang="en-US" sz="1400" dirty="0"/>
-          </a:p>
-        </p:txBody>
-      </p:sp>
-      <p:sp>
-        <p:nvSpPr>
-          <p:cNvPr id="20" name="Text 17"/>
-          <p:cNvSpPr/>
-          <p:nvPr/>
-        </p:nvSpPr>
-        <p:spPr>
-          <a:xfrm>
-            <a:off x="9017000" y="4682480"/>
-            <a:ext cx="2243392" cy="665361"/>
-          </a:xfrm>
-          <a:prstGeom prst="rect">
-            <a:avLst/>
-          </a:prstGeom>
-          <a:noFill/>
-          <a:ln/>
-        </p:spPr>
-        <p:txBody>
-          <a:bodyPr wrap="square" lIns="0" tIns="0" rIns="0" bIns="0" rtlCol="0" anchor="t">
-            <a:normAutofit/>
-          </a:bodyPr>
-          <a:lstStyle/>
-          <a:p>
-            <a:pPr algn="l" indent="0" marL="0">
-              <a:lnSpc>
-                <a:spcPts val="1680"/>
-              </a:lnSpc>
-              <a:buNone/>
-            </a:pPr>
-            <a:r>
-              <a:rPr lang="en-US" sz="1200" dirty="0">
-                <a:solidFill>
-                  <a:srgbClr val="46596A"/>
-                </a:solidFill>
-                <a:latin typeface="IBM Plex Sans" pitchFamily="34" charset="0"/>
-                <a:ea typeface="IBM Plex Sans" pitchFamily="34" charset="-122"/>
-                <a:cs typeface="IBM Plex Sans" pitchFamily="34" charset="-120"/>
-              </a:rPr>
-              <a:t>Keep retrieving, or write? And is the draft distinct enough to keep?</a:t>
+              <a:t>13</a:t>
             </a:r>
             <a:endParaRPr lang="en-US" sz="1200" dirty="0"/>
           </a:p>
@@ -4683,7 +5770,7 @@
         </p:nvSpPr>
         <p:spPr>
           <a:xfrm>
-            <a:off x="812800" y="812800"/>
+            <a:off x="812800" y="635000"/>
             <a:ext cx="10883392" cy="238720"/>
           </a:xfrm>
           <a:prstGeom prst="rect">
@@ -4727,7 +5814,7 @@
         </p:nvSpPr>
         <p:spPr>
           <a:xfrm>
-            <a:off x="812800" y="1102320"/>
+            <a:off x="812800" y="924520"/>
             <a:ext cx="10883392" cy="444500"/>
           </a:xfrm>
           <a:prstGeom prst="rect">
@@ -4757,7 +5844,7 @@
                 <a:ea typeface="Source Serif 4" pitchFamily="34" charset="-122"/>
                 <a:cs typeface="Source Serif 4" pitchFamily="34" charset="-120"/>
               </a:rPr>
-              <a:t>Tools mode: the model calls each tool itself</a:t>
+              <a:t>Tools philosophy: the model asks the graph itself</a:t>
             </a:r>
             <a:endParaRPr lang="en-US" sz="3000" dirty="0"/>
           </a:p>
@@ -4765,36 +5852,14 @@
       </p:sp>
       <p:sp>
         <p:nvSpPr>
-          <p:cNvPr id="4" name="Shape 2"/>
-          <p:cNvSpPr/>
-          <p:nvPr/>
-        </p:nvSpPr>
-        <p:spPr>
-          <a:xfrm>
-            <a:off x="812800" y="1775420"/>
-            <a:ext cx="294680" cy="264120"/>
-          </a:xfrm>
-          <a:prstGeom prst="roundRect">
-            <a:avLst>
-              <a:gd name="adj" fmla="val 50000"/>
-            </a:avLst>
-          </a:prstGeom>
-          <a:solidFill>
-            <a:srgbClr val="0F7EA8"/>
-          </a:solidFill>
-          <a:ln/>
-        </p:spPr>
-      </p:sp>
-      <p:sp>
-        <p:nvSpPr>
-          <p:cNvPr id="5" name="Text 3"/>
-          <p:cNvSpPr/>
-          <p:nvPr/>
-        </p:nvSpPr>
-        <p:spPr>
-          <a:xfrm>
-            <a:off x="914400" y="1800820"/>
-            <a:ext cx="142280" cy="238720"/>
+          <p:cNvPr id="4" name="Text 2"/>
+          <p:cNvSpPr/>
+          <p:nvPr/>
+        </p:nvSpPr>
+        <p:spPr>
+          <a:xfrm>
+            <a:off x="812800" y="1419820"/>
+            <a:ext cx="10883392" cy="238720"/>
           </a:xfrm>
           <a:prstGeom prst="rect">
             <a:avLst/>
@@ -4815,822 +5880,15 @@
               <a:buNone/>
             </a:pPr>
             <a:r>
-              <a:rPr lang="en-US" sz="1200" b="1" dirty="0">
-                <a:solidFill>
-                  <a:srgbClr val="F6F8F7"/>
+              <a:rPr lang="en-US" sz="1200" dirty="0">
+                <a:solidFill>
+                  <a:srgbClr val="55697A"/>
                 </a:solidFill>
                 <a:latin typeface="IBM Plex Sans" pitchFamily="34" charset="0"/>
                 <a:ea typeface="IBM Plex Sans" pitchFamily="34" charset="-122"/>
                 <a:cs typeface="IBM Plex Sans" pitchFamily="34" charset="-120"/>
               </a:rPr>
-              <a:t>1</a:t>
-            </a:r>
-            <a:endParaRPr lang="en-US" sz="1200" dirty="0"/>
-          </a:p>
-        </p:txBody>
-      </p:sp>
-      <p:sp>
-        <p:nvSpPr>
-          <p:cNvPr id="6" name="Text 4"/>
-          <p:cNvSpPr/>
-          <p:nvPr/>
-        </p:nvSpPr>
-        <p:spPr>
-          <a:xfrm>
-            <a:off x="1234480" y="1775420"/>
-            <a:ext cx="5452120" cy="256530"/>
-          </a:xfrm>
-          <a:prstGeom prst="rect">
-            <a:avLst/>
-          </a:prstGeom>
-          <a:noFill/>
-          <a:ln/>
-        </p:spPr>
-        <p:txBody>
-          <a:bodyPr wrap="square" lIns="0" tIns="0" rIns="0" bIns="0" rtlCol="0" anchor="t">
-            <a:normAutofit/>
-          </a:bodyPr>
-          <a:lstStyle/>
-          <a:p>
-            <a:pPr algn="l" indent="0" marL="0">
-              <a:lnSpc>
-                <a:spcPts val="1820"/>
-              </a:lnSpc>
-              <a:buNone/>
-            </a:pPr>
-            <a:r>
-              <a:rPr lang="en-US" sz="1400" b="1" dirty="0">
-                <a:solidFill>
-                  <a:srgbClr val="14303D"/>
-                </a:solidFill>
-                <a:latin typeface="IBM Plex Sans" pitchFamily="34" charset="0"/>
-                <a:ea typeface="IBM Plex Sans" pitchFamily="34" charset="-122"/>
-                <a:cs typeface="IBM Plex Sans" pitchFamily="34" charset="-120"/>
-              </a:rPr>
-              <a:t>A short brief</a:t>
-            </a:r>
-            <a:endParaRPr lang="en-US" sz="1400" dirty="0"/>
-          </a:p>
-        </p:txBody>
-      </p:sp>
-      <p:sp>
-        <p:nvSpPr>
-          <p:cNvPr id="7" name="Text 5"/>
-          <p:cNvSpPr/>
-          <p:nvPr/>
-        </p:nvSpPr>
-        <p:spPr>
-          <a:xfrm>
-            <a:off x="1234480" y="2031950"/>
-            <a:ext cx="5452120" cy="238720"/>
-          </a:xfrm>
-          <a:prstGeom prst="rect">
-            <a:avLst/>
-          </a:prstGeom>
-          <a:noFill/>
-          <a:ln/>
-        </p:spPr>
-        <p:txBody>
-          <a:bodyPr wrap="square" lIns="0" tIns="0" rIns="0" bIns="0" rtlCol="0" anchor="t">
-            <a:normAutofit/>
-          </a:bodyPr>
-          <a:lstStyle/>
-          <a:p>
-            <a:pPr algn="l" indent="0" marL="0">
-              <a:lnSpc>
-                <a:spcPts val="1680"/>
-              </a:lnSpc>
-              <a:buNone/>
-            </a:pPr>
-            <a:r>
-              <a:rPr lang="en-US" sz="1200" dirty="0">
-                <a:solidFill>
-                  <a:srgbClr val="46596A"/>
-                </a:solidFill>
-                <a:latin typeface="IBM Plex Sans" pitchFamily="34" charset="0"/>
-                <a:ea typeface="IBM Plex Sans" pitchFamily="34" charset="-122"/>
-                <a:cs typeface="IBM Plex Sans" pitchFamily="34" charset="-120"/>
-              </a:rPr>
-              <a:t>The coverage map, the last few runs and the open questions.</a:t>
-            </a:r>
-            <a:endParaRPr lang="en-US" sz="1200" dirty="0"/>
-          </a:p>
-        </p:txBody>
-      </p:sp>
-      <p:sp>
-        <p:nvSpPr>
-          <p:cNvPr id="8" name="Shape 6"/>
-          <p:cNvSpPr/>
-          <p:nvPr/>
-        </p:nvSpPr>
-        <p:spPr>
-          <a:xfrm>
-            <a:off x="812800" y="2397671"/>
-            <a:ext cx="294680" cy="264120"/>
-          </a:xfrm>
-          <a:prstGeom prst="roundRect">
-            <a:avLst>
-              <a:gd name="adj" fmla="val 50000"/>
-            </a:avLst>
-          </a:prstGeom>
-          <a:solidFill>
-            <a:srgbClr val="0F7EA8"/>
-          </a:solidFill>
-          <a:ln/>
-        </p:spPr>
-      </p:sp>
-      <p:sp>
-        <p:nvSpPr>
-          <p:cNvPr id="9" name="Text 7"/>
-          <p:cNvSpPr/>
-          <p:nvPr/>
-        </p:nvSpPr>
-        <p:spPr>
-          <a:xfrm>
-            <a:off x="914400" y="2423071"/>
-            <a:ext cx="142280" cy="238720"/>
-          </a:xfrm>
-          <a:prstGeom prst="rect">
-            <a:avLst/>
-          </a:prstGeom>
-          <a:noFill/>
-          <a:ln/>
-        </p:spPr>
-        <p:txBody>
-          <a:bodyPr wrap="square" lIns="0" tIns="0" rIns="0" bIns="0" rtlCol="0" anchor="t">
-            <a:normAutofit/>
-          </a:bodyPr>
-          <a:lstStyle/>
-          <a:p>
-            <a:pPr algn="l" indent="0" marL="0">
-              <a:lnSpc>
-                <a:spcPts val="1680"/>
-              </a:lnSpc>
-              <a:buNone/>
-            </a:pPr>
-            <a:r>
-              <a:rPr lang="en-US" sz="1200" b="1" dirty="0">
-                <a:solidFill>
-                  <a:srgbClr val="F6F8F7"/>
-                </a:solidFill>
-                <a:latin typeface="IBM Plex Sans" pitchFamily="34" charset="0"/>
-                <a:ea typeface="IBM Plex Sans" pitchFamily="34" charset="-122"/>
-                <a:cs typeface="IBM Plex Sans" pitchFamily="34" charset="-120"/>
-              </a:rPr>
-              <a:t>2</a:t>
-            </a:r>
-            <a:endParaRPr lang="en-US" sz="1200" dirty="0"/>
-          </a:p>
-        </p:txBody>
-      </p:sp>
-      <p:sp>
-        <p:nvSpPr>
-          <p:cNvPr id="10" name="Text 8"/>
-          <p:cNvSpPr/>
-          <p:nvPr/>
-        </p:nvSpPr>
-        <p:spPr>
-          <a:xfrm>
-            <a:off x="1234480" y="2397671"/>
-            <a:ext cx="5452120" cy="256530"/>
-          </a:xfrm>
-          <a:prstGeom prst="rect">
-            <a:avLst/>
-          </a:prstGeom>
-          <a:noFill/>
-          <a:ln/>
-        </p:spPr>
-        <p:txBody>
-          <a:bodyPr wrap="square" lIns="0" tIns="0" rIns="0" bIns="0" rtlCol="0" anchor="t">
-            <a:normAutofit/>
-          </a:bodyPr>
-          <a:lstStyle/>
-          <a:p>
-            <a:pPr algn="l" indent="0" marL="0">
-              <a:lnSpc>
-                <a:spcPts val="1820"/>
-              </a:lnSpc>
-              <a:buNone/>
-            </a:pPr>
-            <a:r>
-              <a:rPr lang="en-US" sz="1400" b="1" dirty="0">
-                <a:solidFill>
-                  <a:srgbClr val="14303D"/>
-                </a:solidFill>
-                <a:latin typeface="IBM Plex Sans" pitchFamily="34" charset="0"/>
-                <a:ea typeface="IBM Plex Sans" pitchFamily="34" charset="-122"/>
-                <a:cs typeface="IBM Plex Sans" pitchFamily="34" charset="-120"/>
-              </a:rPr>
-              <a:t>It investigates</a:t>
-            </a:r>
-            <a:endParaRPr lang="en-US" sz="1400" dirty="0"/>
-          </a:p>
-        </p:txBody>
-      </p:sp>
-      <p:sp>
-        <p:nvSpPr>
-          <p:cNvPr id="11" name="Text 9"/>
-          <p:cNvSpPr/>
-          <p:nvPr/>
-        </p:nvSpPr>
-        <p:spPr>
-          <a:xfrm>
-            <a:off x="1234480" y="2654201"/>
-            <a:ext cx="5452120" cy="238720"/>
-          </a:xfrm>
-          <a:prstGeom prst="rect">
-            <a:avLst/>
-          </a:prstGeom>
-          <a:noFill/>
-          <a:ln/>
-        </p:spPr>
-        <p:txBody>
-          <a:bodyPr wrap="square" lIns="0" tIns="0" rIns="0" bIns="0" rtlCol="0" anchor="t">
-            <a:normAutofit/>
-          </a:bodyPr>
-          <a:lstStyle/>
-          <a:p>
-            <a:pPr algn="l" indent="0" marL="0">
-              <a:lnSpc>
-                <a:spcPts val="1680"/>
-              </a:lnSpc>
-              <a:buNone/>
-            </a:pPr>
-            <a:r>
-              <a:rPr lang="en-US" sz="1200" dirty="0">
-                <a:solidFill>
-                  <a:srgbClr val="46596A"/>
-                </a:solidFill>
-                <a:latin typeface="IBM Plex Sans" pitchFamily="34" charset="0"/>
-                <a:ea typeface="IBM Plex Sans" pitchFamily="34" charset="-122"/>
-                <a:cs typeface="IBM Plex Sans" pitchFamily="34" charset="-120"/>
-              </a:rPr>
-              <a:t>It calls a graph tool, reads the answer, and chooses the next question.</a:t>
-            </a:r>
-            <a:endParaRPr lang="en-US" sz="1200" dirty="0"/>
-          </a:p>
-        </p:txBody>
-      </p:sp>
-      <p:sp>
-        <p:nvSpPr>
-          <p:cNvPr id="12" name="Shape 10"/>
-          <p:cNvSpPr/>
-          <p:nvPr/>
-        </p:nvSpPr>
-        <p:spPr>
-          <a:xfrm>
-            <a:off x="812800" y="3019921"/>
-            <a:ext cx="294680" cy="264120"/>
-          </a:xfrm>
-          <a:prstGeom prst="roundRect">
-            <a:avLst>
-              <a:gd name="adj" fmla="val 50000"/>
-            </a:avLst>
-          </a:prstGeom>
-          <a:solidFill>
-            <a:srgbClr val="0F7EA8"/>
-          </a:solidFill>
-          <a:ln/>
-        </p:spPr>
-      </p:sp>
-      <p:sp>
-        <p:nvSpPr>
-          <p:cNvPr id="13" name="Text 11"/>
-          <p:cNvSpPr/>
-          <p:nvPr/>
-        </p:nvSpPr>
-        <p:spPr>
-          <a:xfrm>
-            <a:off x="914400" y="3045321"/>
-            <a:ext cx="142280" cy="238720"/>
-          </a:xfrm>
-          <a:prstGeom prst="rect">
-            <a:avLst/>
-          </a:prstGeom>
-          <a:noFill/>
-          <a:ln/>
-        </p:spPr>
-        <p:txBody>
-          <a:bodyPr wrap="square" lIns="0" tIns="0" rIns="0" bIns="0" rtlCol="0" anchor="t">
-            <a:normAutofit/>
-          </a:bodyPr>
-          <a:lstStyle/>
-          <a:p>
-            <a:pPr algn="l" indent="0" marL="0">
-              <a:lnSpc>
-                <a:spcPts val="1680"/>
-              </a:lnSpc>
-              <a:buNone/>
-            </a:pPr>
-            <a:r>
-              <a:rPr lang="en-US" sz="1200" b="1" dirty="0">
-                <a:solidFill>
-                  <a:srgbClr val="F6F8F7"/>
-                </a:solidFill>
-                <a:latin typeface="IBM Plex Sans" pitchFamily="34" charset="0"/>
-                <a:ea typeface="IBM Plex Sans" pitchFamily="34" charset="-122"/>
-                <a:cs typeface="IBM Plex Sans" pitchFamily="34" charset="-120"/>
-              </a:rPr>
-              <a:t>3</a:t>
-            </a:r>
-            <a:endParaRPr lang="en-US" sz="1200" dirty="0"/>
-          </a:p>
-        </p:txBody>
-      </p:sp>
-      <p:sp>
-        <p:nvSpPr>
-          <p:cNvPr id="14" name="Text 12"/>
-          <p:cNvSpPr/>
-          <p:nvPr/>
-        </p:nvSpPr>
-        <p:spPr>
-          <a:xfrm>
-            <a:off x="1234480" y="3019921"/>
-            <a:ext cx="5452120" cy="256530"/>
-          </a:xfrm>
-          <a:prstGeom prst="rect">
-            <a:avLst/>
-          </a:prstGeom>
-          <a:noFill/>
-          <a:ln/>
-        </p:spPr>
-        <p:txBody>
-          <a:bodyPr wrap="square" lIns="0" tIns="0" rIns="0" bIns="0" rtlCol="0" anchor="t">
-            <a:normAutofit/>
-          </a:bodyPr>
-          <a:lstStyle/>
-          <a:p>
-            <a:pPr algn="l" indent="0" marL="0">
-              <a:lnSpc>
-                <a:spcPts val="1820"/>
-              </a:lnSpc>
-              <a:buNone/>
-            </a:pPr>
-            <a:r>
-              <a:rPr lang="en-US" sz="1400" b="1" dirty="0">
-                <a:solidFill>
-                  <a:srgbClr val="14303D"/>
-                </a:solidFill>
-                <a:latin typeface="IBM Plex Sans" pitchFamily="34" charset="0"/>
-                <a:ea typeface="IBM Plex Sans" pitchFamily="34" charset="-122"/>
-                <a:cs typeface="IBM Plex Sans" pitchFamily="34" charset="-120"/>
-              </a:rPr>
-              <a:t>It proposes</a:t>
-            </a:r>
-            <a:endParaRPr lang="en-US" sz="1400" dirty="0"/>
-          </a:p>
-        </p:txBody>
-      </p:sp>
-      <p:sp>
-        <p:nvSpPr>
-          <p:cNvPr id="15" name="Text 13"/>
-          <p:cNvSpPr/>
-          <p:nvPr/>
-        </p:nvSpPr>
-        <p:spPr>
-          <a:xfrm>
-            <a:off x="1234480" y="3276451"/>
-            <a:ext cx="5452120" cy="238720"/>
-          </a:xfrm>
-          <a:prstGeom prst="rect">
-            <a:avLst/>
-          </a:prstGeom>
-          <a:noFill/>
-          <a:ln/>
-        </p:spPr>
-        <p:txBody>
-          <a:bodyPr wrap="square" lIns="0" tIns="0" rIns="0" bIns="0" rtlCol="0" anchor="t">
-            <a:normAutofit/>
-          </a:bodyPr>
-          <a:lstStyle/>
-          <a:p>
-            <a:pPr algn="l" indent="0" marL="0">
-              <a:lnSpc>
-                <a:spcPts val="1680"/>
-              </a:lnSpc>
-              <a:buNone/>
-            </a:pPr>
-            <a:r>
-              <a:rPr lang="en-US" sz="1200" dirty="0">
-                <a:solidFill>
-                  <a:srgbClr val="46596A"/>
-                </a:solidFill>
-                <a:latin typeface="IBM Plex Sans" pitchFamily="34" charset="0"/>
-                <a:ea typeface="IBM Plex Sans" pitchFamily="34" charset="-122"/>
-                <a:cs typeface="IBM Plex Sans" pitchFamily="34" charset="-120"/>
-              </a:rPr>
-              <a:t>One call to propose_test_case, which must pass the gate on the right.</a:t>
-            </a:r>
-            <a:endParaRPr lang="en-US" sz="1200" dirty="0"/>
-          </a:p>
-        </p:txBody>
-      </p:sp>
-      <p:sp>
-        <p:nvSpPr>
-          <p:cNvPr id="16" name="Shape 14"/>
-          <p:cNvSpPr/>
-          <p:nvPr/>
-        </p:nvSpPr>
-        <p:spPr>
-          <a:xfrm>
-            <a:off x="6734175" y="1778595"/>
-            <a:ext cx="4641850" cy="2553643"/>
-          </a:xfrm>
-          <a:prstGeom prst="roundRect">
-            <a:avLst>
-              <a:gd name="adj" fmla="val 3854"/>
-            </a:avLst>
-          </a:prstGeom>
-          <a:solidFill>
-            <a:srgbClr val="FDFEFE"/>
-          </a:solidFill>
-          <a:ln w="6350">
-            <a:solidFill>
-              <a:srgbClr val="D6E1E6"/>
-            </a:solidFill>
-            <a:prstDash val="solid"/>
-          </a:ln>
-        </p:spPr>
-      </p:sp>
-      <p:sp>
-        <p:nvSpPr>
-          <p:cNvPr id="17" name="Text 15"/>
-          <p:cNvSpPr/>
-          <p:nvPr/>
-        </p:nvSpPr>
-        <p:spPr>
-          <a:xfrm>
-            <a:off x="6940550" y="1984970"/>
-            <a:ext cx="4355973" cy="256530"/>
-          </a:xfrm>
-          <a:prstGeom prst="rect">
-            <a:avLst/>
-          </a:prstGeom>
-          <a:noFill/>
-          <a:ln/>
-        </p:spPr>
-        <p:txBody>
-          <a:bodyPr wrap="square" lIns="0" tIns="0" rIns="0" bIns="0" rtlCol="0" anchor="t">
-            <a:normAutofit/>
-          </a:bodyPr>
-          <a:lstStyle/>
-          <a:p>
-            <a:pPr algn="l" indent="0" marL="0">
-              <a:lnSpc>
-                <a:spcPts val="1820"/>
-              </a:lnSpc>
-              <a:buNone/>
-            </a:pPr>
-            <a:r>
-              <a:rPr lang="en-US" sz="1400" b="1" dirty="0">
-                <a:solidFill>
-                  <a:srgbClr val="14303D"/>
-                </a:solidFill>
-                <a:latin typeface="IBM Plex Sans" pitchFamily="34" charset="0"/>
-                <a:ea typeface="IBM Plex Sans" pitchFamily="34" charset="-122"/>
-                <a:cs typeface="IBM Plex Sans" pitchFamily="34" charset="-120"/>
-              </a:rPr>
-              <a:t>Every proposal is validated</a:t>
-            </a:r>
-            <a:endParaRPr lang="en-US" sz="1400" dirty="0"/>
-          </a:p>
-        </p:txBody>
-      </p:sp>
-      <p:sp>
-        <p:nvSpPr>
-          <p:cNvPr id="18" name="Text 16"/>
-          <p:cNvSpPr/>
-          <p:nvPr/>
-        </p:nvSpPr>
-        <p:spPr>
-          <a:xfrm>
-            <a:off x="6940550" y="2317700"/>
-            <a:ext cx="4355973" cy="1092002"/>
-          </a:xfrm>
-          <a:prstGeom prst="rect">
-            <a:avLst/>
-          </a:prstGeom>
-          <a:noFill/>
-          <a:ln/>
-        </p:spPr>
-        <p:txBody>
-          <a:bodyPr wrap="square" lIns="0" tIns="0" rIns="0" bIns="0" rtlCol="0" anchor="t">
-            <a:normAutofit/>
-          </a:bodyPr>
-          <a:lstStyle/>
-          <a:p>
-            <a:pPr algn="l" indent="0" marL="0">
-              <a:lnSpc>
-                <a:spcPts val="1680"/>
-              </a:lnSpc>
-              <a:buNone/>
-            </a:pPr>
-            <a:r>
-              <a:rPr lang="en-US" sz="1200" dirty="0">
-                <a:solidFill>
-                  <a:srgbClr val="46596A"/>
-                </a:solidFill>
-                <a:latin typeface="IBM Plex Sans" pitchFamily="34" charset="0"/>
-                <a:ea typeface="IBM Plex Sans" pitchFamily="34" charset="-122"/>
-                <a:cs typeface="IBM Plex Sans" pitchFamily="34" charset="-120"/>
-              </a:rPr>
-              <a:t>It is rejected if it names a screen never observed, cites a requirement id that does not exist, repeats an earlier test, needs a precondition the tester cannot create, or falls outside the agreed scope. The model gets the reason and tries again, up to 3 times.</a:t>
-            </a:r>
-            <a:endParaRPr lang="en-US" sz="1200" dirty="0"/>
-          </a:p>
-        </p:txBody>
-      </p:sp>
-      <p:sp>
-        <p:nvSpPr>
-          <p:cNvPr id="19" name="Text 17"/>
-          <p:cNvSpPr/>
-          <p:nvPr/>
-        </p:nvSpPr>
-        <p:spPr>
-          <a:xfrm>
-            <a:off x="6940550" y="3485902"/>
-            <a:ext cx="4355973" cy="665361"/>
-          </a:xfrm>
-          <a:prstGeom prst="rect">
-            <a:avLst/>
-          </a:prstGeom>
-          <a:noFill/>
-          <a:ln/>
-        </p:spPr>
-        <p:txBody>
-          <a:bodyPr wrap="square" lIns="0" tIns="0" rIns="0" bIns="0" rtlCol="0" anchor="t">
-            <a:normAutofit/>
-          </a:bodyPr>
-          <a:lstStyle/>
-          <a:p>
-            <a:pPr algn="l" indent="0" marL="0">
-              <a:lnSpc>
-                <a:spcPts val="1680"/>
-              </a:lnSpc>
-              <a:buNone/>
-            </a:pPr>
-            <a:r>
-              <a:rPr lang="en-US" sz="1200" dirty="0">
-                <a:solidFill>
-                  <a:srgbClr val="55697A"/>
-                </a:solidFill>
-                <a:latin typeface="IBM Plex Sans" pitchFamily="34" charset="0"/>
-                <a:ea typeface="IBM Plex Sans" pitchFamily="34" charset="-122"/>
-                <a:cs typeface="IBM Plex Sans" pitchFamily="34" charset="-120"/>
-              </a:rPr>
-              <a:t>Across all its commerce runs: 989 tool calls for 101 proposals, all nine tools used, most often search_requirements (247) and get_screen (199).</a:t>
-            </a:r>
-            <a:endParaRPr lang="en-US" sz="1200" dirty="0"/>
-          </a:p>
-        </p:txBody>
-      </p:sp>
-      <p:sp>
-        <p:nvSpPr>
-          <p:cNvPr id="20" name="Text 18"/>
-          <p:cNvSpPr/>
-          <p:nvPr/>
-        </p:nvSpPr>
-        <p:spPr>
-          <a:xfrm>
-            <a:off x="812800" y="6238280"/>
-            <a:ext cx="3459976" cy="238720"/>
-          </a:xfrm>
-          <a:prstGeom prst="rect">
-            <a:avLst/>
-          </a:prstGeom>
-          <a:noFill/>
-          <a:ln/>
-        </p:spPr>
-        <p:txBody>
-          <a:bodyPr wrap="square" lIns="0" tIns="0" rIns="0" bIns="0" rtlCol="0" anchor="t">
-            <a:normAutofit/>
-          </a:bodyPr>
-          <a:lstStyle/>
-          <a:p>
-            <a:pPr algn="l" indent="0" marL="0">
-              <a:lnSpc>
-                <a:spcPts val="1680"/>
-              </a:lnSpc>
-              <a:buNone/>
-            </a:pPr>
-            <a:r>
-              <a:rPr lang="en-US" sz="1200" dirty="0">
-                <a:solidFill>
-                  <a:srgbClr val="55697A"/>
-                </a:solidFill>
-                <a:latin typeface="IBM Plex Sans" pitchFamily="34" charset="0"/>
-                <a:ea typeface="IBM Plex Sans" pitchFamily="34" charset="-122"/>
-                <a:cs typeface="IBM Plex Sans" pitchFamily="34" charset="-120"/>
-              </a:rPr>
-              <a:t>Exploratory Testing Automation · CSE 450 · BUET</a:t>
-            </a:r>
-            <a:endParaRPr lang="en-US" sz="1200" dirty="0"/>
-          </a:p>
-        </p:txBody>
-      </p:sp>
-      <p:sp>
-        <p:nvSpPr>
-          <p:cNvPr id="21" name="Text 19"/>
-          <p:cNvSpPr/>
-          <p:nvPr/>
-        </p:nvSpPr>
-        <p:spPr>
-          <a:xfrm>
-            <a:off x="11196290" y="6238280"/>
-            <a:ext cx="233710" cy="238720"/>
-          </a:xfrm>
-          <a:prstGeom prst="rect">
-            <a:avLst/>
-          </a:prstGeom>
-          <a:noFill/>
-          <a:ln/>
-        </p:spPr>
-        <p:txBody>
-          <a:bodyPr wrap="square" lIns="0" tIns="0" rIns="0" bIns="0" rtlCol="0" anchor="t">
-            <a:normAutofit/>
-          </a:bodyPr>
-          <a:lstStyle/>
-          <a:p>
-            <a:pPr algn="l" indent="0" marL="0">
-              <a:lnSpc>
-                <a:spcPts val="1680"/>
-              </a:lnSpc>
-              <a:buNone/>
-            </a:pPr>
-            <a:r>
-              <a:rPr lang="en-US" sz="1200" dirty="0">
-                <a:solidFill>
-                  <a:srgbClr val="55697A"/>
-                </a:solidFill>
-                <a:latin typeface="IBM Plex Sans" pitchFamily="34" charset="0"/>
-                <a:ea typeface="IBM Plex Sans" pitchFamily="34" charset="-122"/>
-                <a:cs typeface="IBM Plex Sans" pitchFamily="34" charset="-120"/>
-              </a:rPr>
-              <a:t>14</a:t>
-            </a:r>
-            <a:endParaRPr lang="en-US" sz="1200" dirty="0"/>
-          </a:p>
-        </p:txBody>
-      </p:sp>
-    </p:spTree>
-  </p:cSld>
-  <p:clrMapOvr>
-    <a:masterClrMapping/>
-  </p:clrMapOvr>
-</p:sld>
-</file>
-
-<file path=ppt/slides/slide15.xml><?xml version="1.0" encoding="utf-8"?>
-<p:sld xmlns:a="http://schemas.openxmlformats.org/drawingml/2006/main" xmlns:r="http://schemas.openxmlformats.org/officeDocument/2006/relationships" xmlns:p="http://schemas.openxmlformats.org/presentationml/2006/main">
-  <p:cSld name="Slide 15">
-    <p:bg>
-      <p:bgPr>
-        <a:solidFill>
-          <a:srgbClr val="F6F8F7"/>
-        </a:solidFill>
-      </p:bgPr>
-    </p:bg>
-    <p:spTree>
-      <p:nvGrpSpPr>
-        <p:cNvPr id="1" name=""/>
-        <p:cNvGrpSpPr/>
-        <p:nvPr/>
-      </p:nvGrpSpPr>
-      <p:grpSpPr>
-        <a:xfrm>
-          <a:off x="0" y="0"/>
-          <a:ext cx="0" cy="0"/>
-          <a:chOff x="0" y="0"/>
-          <a:chExt cx="0" cy="0"/>
-        </a:xfrm>
-      </p:grpSpPr>
-      <p:sp>
-        <p:nvSpPr>
-          <p:cNvPr id="2" name="Text 0"/>
-          <p:cNvSpPr/>
-          <p:nvPr/>
-        </p:nvSpPr>
-        <p:spPr>
-          <a:xfrm>
-            <a:off x="812800" y="635000"/>
-            <a:ext cx="10883392" cy="238720"/>
-          </a:xfrm>
-          <a:prstGeom prst="rect">
-            <a:avLst/>
-          </a:prstGeom>
-          <a:noFill/>
-          <a:ln/>
-        </p:spPr>
-        <p:txBody>
-          <a:bodyPr wrap="square" lIns="0" tIns="0" rIns="0" bIns="0" rtlCol="0" anchor="t">
-            <a:normAutofit/>
-          </a:bodyPr>
-          <a:lstStyle/>
-          <a:p>
-            <a:pPr algn="l" indent="0" marL="0">
-              <a:lnSpc>
-                <a:spcPts val="1680"/>
-              </a:lnSpc>
-              <a:buNone/>
-            </a:pPr>
-            <a:r>
-              <a:rPr lang="en-US" sz="1200" b="1" spc="100" kern="0" dirty="0">
-                <a:solidFill>
-                  <a:srgbClr val="0B6A8F"/>
-                </a:solidFill>
-                <a:latin typeface="IBM Plex Sans" pitchFamily="34" charset="0"/>
-                <a:ea typeface="IBM Plex Sans" pitchFamily="34" charset="-122"/>
-                <a:cs typeface="IBM Plex Sans" pitchFamily="34" charset="-120"/>
-              </a:rPr>
-              <a:t>PLANNER · TOOLS MODE · THE TOOLS</a:t>
-            </a:r>
-            <a:endParaRPr lang="en-US" sz="1200" dirty="0"/>
-          </a:p>
-        </p:txBody>
-      </p:sp>
-      <p:sp>
-        <p:nvSpPr>
-          <p:cNvPr id="3" name="Text 1"/>
-          <p:cNvSpPr/>
-          <p:nvPr/>
-        </p:nvSpPr>
-        <p:spPr>
-          <a:xfrm>
-            <a:off x="812800" y="924520"/>
-            <a:ext cx="10883392" cy="444500"/>
-          </a:xfrm>
-          <a:prstGeom prst="rect">
-            <a:avLst/>
-          </a:prstGeom>
-          <a:noFill/>
-          <a:ln/>
-        </p:spPr>
-        <p:txBody>
-          <a:bodyPr wrap="square" lIns="0" tIns="0" rIns="0" bIns="0" rtlCol="0" anchor="t">
-            <a:normAutofit/>
-          </a:bodyPr>
-          <a:lstStyle/>
-          <a:p>
-            <a:pPr algn="l" indent="0" marL="0">
-              <a:lnSpc>
-                <a:spcPts val="3300"/>
-              </a:lnSpc>
-              <a:buNone/>
-            </a:pPr>
-            <a:r>
-              <a:rPr lang="en-US" sz="3000" b="1" dirty="0">
-                <a:solidFill>
-                  <a:srgbClr val="14303D"/>
-                </a:solidFill>
-                <a:latin typeface="Source Serif 4" pitchFamily="34" charset="0"/>
-                <a:ea typeface="Source Serif 4" pitchFamily="34" charset="-122"/>
-                <a:cs typeface="Source Serif 4" pitchFamily="34" charset="-120"/>
-              </a:rPr>
-              <a:t>What the planner is allowed to ask the graph</a:t>
-            </a:r>
-            <a:endParaRPr lang="en-US" sz="3000" dirty="0"/>
-          </a:p>
-        </p:txBody>
-      </p:sp>
-      <p:sp>
-        <p:nvSpPr>
-          <p:cNvPr id="4" name="Text 2"/>
-          <p:cNvSpPr/>
-          <p:nvPr/>
-        </p:nvSpPr>
-        <p:spPr>
-          <a:xfrm>
-            <a:off x="812800" y="1419820"/>
-            <a:ext cx="10883392" cy="238720"/>
-          </a:xfrm>
-          <a:prstGeom prst="rect">
-            <a:avLst/>
-          </a:prstGeom>
-          <a:noFill/>
-          <a:ln/>
-        </p:spPr>
-        <p:txBody>
-          <a:bodyPr wrap="square" lIns="0" tIns="0" rIns="0" bIns="0" rtlCol="0" anchor="t">
-            <a:normAutofit/>
-          </a:bodyPr>
-          <a:lstStyle/>
-          <a:p>
-            <a:pPr algn="l" indent="0" marL="0">
-              <a:lnSpc>
-                <a:spcPts val="1680"/>
-              </a:lnSpc>
-              <a:buNone/>
-            </a:pPr>
-            <a:r>
-              <a:rPr lang="en-US" sz="1200" dirty="0">
-                <a:solidFill>
-                  <a:srgbClr val="55697A"/>
-                </a:solidFill>
-                <a:latin typeface="IBM Plex Sans" pitchFamily="34" charset="0"/>
-                <a:ea typeface="IBM Plex Sans" pitchFamily="34" charset="-122"/>
-                <a:cs typeface="IBM Plex Sans" pitchFamily="34" charset="-120"/>
-              </a:rPr>
-              <a:t>Nine read-only tools, each answering one question. A tool whose source has no data is never offered.</a:t>
+              <a:t>It calls one tool, reads the answer, then chooses the next question. Nine read-only tools, each offered only when its source has data.</a:t>
             </a:r>
             <a:endParaRPr lang="en-US" sz="1200" dirty="0"/>
           </a:p>
@@ -7744,8 +8002,8 @@
         </p:nvSpPr>
         <p:spPr>
           <a:xfrm>
-            <a:off x="812800" y="5277445"/>
-            <a:ext cx="10883392" cy="256530"/>
+            <a:off x="812800" y="6238280"/>
+            <a:ext cx="3459976" cy="238720"/>
           </a:xfrm>
           <a:prstGeom prst="rect">
             <a:avLst/>
@@ -7761,63 +8019,1504 @@
           <a:p>
             <a:pPr algn="l" indent="0" marL="0">
               <a:lnSpc>
-                <a:spcPts val="1820"/>
-              </a:lnSpc>
-              <a:buNone/>
-            </a:pPr>
-            <a:r>
-              <a:rPr lang="en-US" sz="1300" i="1" dirty="0">
-                <a:solidFill>
-                  <a:srgbClr val="46596A"/>
+                <a:spcPts val="1680"/>
+              </a:lnSpc>
+              <a:buNone/>
+            </a:pPr>
+            <a:r>
+              <a:rPr lang="en-US" sz="1200" dirty="0">
+                <a:solidFill>
+                  <a:srgbClr val="55697A"/>
+                </a:solidFill>
+                <a:latin typeface="IBM Plex Sans" pitchFamily="34" charset="0"/>
+                <a:ea typeface="IBM Plex Sans" pitchFamily="34" charset="-122"/>
+                <a:cs typeface="IBM Plex Sans" pitchFamily="34" charset="-120"/>
+              </a:rPr>
+              <a:t>Exploratory Testing Automation · CSE 450 · BUET</a:t>
+            </a:r>
+            <a:endParaRPr lang="en-US" sz="1200" dirty="0"/>
+          </a:p>
+        </p:txBody>
+      </p:sp>
+      <p:sp>
+        <p:nvSpPr>
+          <p:cNvPr id="7" name="Text 4"/>
+          <p:cNvSpPr/>
+          <p:nvPr/>
+        </p:nvSpPr>
+        <p:spPr>
+          <a:xfrm>
+            <a:off x="11196290" y="6238280"/>
+            <a:ext cx="233710" cy="238720"/>
+          </a:xfrm>
+          <a:prstGeom prst="rect">
+            <a:avLst/>
+          </a:prstGeom>
+          <a:noFill/>
+          <a:ln/>
+        </p:spPr>
+        <p:txBody>
+          <a:bodyPr wrap="square" lIns="0" tIns="0" rIns="0" bIns="0" rtlCol="0" anchor="t">
+            <a:normAutofit/>
+          </a:bodyPr>
+          <a:lstStyle/>
+          <a:p>
+            <a:pPr algn="l" indent="0" marL="0">
+              <a:lnSpc>
+                <a:spcPts val="1680"/>
+              </a:lnSpc>
+              <a:buNone/>
+            </a:pPr>
+            <a:r>
+              <a:rPr lang="en-US" sz="1200" dirty="0">
+                <a:solidFill>
+                  <a:srgbClr val="55697A"/>
+                </a:solidFill>
+                <a:latin typeface="IBM Plex Sans" pitchFamily="34" charset="0"/>
+                <a:ea typeface="IBM Plex Sans" pitchFamily="34" charset="-122"/>
+                <a:cs typeface="IBM Plex Sans" pitchFamily="34" charset="-120"/>
+              </a:rPr>
+              <a:t>14</a:t>
+            </a:r>
+            <a:endParaRPr lang="en-US" sz="1200" dirty="0"/>
+          </a:p>
+        </p:txBody>
+      </p:sp>
+    </p:spTree>
+  </p:cSld>
+  <p:clrMapOvr>
+    <a:masterClrMapping/>
+  </p:clrMapOvr>
+</p:sld>
+</file>
+
+<file path=ppt/slides/slide15.xml><?xml version="1.0" encoding="utf-8"?>
+<p:sld xmlns:a="http://schemas.openxmlformats.org/drawingml/2006/main" xmlns:r="http://schemas.openxmlformats.org/officeDocument/2006/relationships" xmlns:p="http://schemas.openxmlformats.org/presentationml/2006/main">
+  <p:cSld name="Slide 15">
+    <p:bg>
+      <p:bgPr>
+        <a:solidFill>
+          <a:srgbClr val="F6F8F7"/>
+        </a:solidFill>
+      </p:bgPr>
+    </p:bg>
+    <p:spTree>
+      <p:nvGrpSpPr>
+        <p:cNvPr id="1" name=""/>
+        <p:cNvGrpSpPr/>
+        <p:nvPr/>
+      </p:nvGrpSpPr>
+      <p:grpSpPr>
+        <a:xfrm>
+          <a:off x="0" y="0"/>
+          <a:ext cx="0" cy="0"/>
+          <a:chOff x="0" y="0"/>
+          <a:chExt cx="0" cy="0"/>
+        </a:xfrm>
+      </p:grpSpPr>
+      <p:sp>
+        <p:nvSpPr>
+          <p:cNvPr id="2" name="Text 0"/>
+          <p:cNvSpPr/>
+          <p:nvPr/>
+        </p:nvSpPr>
+        <p:spPr>
+          <a:xfrm>
+            <a:off x="812800" y="635000"/>
+            <a:ext cx="10883392" cy="238720"/>
+          </a:xfrm>
+          <a:prstGeom prst="rect">
+            <a:avLst/>
+          </a:prstGeom>
+          <a:noFill/>
+          <a:ln/>
+        </p:spPr>
+        <p:txBody>
+          <a:bodyPr wrap="square" lIns="0" tIns="0" rIns="0" bIns="0" rtlCol="0" anchor="t">
+            <a:normAutofit/>
+          </a:bodyPr>
+          <a:lstStyle/>
+          <a:p>
+            <a:pPr algn="l" indent="0" marL="0">
+              <a:lnSpc>
+                <a:spcPts val="1680"/>
+              </a:lnSpc>
+              <a:buNone/>
+            </a:pPr>
+            <a:r>
+              <a:rPr lang="en-US" sz="1200" b="1" spc="100" kern="0" dirty="0">
+                <a:solidFill>
+                  <a:srgbClr val="0B6A8F"/>
+                </a:solidFill>
+                <a:latin typeface="IBM Plex Sans" pitchFamily="34" charset="0"/>
+                <a:ea typeface="IBM Plex Sans" pitchFamily="34" charset="-122"/>
+                <a:cs typeface="IBM Plex Sans" pitchFamily="34" charset="-120"/>
+              </a:rPr>
+              <a:t>PLANNER · TOOLS MODE · ONE ROUND</a:t>
+            </a:r>
+            <a:endParaRPr lang="en-US" sz="1200" dirty="0"/>
+          </a:p>
+        </p:txBody>
+      </p:sp>
+      <p:sp>
+        <p:nvSpPr>
+          <p:cNvPr id="3" name="Text 1"/>
+          <p:cNvSpPr/>
+          <p:nvPr/>
+        </p:nvSpPr>
+        <p:spPr>
+          <a:xfrm>
+            <a:off x="812800" y="924520"/>
+            <a:ext cx="10883392" cy="444500"/>
+          </a:xfrm>
+          <a:prstGeom prst="rect">
+            <a:avLst/>
+          </a:prstGeom>
+          <a:noFill/>
+          <a:ln/>
+        </p:spPr>
+        <p:txBody>
+          <a:bodyPr wrap="square" lIns="0" tIns="0" rIns="0" bIns="0" rtlCol="0" anchor="t">
+            <a:normAutofit/>
+          </a:bodyPr>
+          <a:lstStyle/>
+          <a:p>
+            <a:pPr algn="l" indent="0" marL="0">
+              <a:lnSpc>
+                <a:spcPts val="3300"/>
+              </a:lnSpc>
+              <a:buNone/>
+            </a:pPr>
+            <a:r>
+              <a:rPr lang="en-US" sz="3000" b="1" dirty="0">
+                <a:solidFill>
+                  <a:srgbClr val="14303D"/>
                 </a:solidFill>
                 <a:latin typeface="Source Serif 4" pitchFamily="34" charset="0"/>
                 <a:ea typeface="Source Serif 4" pitchFamily="34" charset="-122"/>
                 <a:cs typeface="Source Serif 4" pitchFamily="34" charset="-120"/>
               </a:rPr>
-              <a:t>So an empty answer can never mislead the model into planning against something that is not there.</a:t>
-            </a:r>
-            <a:endParaRPr lang="en-US" sz="1300" dirty="0"/>
-          </a:p>
-        </p:txBody>
-      </p:sp>
-      <p:sp>
-        <p:nvSpPr>
-          <p:cNvPr id="7" name="Text 4"/>
-          <p:cNvSpPr/>
-          <p:nvPr/>
-        </p:nvSpPr>
-        <p:spPr>
-          <a:xfrm>
-            <a:off x="812800" y="6238280"/>
-            <a:ext cx="3459976" cy="238720"/>
-          </a:xfrm>
-          <a:prstGeom prst="rect">
-            <a:avLst/>
-          </a:prstGeom>
-          <a:noFill/>
-          <a:ln/>
-        </p:spPr>
-        <p:txBody>
-          <a:bodyPr wrap="square" lIns="0" tIns="0" rIns="0" bIns="0" rtlCol="0" anchor="t">
-            <a:normAutofit/>
-          </a:bodyPr>
-          <a:lstStyle/>
-          <a:p>
-            <a:pPr algn="l" indent="0" marL="0">
+              <a:t>One round: investigate, then propose</a:t>
+            </a:r>
+            <a:endParaRPr lang="en-US" sz="3000" dirty="0"/>
+          </a:p>
+        </p:txBody>
+      </p:sp>
+      <p:sp>
+        <p:nvSpPr>
+          <p:cNvPr id="4" name="Shape 2"/>
+          <p:cNvSpPr/>
+          <p:nvPr/>
+        </p:nvSpPr>
+        <p:spPr>
+          <a:xfrm>
+            <a:off x="815975" y="1499195"/>
+            <a:ext cx="6343650" cy="654000"/>
+          </a:xfrm>
+          <a:prstGeom prst="roundRect">
+            <a:avLst>
+              <a:gd name="adj" fmla="val 13108"/>
+            </a:avLst>
+          </a:prstGeom>
+          <a:solidFill>
+            <a:srgbClr val="FDFEFE"/>
+          </a:solidFill>
+          <a:ln w="6350">
+            <a:solidFill>
+              <a:srgbClr val="D6E1E6"/>
+            </a:solidFill>
+            <a:prstDash val="solid"/>
+          </a:ln>
+        </p:spPr>
+      </p:sp>
+      <p:sp>
+        <p:nvSpPr>
+          <p:cNvPr id="5" name="Text 3"/>
+          <p:cNvSpPr/>
+          <p:nvPr/>
+        </p:nvSpPr>
+        <p:spPr>
+          <a:xfrm>
+            <a:off x="971550" y="1656011"/>
+            <a:ext cx="1079500" cy="340320"/>
+          </a:xfrm>
+          <a:custGeom>
+            <a:avLst/>
+            <a:gdLst/>
+            <a:ahLst/>
+            <a:cxnLst/>
+            <a:rect l="l" t="t" r="r" b="b"/>
+            <a:pathLst>
+              <a:path w="1079500" h="340320">
+                <a:moveTo>
+                  <a:pt x="63500" y="0"/>
+                </a:moveTo>
+                <a:lnTo>
+                  <a:pt x="1016000" y="0"/>
+                </a:lnTo>
+                <a:arcTo hR="63500" wR="63500" stAng="16200000" swAng="5400000"/>
+                <a:lnTo>
+                  <a:pt x="1079500" y="276820"/>
+                </a:lnTo>
+                <a:arcTo hR="63500" wR="63500" stAng="0" swAng="5400000"/>
+                <a:lnTo>
+                  <a:pt x="63500" y="340320"/>
+                </a:lnTo>
+                <a:arcTo hR="63500" wR="63500" stAng="5400000" swAng="5400000"/>
+                <a:lnTo>
+                  <a:pt x="0" y="63500"/>
+                </a:lnTo>
+                <a:arcTo hR="63500" wR="63500" stAng="10800000" swAng="5400000"/>
+                <a:close/>
+              </a:path>
+            </a:pathLst>
+          </a:custGeom>
+          <a:solidFill>
+            <a:srgbClr val="55697A"/>
+          </a:solidFill>
+          <a:ln/>
+        </p:spPr>
+        <p:txBody>
+          <a:bodyPr wrap="square" lIns="0" tIns="63500" rIns="0" bIns="38100" rtlCol="0" anchor="t">
+            <a:normAutofit/>
+          </a:bodyPr>
+          <a:lstStyle/>
+          <a:p>
+            <a:pPr algn="ctr" indent="0" marL="0">
               <a:lnSpc>
                 <a:spcPts val="1680"/>
               </a:lnSpc>
               <a:buNone/>
             </a:pPr>
             <a:r>
-              <a:rPr lang="en-US" sz="1200" dirty="0">
-                <a:solidFill>
-                  <a:srgbClr val="55697A"/>
+              <a:rPr lang="en-US" sz="1200" b="1" dirty="0">
+                <a:solidFill>
+                  <a:srgbClr val="F6F8F7"/>
                 </a:solidFill>
                 <a:latin typeface="IBM Plex Sans" pitchFamily="34" charset="0"/>
                 <a:ea typeface="IBM Plex Sans" pitchFamily="34" charset="-122"/>
                 <a:cs typeface="IBM Plex Sans" pitchFamily="34" charset="-120"/>
               </a:rPr>
+              <a:t>Given</a:t>
+            </a:r>
+            <a:endParaRPr lang="en-US" sz="1200" dirty="0"/>
+          </a:p>
+        </p:txBody>
+      </p:sp>
+      <p:sp>
+        <p:nvSpPr>
+          <p:cNvPr id="6" name="Text 4"/>
+          <p:cNvSpPr/>
+          <p:nvPr/>
+        </p:nvSpPr>
+        <p:spPr>
+          <a:xfrm>
+            <a:off x="2203450" y="1591270"/>
+            <a:ext cx="4944618" cy="256530"/>
+          </a:xfrm>
+          <a:prstGeom prst="rect">
+            <a:avLst/>
+          </a:prstGeom>
+          <a:noFill/>
+          <a:ln/>
+        </p:spPr>
+        <p:txBody>
+          <a:bodyPr wrap="square" lIns="0" tIns="0" rIns="0" bIns="0" rtlCol="0" anchor="t">
+            <a:normAutofit/>
+          </a:bodyPr>
+          <a:lstStyle/>
+          <a:p>
+            <a:pPr algn="l" indent="0" marL="0">
+              <a:lnSpc>
+                <a:spcPts val="1820"/>
+              </a:lnSpc>
+              <a:buNone/>
+            </a:pPr>
+            <a:r>
+              <a:rPr lang="en-US" sz="1400" b="1" dirty="0">
+                <a:solidFill>
+                  <a:srgbClr val="14303D"/>
+                </a:solidFill>
+                <a:latin typeface="IBM Plex Sans" pitchFamily="34" charset="0"/>
+                <a:ea typeface="IBM Plex Sans" pitchFamily="34" charset="-122"/>
+                <a:cs typeface="IBM Plex Sans" pitchFamily="34" charset="-120"/>
+              </a:rPr>
+              <a:t>Starts from a short brief</a:t>
+            </a:r>
+            <a:endParaRPr lang="en-US" sz="1400" dirty="0"/>
+          </a:p>
+        </p:txBody>
+      </p:sp>
+      <p:sp>
+        <p:nvSpPr>
+          <p:cNvPr id="7" name="Text 5"/>
+          <p:cNvSpPr/>
+          <p:nvPr/>
+        </p:nvSpPr>
+        <p:spPr>
+          <a:xfrm>
+            <a:off x="2203450" y="1847800"/>
+            <a:ext cx="4944618" cy="238720"/>
+          </a:xfrm>
+          <a:prstGeom prst="rect">
+            <a:avLst/>
+          </a:prstGeom>
+          <a:noFill/>
+          <a:ln/>
+        </p:spPr>
+        <p:txBody>
+          <a:bodyPr wrap="square" lIns="0" tIns="0" rIns="0" bIns="0" rtlCol="0" anchor="t">
+            <a:normAutofit/>
+          </a:bodyPr>
+          <a:lstStyle/>
+          <a:p>
+            <a:pPr algn="l" indent="0" marL="0">
+              <a:lnSpc>
+                <a:spcPts val="1680"/>
+              </a:lnSpc>
+              <a:buNone/>
+            </a:pPr>
+            <a:r>
+              <a:rPr lang="en-US" sz="1200" dirty="0">
+                <a:solidFill>
+                  <a:srgbClr val="46596A"/>
+                </a:solidFill>
+                <a:latin typeface="IBM Plex Sans" pitchFamily="34" charset="0"/>
+                <a:ea typeface="IBM Plex Sans" pitchFamily="34" charset="-122"/>
+                <a:cs typeface="IBM Plex Sans" pitchFamily="34" charset="-120"/>
+              </a:rPr>
+              <a:t>coverage map, last few runs, open questions</a:t>
+            </a:r>
+            <a:endParaRPr lang="en-US" sz="1200" dirty="0"/>
+          </a:p>
+        </p:txBody>
+      </p:sp>
+      <p:sp>
+        <p:nvSpPr>
+          <p:cNvPr id="8" name="Shape 6"/>
+          <p:cNvSpPr/>
+          <p:nvPr/>
+        </p:nvSpPr>
+        <p:spPr>
+          <a:xfrm>
+            <a:off x="815975" y="2248446"/>
+            <a:ext cx="6343650" cy="654000"/>
+          </a:xfrm>
+          <a:prstGeom prst="roundRect">
+            <a:avLst>
+              <a:gd name="adj" fmla="val 13108"/>
+            </a:avLst>
+          </a:prstGeom>
+          <a:solidFill>
+            <a:srgbClr val="FDFEFE"/>
+          </a:solidFill>
+          <a:ln w="6350">
+            <a:solidFill>
+              <a:srgbClr val="D6E1E6"/>
+            </a:solidFill>
+            <a:prstDash val="solid"/>
+          </a:ln>
+        </p:spPr>
+      </p:sp>
+      <p:sp>
+        <p:nvSpPr>
+          <p:cNvPr id="9" name="Text 7"/>
+          <p:cNvSpPr/>
+          <p:nvPr/>
+        </p:nvSpPr>
+        <p:spPr>
+          <a:xfrm>
+            <a:off x="971550" y="2405261"/>
+            <a:ext cx="1079500" cy="340320"/>
+          </a:xfrm>
+          <a:custGeom>
+            <a:avLst/>
+            <a:gdLst/>
+            <a:ahLst/>
+            <a:cxnLst/>
+            <a:rect l="l" t="t" r="r" b="b"/>
+            <a:pathLst>
+              <a:path w="1079500" h="340320">
+                <a:moveTo>
+                  <a:pt x="63500" y="0"/>
+                </a:moveTo>
+                <a:lnTo>
+                  <a:pt x="1016000" y="0"/>
+                </a:lnTo>
+                <a:arcTo hR="63500" wR="63500" stAng="16200000" swAng="5400000"/>
+                <a:lnTo>
+                  <a:pt x="1079500" y="276820"/>
+                </a:lnTo>
+                <a:arcTo hR="63500" wR="63500" stAng="0" swAng="5400000"/>
+                <a:lnTo>
+                  <a:pt x="63500" y="340320"/>
+                </a:lnTo>
+                <a:arcTo hR="63500" wR="63500" stAng="5400000" swAng="5400000"/>
+                <a:lnTo>
+                  <a:pt x="0" y="63500"/>
+                </a:lnTo>
+                <a:arcTo hR="63500" wR="63500" stAng="10800000" swAng="5400000"/>
+                <a:close/>
+              </a:path>
+            </a:pathLst>
+          </a:custGeom>
+          <a:solidFill>
+            <a:srgbClr val="0F6E94"/>
+          </a:solidFill>
+          <a:ln/>
+        </p:spPr>
+        <p:txBody>
+          <a:bodyPr wrap="square" lIns="0" tIns="63500" rIns="0" bIns="38100" rtlCol="0" anchor="t">
+            <a:normAutofit/>
+          </a:bodyPr>
+          <a:lstStyle/>
+          <a:p>
+            <a:pPr algn="ctr" indent="0" marL="0">
+              <a:lnSpc>
+                <a:spcPts val="1680"/>
+              </a:lnSpc>
+              <a:buNone/>
+            </a:pPr>
+            <a:r>
+              <a:rPr lang="en-US" sz="1200" b="1" dirty="0">
+                <a:solidFill>
+                  <a:srgbClr val="F6F8F7"/>
+                </a:solidFill>
+                <a:latin typeface="IBM Plex Sans" pitchFamily="34" charset="0"/>
+                <a:ea typeface="IBM Plex Sans" pitchFamily="34" charset="-122"/>
+                <a:cs typeface="IBM Plex Sans" pitchFamily="34" charset="-120"/>
+              </a:rPr>
+              <a:t>Calls 1–3</a:t>
+            </a:r>
+            <a:endParaRPr lang="en-US" sz="1200" dirty="0"/>
+          </a:p>
+        </p:txBody>
+      </p:sp>
+      <p:sp>
+        <p:nvSpPr>
+          <p:cNvPr id="10" name="Text 8"/>
+          <p:cNvSpPr/>
+          <p:nvPr/>
+        </p:nvSpPr>
+        <p:spPr>
+          <a:xfrm>
+            <a:off x="2203450" y="2340521"/>
+            <a:ext cx="4944618" cy="256530"/>
+          </a:xfrm>
+          <a:prstGeom prst="rect">
+            <a:avLst/>
+          </a:prstGeom>
+          <a:noFill/>
+          <a:ln/>
+        </p:spPr>
+        <p:txBody>
+          <a:bodyPr wrap="square" lIns="0" tIns="0" rIns="0" bIns="0" rtlCol="0" anchor="t">
+            <a:normAutofit/>
+          </a:bodyPr>
+          <a:lstStyle/>
+          <a:p>
+            <a:pPr algn="l" indent="0" marL="0">
+              <a:lnSpc>
+                <a:spcPts val="1820"/>
+              </a:lnSpc>
+              <a:buNone/>
+            </a:pPr>
+            <a:r>
+              <a:rPr lang="en-US" sz="1400" b="1" dirty="0">
+                <a:solidFill>
+                  <a:srgbClr val="14303D"/>
+                </a:solidFill>
+                <a:latin typeface="IBM Plex Sans" pitchFamily="34" charset="0"/>
+                <a:ea typeface="IBM Plex Sans" pitchFamily="34" charset="-122"/>
+                <a:cs typeface="IBM Plex Sans" pitchFamily="34" charset="-120"/>
+              </a:rPr>
+              <a:t>Orient: what is known, and where the gaps are</a:t>
+            </a:r>
+            <a:endParaRPr lang="en-US" sz="1400" dirty="0"/>
+          </a:p>
+        </p:txBody>
+      </p:sp>
+      <p:sp>
+        <p:nvSpPr>
+          <p:cNvPr id="11" name="Text 9"/>
+          <p:cNvSpPr/>
+          <p:nvPr/>
+        </p:nvSpPr>
+        <p:spPr>
+          <a:xfrm>
+            <a:off x="2203450" y="2597051"/>
+            <a:ext cx="4944618" cy="238720"/>
+          </a:xfrm>
+          <a:prstGeom prst="rect">
+            <a:avLst/>
+          </a:prstGeom>
+          <a:noFill/>
+          <a:ln/>
+        </p:spPr>
+        <p:txBody>
+          <a:bodyPr wrap="square" lIns="0" tIns="0" rIns="0" bIns="0" rtlCol="0" anchor="t">
+            <a:normAutofit/>
+          </a:bodyPr>
+          <a:lstStyle/>
+          <a:p>
+            <a:pPr algn="l" indent="0" marL="0">
+              <a:lnSpc>
+                <a:spcPts val="1680"/>
+              </a:lnSpc>
+              <a:buNone/>
+            </a:pPr>
+            <a:r>
+              <a:rPr lang="en-US" sz="1200" dirty="0">
+                <a:solidFill>
+                  <a:srgbClr val="46596A"/>
+                </a:solidFill>
+                <a:latin typeface="IBM Plex Mono" pitchFamily="34" charset="0"/>
+                <a:ea typeface="IBM Plex Mono" pitchFamily="34" charset="-122"/>
+                <a:cs typeface="IBM Plex Mono" pitchFamily="34" charset="-120"/>
+              </a:rPr>
+              <a:t>findings_summary, get_coverage, list_screens</a:t>
+            </a:r>
+            <a:endParaRPr lang="en-US" sz="1200" dirty="0"/>
+          </a:p>
+        </p:txBody>
+      </p:sp>
+      <p:sp>
+        <p:nvSpPr>
+          <p:cNvPr id="12" name="Shape 10"/>
+          <p:cNvSpPr/>
+          <p:nvPr/>
+        </p:nvSpPr>
+        <p:spPr>
+          <a:xfrm>
+            <a:off x="815975" y="2997696"/>
+            <a:ext cx="6343650" cy="654000"/>
+          </a:xfrm>
+          <a:prstGeom prst="roundRect">
+            <a:avLst>
+              <a:gd name="adj" fmla="val 13108"/>
+            </a:avLst>
+          </a:prstGeom>
+          <a:solidFill>
+            <a:srgbClr val="FDFEFE"/>
+          </a:solidFill>
+          <a:ln w="6350">
+            <a:solidFill>
+              <a:srgbClr val="D6E1E6"/>
+            </a:solidFill>
+            <a:prstDash val="solid"/>
+          </a:ln>
+        </p:spPr>
+      </p:sp>
+      <p:sp>
+        <p:nvSpPr>
+          <p:cNvPr id="13" name="Text 11"/>
+          <p:cNvSpPr/>
+          <p:nvPr/>
+        </p:nvSpPr>
+        <p:spPr>
+          <a:xfrm>
+            <a:off x="971550" y="3154511"/>
+            <a:ext cx="1079500" cy="340320"/>
+          </a:xfrm>
+          <a:custGeom>
+            <a:avLst/>
+            <a:gdLst/>
+            <a:ahLst/>
+            <a:cxnLst/>
+            <a:rect l="l" t="t" r="r" b="b"/>
+            <a:pathLst>
+              <a:path w="1079500" h="340320">
+                <a:moveTo>
+                  <a:pt x="63500" y="0"/>
+                </a:moveTo>
+                <a:lnTo>
+                  <a:pt x="1016000" y="0"/>
+                </a:lnTo>
+                <a:arcTo hR="63500" wR="63500" stAng="16200000" swAng="5400000"/>
+                <a:lnTo>
+                  <a:pt x="1079500" y="276820"/>
+                </a:lnTo>
+                <a:arcTo hR="63500" wR="63500" stAng="0" swAng="5400000"/>
+                <a:lnTo>
+                  <a:pt x="63500" y="340320"/>
+                </a:lnTo>
+                <a:arcTo hR="63500" wR="63500" stAng="5400000" swAng="5400000"/>
+                <a:lnTo>
+                  <a:pt x="0" y="63500"/>
+                </a:lnTo>
+                <a:arcTo hR="63500" wR="63500" stAng="10800000" swAng="5400000"/>
+                <a:close/>
+              </a:path>
+            </a:pathLst>
+          </a:custGeom>
+          <a:solidFill>
+            <a:srgbClr val="0F6E94"/>
+          </a:solidFill>
+          <a:ln/>
+        </p:spPr>
+        <p:txBody>
+          <a:bodyPr wrap="square" lIns="0" tIns="63500" rIns="0" bIns="38100" rtlCol="0" anchor="t">
+            <a:normAutofit/>
+          </a:bodyPr>
+          <a:lstStyle/>
+          <a:p>
+            <a:pPr algn="ctr" indent="0" marL="0">
+              <a:lnSpc>
+                <a:spcPts val="1680"/>
+              </a:lnSpc>
+              <a:buNone/>
+            </a:pPr>
+            <a:r>
+              <a:rPr lang="en-US" sz="1200" b="1" dirty="0">
+                <a:solidFill>
+                  <a:srgbClr val="F6F8F7"/>
+                </a:solidFill>
+                <a:latin typeface="IBM Plex Sans" pitchFamily="34" charset="0"/>
+                <a:ea typeface="IBM Plex Sans" pitchFamily="34" charset="-122"/>
+                <a:cs typeface="IBM Plex Sans" pitchFamily="34" charset="-120"/>
+              </a:rPr>
+              <a:t>Call 4</a:t>
+            </a:r>
+            <a:endParaRPr lang="en-US" sz="1200" dirty="0"/>
+          </a:p>
+        </p:txBody>
+      </p:sp>
+      <p:sp>
+        <p:nvSpPr>
+          <p:cNvPr id="14" name="Text 12"/>
+          <p:cNvSpPr/>
+          <p:nvPr/>
+        </p:nvSpPr>
+        <p:spPr>
+          <a:xfrm>
+            <a:off x="2203450" y="3089771"/>
+            <a:ext cx="4944618" cy="256530"/>
+          </a:xfrm>
+          <a:prstGeom prst="rect">
+            <a:avLst/>
+          </a:prstGeom>
+          <a:noFill/>
+          <a:ln/>
+        </p:spPr>
+        <p:txBody>
+          <a:bodyPr wrap="square" lIns="0" tIns="0" rIns="0" bIns="0" rtlCol="0" anchor="t">
+            <a:normAutofit/>
+          </a:bodyPr>
+          <a:lstStyle/>
+          <a:p>
+            <a:pPr algn="l" indent="0" marL="0">
+              <a:lnSpc>
+                <a:spcPts val="1820"/>
+              </a:lnSpc>
+              <a:buNone/>
+            </a:pPr>
+            <a:r>
+              <a:rPr lang="en-US" sz="1400" b="1" dirty="0">
+                <a:solidFill>
+                  <a:srgbClr val="14303D"/>
+                </a:solidFill>
+                <a:latin typeface="IBM Plex Sans" pitchFamily="34" charset="0"/>
+                <a:ea typeface="IBM Plex Sans" pitchFamily="34" charset="-122"/>
+                <a:cs typeface="IBM Plex Sans" pitchFamily="34" charset="-120"/>
+              </a:rPr>
+              <a:t>Pick up an unfinished thread</a:t>
+            </a:r>
+            <a:endParaRPr lang="en-US" sz="1400" dirty="0"/>
+          </a:p>
+        </p:txBody>
+      </p:sp>
+      <p:sp>
+        <p:nvSpPr>
+          <p:cNvPr id="15" name="Text 13"/>
+          <p:cNvSpPr/>
+          <p:nvPr/>
+        </p:nvSpPr>
+        <p:spPr>
+          <a:xfrm>
+            <a:off x="2203450" y="3346301"/>
+            <a:ext cx="4944618" cy="238720"/>
+          </a:xfrm>
+          <a:prstGeom prst="rect">
+            <a:avLst/>
+          </a:prstGeom>
+          <a:noFill/>
+          <a:ln/>
+        </p:spPr>
+        <p:txBody>
+          <a:bodyPr wrap="square" lIns="0" tIns="0" rIns="0" bIns="0" rtlCol="0" anchor="t">
+            <a:normAutofit/>
+          </a:bodyPr>
+          <a:lstStyle/>
+          <a:p>
+            <a:pPr algn="l" indent="0" marL="0">
+              <a:lnSpc>
+                <a:spcPts val="1680"/>
+              </a:lnSpc>
+              <a:buNone/>
+            </a:pPr>
+            <a:r>
+              <a:rPr lang="en-US" sz="1200" dirty="0">
+                <a:solidFill>
+                  <a:srgbClr val="46596A"/>
+                </a:solidFill>
+                <a:latin typeface="IBM Plex Mono" pitchFamily="34" charset="0"/>
+                <a:ea typeface="IBM Plex Mono" pitchFamily="34" charset="-122"/>
+                <a:cs typeface="IBM Plex Mono" pitchFamily="34" charset="-120"/>
+              </a:rPr>
+              <a:t>list_open_questions, list_findings</a:t>
+            </a:r>
+            <a:endParaRPr lang="en-US" sz="1200" dirty="0"/>
+          </a:p>
+        </p:txBody>
+      </p:sp>
+      <p:sp>
+        <p:nvSpPr>
+          <p:cNvPr id="16" name="Shape 14"/>
+          <p:cNvSpPr/>
+          <p:nvPr/>
+        </p:nvSpPr>
+        <p:spPr>
+          <a:xfrm>
+            <a:off x="815975" y="3746946"/>
+            <a:ext cx="6343650" cy="654000"/>
+          </a:xfrm>
+          <a:prstGeom prst="roundRect">
+            <a:avLst>
+              <a:gd name="adj" fmla="val 13108"/>
+            </a:avLst>
+          </a:prstGeom>
+          <a:solidFill>
+            <a:srgbClr val="FDFEFE"/>
+          </a:solidFill>
+          <a:ln w="6350">
+            <a:solidFill>
+              <a:srgbClr val="D6E1E6"/>
+            </a:solidFill>
+            <a:prstDash val="solid"/>
+          </a:ln>
+        </p:spPr>
+      </p:sp>
+      <p:sp>
+        <p:nvSpPr>
+          <p:cNvPr id="17" name="Text 15"/>
+          <p:cNvSpPr/>
+          <p:nvPr/>
+        </p:nvSpPr>
+        <p:spPr>
+          <a:xfrm>
+            <a:off x="971550" y="3903762"/>
+            <a:ext cx="1079500" cy="340320"/>
+          </a:xfrm>
+          <a:custGeom>
+            <a:avLst/>
+            <a:gdLst/>
+            <a:ahLst/>
+            <a:cxnLst/>
+            <a:rect l="l" t="t" r="r" b="b"/>
+            <a:pathLst>
+              <a:path w="1079500" h="340320">
+                <a:moveTo>
+                  <a:pt x="63500" y="0"/>
+                </a:moveTo>
+                <a:lnTo>
+                  <a:pt x="1016000" y="0"/>
+                </a:lnTo>
+                <a:arcTo hR="63500" wR="63500" stAng="16200000" swAng="5400000"/>
+                <a:lnTo>
+                  <a:pt x="1079500" y="276820"/>
+                </a:lnTo>
+                <a:arcTo hR="63500" wR="63500" stAng="0" swAng="5400000"/>
+                <a:lnTo>
+                  <a:pt x="63500" y="340320"/>
+                </a:lnTo>
+                <a:arcTo hR="63500" wR="63500" stAng="5400000" swAng="5400000"/>
+                <a:lnTo>
+                  <a:pt x="0" y="63500"/>
+                </a:lnTo>
+                <a:arcTo hR="63500" wR="63500" stAng="10800000" swAng="5400000"/>
+                <a:close/>
+              </a:path>
+            </a:pathLst>
+          </a:custGeom>
+          <a:solidFill>
+            <a:srgbClr val="0F6E94"/>
+          </a:solidFill>
+          <a:ln/>
+        </p:spPr>
+        <p:txBody>
+          <a:bodyPr wrap="square" lIns="0" tIns="63500" rIns="0" bIns="38100" rtlCol="0" anchor="t">
+            <a:normAutofit/>
+          </a:bodyPr>
+          <a:lstStyle/>
+          <a:p>
+            <a:pPr algn="ctr" indent="0" marL="0">
+              <a:lnSpc>
+                <a:spcPts val="1680"/>
+              </a:lnSpc>
+              <a:buNone/>
+            </a:pPr>
+            <a:r>
+              <a:rPr lang="en-US" sz="1200" b="1" dirty="0">
+                <a:solidFill>
+                  <a:srgbClr val="F6F8F7"/>
+                </a:solidFill>
+                <a:latin typeface="IBM Plex Sans" pitchFamily="34" charset="0"/>
+                <a:ea typeface="IBM Plex Sans" pitchFamily="34" charset="-122"/>
+                <a:cs typeface="IBM Plex Sans" pitchFamily="34" charset="-120"/>
+              </a:rPr>
+              <a:t>Call 5 on</a:t>
+            </a:r>
+            <a:endParaRPr lang="en-US" sz="1200" dirty="0"/>
+          </a:p>
+        </p:txBody>
+      </p:sp>
+      <p:sp>
+        <p:nvSpPr>
+          <p:cNvPr id="18" name="Text 16"/>
+          <p:cNvSpPr/>
+          <p:nvPr/>
+        </p:nvSpPr>
+        <p:spPr>
+          <a:xfrm>
+            <a:off x="2203450" y="3839021"/>
+            <a:ext cx="4944618" cy="256530"/>
+          </a:xfrm>
+          <a:prstGeom prst="rect">
+            <a:avLst/>
+          </a:prstGeom>
+          <a:noFill/>
+          <a:ln/>
+        </p:spPr>
+        <p:txBody>
+          <a:bodyPr wrap="square" lIns="0" tIns="0" rIns="0" bIns="0" rtlCol="0" anchor="t">
+            <a:normAutofit/>
+          </a:bodyPr>
+          <a:lstStyle/>
+          <a:p>
+            <a:pPr algn="l" indent="0" marL="0">
+              <a:lnSpc>
+                <a:spcPts val="1820"/>
+              </a:lnSpc>
+              <a:buNone/>
+            </a:pPr>
+            <a:r>
+              <a:rPr lang="en-US" sz="1400" b="1" dirty="0">
+                <a:solidFill>
+                  <a:srgbClr val="14303D"/>
+                </a:solidFill>
+                <a:latin typeface="IBM Plex Sans" pitchFamily="34" charset="0"/>
+                <a:ea typeface="IBM Plex Sans" pitchFamily="34" charset="-122"/>
+                <a:cs typeface="IBM Plex Sans" pitchFamily="34" charset="-120"/>
+              </a:rPr>
+              <a:t>Ground it in a real requirement and screen</a:t>
+            </a:r>
+            <a:endParaRPr lang="en-US" sz="1400" dirty="0"/>
+          </a:p>
+        </p:txBody>
+      </p:sp>
+      <p:sp>
+        <p:nvSpPr>
+          <p:cNvPr id="19" name="Text 17"/>
+          <p:cNvSpPr/>
+          <p:nvPr/>
+        </p:nvSpPr>
+        <p:spPr>
+          <a:xfrm>
+            <a:off x="2203450" y="4095552"/>
+            <a:ext cx="4944618" cy="238720"/>
+          </a:xfrm>
+          <a:prstGeom prst="rect">
+            <a:avLst/>
+          </a:prstGeom>
+          <a:noFill/>
+          <a:ln/>
+        </p:spPr>
+        <p:txBody>
+          <a:bodyPr wrap="square" lIns="0" tIns="0" rIns="0" bIns="0" rtlCol="0" anchor="t">
+            <a:normAutofit/>
+          </a:bodyPr>
+          <a:lstStyle/>
+          <a:p>
+            <a:pPr algn="l" indent="0" marL="0">
+              <a:lnSpc>
+                <a:spcPts val="1680"/>
+              </a:lnSpc>
+              <a:buNone/>
+            </a:pPr>
+            <a:r>
+              <a:rPr lang="en-US" sz="1200" dirty="0">
+                <a:solidFill>
+                  <a:srgbClr val="46596A"/>
+                </a:solidFill>
+                <a:latin typeface="IBM Plex Mono" pitchFamily="34" charset="0"/>
+                <a:ea typeface="IBM Plex Mono" pitchFamily="34" charset="-122"/>
+                <a:cs typeface="IBM Plex Mono" pitchFamily="34" charset="-120"/>
+              </a:rPr>
+              <a:t>search_requirements, get_screen</a:t>
+            </a:r>
+            <a:endParaRPr lang="en-US" sz="1200" dirty="0"/>
+          </a:p>
+        </p:txBody>
+      </p:sp>
+      <p:sp>
+        <p:nvSpPr>
+          <p:cNvPr id="20" name="Shape 18"/>
+          <p:cNvSpPr/>
+          <p:nvPr/>
+        </p:nvSpPr>
+        <p:spPr>
+          <a:xfrm>
+            <a:off x="815975" y="4496197"/>
+            <a:ext cx="6343650" cy="654000"/>
+          </a:xfrm>
+          <a:prstGeom prst="roundRect">
+            <a:avLst>
+              <a:gd name="adj" fmla="val 13108"/>
+            </a:avLst>
+          </a:prstGeom>
+          <a:solidFill>
+            <a:srgbClr val="FDFEFE"/>
+          </a:solidFill>
+          <a:ln w="6350">
+            <a:solidFill>
+              <a:srgbClr val="D6E1E6"/>
+            </a:solidFill>
+            <a:prstDash val="solid"/>
+          </a:ln>
+        </p:spPr>
+      </p:sp>
+      <p:sp>
+        <p:nvSpPr>
+          <p:cNvPr id="21" name="Text 19"/>
+          <p:cNvSpPr/>
+          <p:nvPr/>
+        </p:nvSpPr>
+        <p:spPr>
+          <a:xfrm>
+            <a:off x="971550" y="4653012"/>
+            <a:ext cx="1079500" cy="340320"/>
+          </a:xfrm>
+          <a:custGeom>
+            <a:avLst/>
+            <a:gdLst/>
+            <a:ahLst/>
+            <a:cxnLst/>
+            <a:rect l="l" t="t" r="r" b="b"/>
+            <a:pathLst>
+              <a:path w="1079500" h="340320">
+                <a:moveTo>
+                  <a:pt x="63500" y="0"/>
+                </a:moveTo>
+                <a:lnTo>
+                  <a:pt x="1016000" y="0"/>
+                </a:lnTo>
+                <a:arcTo hR="63500" wR="63500" stAng="16200000" swAng="5400000"/>
+                <a:lnTo>
+                  <a:pt x="1079500" y="276820"/>
+                </a:lnTo>
+                <a:arcTo hR="63500" wR="63500" stAng="0" swAng="5400000"/>
+                <a:lnTo>
+                  <a:pt x="63500" y="340320"/>
+                </a:lnTo>
+                <a:arcTo hR="63500" wR="63500" stAng="5400000" swAng="5400000"/>
+                <a:lnTo>
+                  <a:pt x="0" y="63500"/>
+                </a:lnTo>
+                <a:arcTo hR="63500" wR="63500" stAng="10800000" swAng="5400000"/>
+                <a:close/>
+              </a:path>
+            </a:pathLst>
+          </a:custGeom>
+          <a:solidFill>
+            <a:srgbClr val="A9502C"/>
+          </a:solidFill>
+          <a:ln/>
+        </p:spPr>
+        <p:txBody>
+          <a:bodyPr wrap="square" lIns="0" tIns="63500" rIns="0" bIns="38100" rtlCol="0" anchor="t">
+            <a:normAutofit/>
+          </a:bodyPr>
+          <a:lstStyle/>
+          <a:p>
+            <a:pPr algn="ctr" indent="0" marL="0">
+              <a:lnSpc>
+                <a:spcPts val="1680"/>
+              </a:lnSpc>
+              <a:buNone/>
+            </a:pPr>
+            <a:r>
+              <a:rPr lang="en-US" sz="1200" b="1" dirty="0">
+                <a:solidFill>
+                  <a:srgbClr val="F6F8F7"/>
+                </a:solidFill>
+                <a:latin typeface="IBM Plex Sans" pitchFamily="34" charset="0"/>
+                <a:ea typeface="IBM Plex Sans" pitchFamily="34" charset="-122"/>
+                <a:cs typeface="IBM Plex Sans" pitchFamily="34" charset="-120"/>
+              </a:rPr>
+              <a:t>Turn 7 on</a:t>
+            </a:r>
+            <a:endParaRPr lang="en-US" sz="1200" dirty="0"/>
+          </a:p>
+        </p:txBody>
+      </p:sp>
+      <p:sp>
+        <p:nvSpPr>
+          <p:cNvPr id="22" name="Text 20"/>
+          <p:cNvSpPr/>
+          <p:nvPr/>
+        </p:nvSpPr>
+        <p:spPr>
+          <a:xfrm>
+            <a:off x="2203450" y="4588272"/>
+            <a:ext cx="4944618" cy="256530"/>
+          </a:xfrm>
+          <a:prstGeom prst="rect">
+            <a:avLst/>
+          </a:prstGeom>
+          <a:noFill/>
+          <a:ln/>
+        </p:spPr>
+        <p:txBody>
+          <a:bodyPr wrap="square" lIns="0" tIns="0" rIns="0" bIns="0" rtlCol="0" anchor="t">
+            <a:normAutofit/>
+          </a:bodyPr>
+          <a:lstStyle/>
+          <a:p>
+            <a:pPr algn="l" indent="0" marL="0">
+              <a:lnSpc>
+                <a:spcPts val="1820"/>
+              </a:lnSpc>
+              <a:buNone/>
+            </a:pPr>
+            <a:r>
+              <a:rPr lang="en-US" sz="1400" b="1" dirty="0">
+                <a:solidFill>
+                  <a:srgbClr val="14303D"/>
+                </a:solidFill>
+                <a:latin typeface="IBM Plex Sans" pitchFamily="34" charset="0"/>
+                <a:ea typeface="IBM Plex Sans" pitchFamily="34" charset="-122"/>
+                <a:cs typeface="IBM Plex Sans" pitchFamily="34" charset="-120"/>
+              </a:rPr>
+              <a:t>Forced to commit</a:t>
+            </a:r>
+            <a:endParaRPr lang="en-US" sz="1400" dirty="0"/>
+          </a:p>
+        </p:txBody>
+      </p:sp>
+      <p:sp>
+        <p:nvSpPr>
+          <p:cNvPr id="23" name="Text 21"/>
+          <p:cNvSpPr/>
+          <p:nvPr/>
+        </p:nvSpPr>
+        <p:spPr>
+          <a:xfrm>
+            <a:off x="2203450" y="4844802"/>
+            <a:ext cx="4944618" cy="238720"/>
+          </a:xfrm>
+          <a:prstGeom prst="rect">
+            <a:avLst/>
+          </a:prstGeom>
+          <a:noFill/>
+          <a:ln/>
+        </p:spPr>
+        <p:txBody>
+          <a:bodyPr wrap="square" lIns="0" tIns="0" rIns="0" bIns="0" rtlCol="0" anchor="t">
+            <a:normAutofit/>
+          </a:bodyPr>
+          <a:lstStyle/>
+          <a:p>
+            <a:pPr algn="l" indent="0" marL="0">
+              <a:lnSpc>
+                <a:spcPts val="1680"/>
+              </a:lnSpc>
+              <a:buNone/>
+            </a:pPr>
+            <a:r>
+              <a:rPr lang="en-US" sz="1200" dirty="0">
+                <a:solidFill>
+                  <a:srgbClr val="46596A"/>
+                </a:solidFill>
+                <a:latin typeface="IBM Plex Mono" pitchFamily="34" charset="0"/>
+                <a:ea typeface="IBM Plex Mono" pitchFamily="34" charset="-122"/>
+                <a:cs typeface="IBM Plex Mono" pitchFamily="34" charset="-120"/>
+              </a:rPr>
+              <a:t>the tool choice is pinned to propose_test_case</a:t>
+            </a:r>
+            <a:endParaRPr lang="en-US" sz="1200" dirty="0"/>
+          </a:p>
+        </p:txBody>
+      </p:sp>
+      <p:sp>
+        <p:nvSpPr>
+          <p:cNvPr id="24" name="Shape 22"/>
+          <p:cNvSpPr/>
+          <p:nvPr/>
+        </p:nvSpPr>
+        <p:spPr>
+          <a:xfrm>
+            <a:off x="7369175" y="1499195"/>
+            <a:ext cx="4006850" cy="3651002"/>
+          </a:xfrm>
+          <a:prstGeom prst="roundRect">
+            <a:avLst>
+              <a:gd name="adj" fmla="val 2696"/>
+            </a:avLst>
+          </a:prstGeom>
+          <a:solidFill>
+            <a:srgbClr val="FDFEFE"/>
+          </a:solidFill>
+          <a:ln w="6350">
+            <a:solidFill>
+              <a:srgbClr val="D6E1E6"/>
+            </a:solidFill>
+            <a:prstDash val="solid"/>
+          </a:ln>
+        </p:spPr>
+      </p:sp>
+      <p:sp>
+        <p:nvSpPr>
+          <p:cNvPr id="25" name="Text 23"/>
+          <p:cNvSpPr/>
+          <p:nvPr/>
+        </p:nvSpPr>
+        <p:spPr>
+          <a:xfrm>
+            <a:off x="7550150" y="1680170"/>
+            <a:ext cx="3754247" cy="256530"/>
+          </a:xfrm>
+          <a:prstGeom prst="rect">
+            <a:avLst/>
+          </a:prstGeom>
+          <a:noFill/>
+          <a:ln/>
+        </p:spPr>
+        <p:txBody>
+          <a:bodyPr wrap="square" lIns="0" tIns="0" rIns="0" bIns="0" rtlCol="0" anchor="t">
+            <a:normAutofit/>
+          </a:bodyPr>
+          <a:lstStyle/>
+          <a:p>
+            <a:pPr algn="l" indent="0" marL="0">
+              <a:lnSpc>
+                <a:spcPts val="1820"/>
+              </a:lnSpc>
+              <a:buNone/>
+            </a:pPr>
+            <a:r>
+              <a:rPr lang="en-US" sz="1400" b="1" dirty="0">
+                <a:solidFill>
+                  <a:srgbClr val="14303D"/>
+                </a:solidFill>
+                <a:latin typeface="IBM Plex Sans" pitchFamily="34" charset="0"/>
+                <a:ea typeface="IBM Plex Sans" pitchFamily="34" charset="-122"/>
+                <a:cs typeface="IBM Plex Sans" pitchFamily="34" charset="-120"/>
+              </a:rPr>
+              <a:t>Every proposal is validated</a:t>
+            </a:r>
+            <a:endParaRPr lang="en-US" sz="1400" dirty="0"/>
+          </a:p>
+        </p:txBody>
+      </p:sp>
+      <p:sp>
+        <p:nvSpPr>
+          <p:cNvPr id="26" name="Text 24"/>
+          <p:cNvSpPr/>
+          <p:nvPr/>
+        </p:nvSpPr>
+        <p:spPr>
+          <a:xfrm>
+            <a:off x="7550150" y="1987500"/>
+            <a:ext cx="3754247" cy="238720"/>
+          </a:xfrm>
+          <a:prstGeom prst="rect">
+            <a:avLst/>
+          </a:prstGeom>
+          <a:noFill/>
+          <a:ln/>
+        </p:spPr>
+        <p:txBody>
+          <a:bodyPr wrap="square" lIns="0" tIns="0" rIns="0" bIns="0" rtlCol="0" anchor="t">
+            <a:normAutofit/>
+          </a:bodyPr>
+          <a:lstStyle/>
+          <a:p>
+            <a:pPr algn="l" indent="0" marL="0">
+              <a:lnSpc>
+                <a:spcPts val="1680"/>
+              </a:lnSpc>
+              <a:buNone/>
+            </a:pPr>
+            <a:r>
+              <a:rPr lang="en-US" sz="1200" dirty="0">
+                <a:solidFill>
+                  <a:srgbClr val="46596A"/>
+                </a:solidFill>
+                <a:latin typeface="IBM Plex Sans" pitchFamily="34" charset="0"/>
+                <a:ea typeface="IBM Plex Sans" pitchFamily="34" charset="-122"/>
+                <a:cs typeface="IBM Plex Sans" pitchFamily="34" charset="-120"/>
+              </a:rPr>
+              <a:t>Rejected if it:</a:t>
+            </a:r>
+            <a:endParaRPr lang="en-US" sz="1200" dirty="0"/>
+          </a:p>
+        </p:txBody>
+      </p:sp>
+      <p:sp>
+        <p:nvSpPr>
+          <p:cNvPr id="27" name="Text 25"/>
+          <p:cNvSpPr/>
+          <p:nvPr/>
+        </p:nvSpPr>
+        <p:spPr>
+          <a:xfrm>
+            <a:off x="7550150" y="2277021"/>
+            <a:ext cx="3754247" cy="1130201"/>
+          </a:xfrm>
+          <a:prstGeom prst="rect">
+            <a:avLst/>
+          </a:prstGeom>
+          <a:noFill/>
+          <a:ln/>
+        </p:spPr>
+        <p:txBody>
+          <a:bodyPr wrap="square" lIns="0" tIns="0" rIns="0" bIns="0" rtlCol="0" anchor="t">
+            <a:normAutofit/>
+          </a:bodyPr>
+          <a:lstStyle/>
+          <a:p>
+            <a:pPr algn="l" marL="182880" indent="-155194">
+              <a:lnSpc>
+                <a:spcPts val="1740"/>
+              </a:lnSpc>
+              <a:buSzPct val="100000"/>
+              <a:buChar char="•"/>
+            </a:pPr>
+            <a:r>
+              <a:rPr lang="en-US" sz="1200" dirty="0">
+                <a:solidFill>
+                  <a:srgbClr val="46596A"/>
+                </a:solidFill>
+                <a:latin typeface="IBM Plex Sans" pitchFamily="34" charset="0"/>
+                <a:ea typeface="IBM Plex Sans" pitchFamily="34" charset="-122"/>
+                <a:cs typeface="IBM Plex Sans" pitchFamily="34" charset="-120"/>
+              </a:rPr>
+              <a:t>names a screen never observed</a:t>
+            </a:r>
+            <a:endParaRPr lang="en-US" sz="1200" dirty="0"/>
+          </a:p>
+          <a:p>
+            <a:pPr algn="l" marL="182880" indent="-155194">
+              <a:lnSpc>
+                <a:spcPts val="1740"/>
+              </a:lnSpc>
+              <a:buSzPct val="100000"/>
+              <a:buChar char="•"/>
+            </a:pPr>
+            <a:r>
+              <a:rPr lang="en-US" sz="1200" dirty="0">
+                <a:solidFill>
+                  <a:srgbClr val="46596A"/>
+                </a:solidFill>
+                <a:latin typeface="IBM Plex Sans" pitchFamily="34" charset="0"/>
+                <a:ea typeface="IBM Plex Sans" pitchFamily="34" charset="-122"/>
+                <a:cs typeface="IBM Plex Sans" pitchFamily="34" charset="-120"/>
+              </a:rPr>
+              <a:t>cites a requirement id that does not exist</a:t>
+            </a:r>
+            <a:endParaRPr lang="en-US" sz="1200" dirty="0"/>
+          </a:p>
+          <a:p>
+            <a:pPr algn="l" marL="182880" indent="-155194">
+              <a:lnSpc>
+                <a:spcPts val="1740"/>
+              </a:lnSpc>
+              <a:buSzPct val="100000"/>
+              <a:buChar char="•"/>
+            </a:pPr>
+            <a:r>
+              <a:rPr lang="en-US" sz="1200" dirty="0">
+                <a:solidFill>
+                  <a:srgbClr val="46596A"/>
+                </a:solidFill>
+                <a:latin typeface="IBM Plex Sans" pitchFamily="34" charset="0"/>
+                <a:ea typeface="IBM Plex Sans" pitchFamily="34" charset="-122"/>
+                <a:cs typeface="IBM Plex Sans" pitchFamily="34" charset="-120"/>
+              </a:rPr>
+              <a:t>repeats an earlier test</a:t>
+            </a:r>
+            <a:endParaRPr lang="en-US" sz="1200" dirty="0"/>
+          </a:p>
+          <a:p>
+            <a:pPr algn="l" marL="182880" indent="-155194">
+              <a:lnSpc>
+                <a:spcPts val="1740"/>
+              </a:lnSpc>
+              <a:buSzPct val="100000"/>
+              <a:buChar char="•"/>
+            </a:pPr>
+            <a:r>
+              <a:rPr lang="en-US" sz="1200" dirty="0">
+                <a:solidFill>
+                  <a:srgbClr val="46596A"/>
+                </a:solidFill>
+                <a:latin typeface="IBM Plex Sans" pitchFamily="34" charset="0"/>
+                <a:ea typeface="IBM Plex Sans" pitchFamily="34" charset="-122"/>
+                <a:cs typeface="IBM Plex Sans" pitchFamily="34" charset="-120"/>
+              </a:rPr>
+              <a:t>needs a precondition the tester cannot create</a:t>
+            </a:r>
+            <a:endParaRPr lang="en-US" sz="1200" dirty="0"/>
+          </a:p>
+          <a:p>
+            <a:pPr algn="l" marL="182880" indent="-155194">
+              <a:lnSpc>
+                <a:spcPts val="1740"/>
+              </a:lnSpc>
+              <a:buSzPct val="100000"/>
+              <a:buChar char="•"/>
+            </a:pPr>
+            <a:r>
+              <a:rPr lang="en-US" sz="1200" dirty="0">
+                <a:solidFill>
+                  <a:srgbClr val="46596A"/>
+                </a:solidFill>
+                <a:latin typeface="IBM Plex Sans" pitchFamily="34" charset="0"/>
+                <a:ea typeface="IBM Plex Sans" pitchFamily="34" charset="-122"/>
+                <a:cs typeface="IBM Plex Sans" pitchFamily="34" charset="-120"/>
+              </a:rPr>
+              <a:t>falls outside the agreed scope</a:t>
+            </a:r>
+            <a:endParaRPr lang="en-US" sz="1200" dirty="0"/>
+          </a:p>
+        </p:txBody>
+      </p:sp>
+      <p:sp>
+        <p:nvSpPr>
+          <p:cNvPr id="28" name="Text 26"/>
+          <p:cNvSpPr/>
+          <p:nvPr/>
+        </p:nvSpPr>
+        <p:spPr>
+          <a:xfrm>
+            <a:off x="7550150" y="3458021"/>
+            <a:ext cx="3754247" cy="238720"/>
+          </a:xfrm>
+          <a:prstGeom prst="rect">
+            <a:avLst/>
+          </a:prstGeom>
+          <a:noFill/>
+          <a:ln/>
+        </p:spPr>
+        <p:txBody>
+          <a:bodyPr wrap="square" lIns="0" tIns="0" rIns="0" bIns="0" rtlCol="0" anchor="t">
+            <a:normAutofit/>
+          </a:bodyPr>
+          <a:lstStyle/>
+          <a:p>
+            <a:pPr algn="l" indent="0" marL="0">
+              <a:lnSpc>
+                <a:spcPts val="1680"/>
+              </a:lnSpc>
+              <a:buNone/>
+            </a:pPr>
+            <a:r>
+              <a:rPr lang="en-US" sz="1200" dirty="0">
+                <a:solidFill>
+                  <a:srgbClr val="46596A"/>
+                </a:solidFill>
+                <a:latin typeface="IBM Plex Sans" pitchFamily="34" charset="0"/>
+                <a:ea typeface="IBM Plex Sans" pitchFamily="34" charset="-122"/>
+                <a:cs typeface="IBM Plex Sans" pitchFamily="34" charset="-120"/>
+              </a:rPr>
+              <a:t>The model is told why and retries, up to 3 times.</a:t>
+            </a:r>
+            <a:endParaRPr lang="en-US" sz="1200" dirty="0"/>
+          </a:p>
+        </p:txBody>
+      </p:sp>
+      <p:sp>
+        <p:nvSpPr>
+          <p:cNvPr id="29" name="Text 27"/>
+          <p:cNvSpPr/>
+          <p:nvPr/>
+        </p:nvSpPr>
+        <p:spPr>
+          <a:xfrm>
+            <a:off x="812800" y="5305772"/>
+            <a:ext cx="10883392" cy="452041"/>
+          </a:xfrm>
+          <a:prstGeom prst="rect">
+            <a:avLst/>
+          </a:prstGeom>
+          <a:noFill/>
+          <a:ln/>
+        </p:spPr>
+        <p:txBody>
+          <a:bodyPr wrap="square" lIns="0" tIns="0" rIns="0" bIns="0" rtlCol="0" anchor="t">
+            <a:normAutofit/>
+          </a:bodyPr>
+          <a:lstStyle/>
+          <a:p>
+            <a:pPr algn="l" indent="0" marL="0">
+              <a:lnSpc>
+                <a:spcPts val="1680"/>
+              </a:lnSpc>
+              <a:buNone/>
+            </a:pPr>
+            <a:r>
+              <a:rPr lang="en-US" sz="1200" dirty="0">
+                <a:solidFill>
+                  <a:srgbClr val="55697A"/>
+                </a:solidFill>
+                <a:latin typeface="IBM Plex Sans" pitchFamily="34" charset="0"/>
+                <a:ea typeface="IBM Plex Sans" pitchFamily="34" charset="-122"/>
+                <a:cs typeface="IBM Plex Sans" pitchFamily="34" charset="-120"/>
+              </a:rPr>
+              <a:t>Measured over 62 rounds on the commerce app: the most common tool at each position, a median of 13 calls per round, 989 calls for 101 proposals. Left free, the first live run investigated for ten turns and never proposed.</a:t>
+            </a:r>
+            <a:endParaRPr lang="en-US" sz="1200" dirty="0"/>
+          </a:p>
+        </p:txBody>
+      </p:sp>
+      <p:sp>
+        <p:nvSpPr>
+          <p:cNvPr id="30" name="Text 28"/>
+          <p:cNvSpPr/>
+          <p:nvPr/>
+        </p:nvSpPr>
+        <p:spPr>
+          <a:xfrm>
+            <a:off x="812800" y="6238280"/>
+            <a:ext cx="3459976" cy="238720"/>
+          </a:xfrm>
+          <a:prstGeom prst="rect">
+            <a:avLst/>
+          </a:prstGeom>
+          <a:noFill/>
+          <a:ln/>
+        </p:spPr>
+        <p:txBody>
+          <a:bodyPr wrap="square" lIns="0" tIns="0" rIns="0" bIns="0" rtlCol="0" anchor="t">
+            <a:normAutofit/>
+          </a:bodyPr>
+          <a:lstStyle/>
+          <a:p>
+            <a:pPr algn="l" indent="0" marL="0">
+              <a:lnSpc>
+                <a:spcPts val="1680"/>
+              </a:lnSpc>
+              <a:buNone/>
+            </a:pPr>
+            <a:r>
+              <a:rPr lang="en-US" sz="1200" dirty="0">
+                <a:solidFill>
+                  <a:srgbClr val="55697A"/>
+                </a:solidFill>
+                <a:latin typeface="IBM Plex Sans" pitchFamily="34" charset="0"/>
+                <a:ea typeface="IBM Plex Sans" pitchFamily="34" charset="-122"/>
+                <a:cs typeface="IBM Plex Sans" pitchFamily="34" charset="-120"/>
+              </a:rPr>
               <a:t>Exploratory Testing Automation · CSE 450 · BUET</a:t>
             </a:r>
             <a:endParaRPr lang="en-US" sz="1200" dirty="0"/>
@@ -7826,7 +9525,7 @@
       </p:sp>
       <p:sp>
         <p:nvSpPr>
-          <p:cNvPr id="8" name="Text 5"/>
+          <p:cNvPr id="31" name="Text 29"/>
           <p:cNvSpPr/>
           <p:nvPr/>
         </p:nvSpPr>
@@ -7908,7 +9607,7 @@
         </p:nvSpPr>
         <p:spPr>
           <a:xfrm>
-            <a:off x="812800" y="711200"/>
+            <a:off x="812800" y="812800"/>
             <a:ext cx="10883392" cy="238720"/>
           </a:xfrm>
           <a:prstGeom prst="rect">
@@ -7938,7 +9637,7 @@
                 <a:ea typeface="IBM Plex Sans" pitchFamily="34" charset="-122"/>
                 <a:cs typeface="IBM Plex Sans" pitchFamily="34" charset="-120"/>
               </a:rPr>
-              <a:t>PLANNER · TOOLS MODE · ONE ROUND</a:t>
+              <a:t>PLANNER · WHERE TO GO NEXT</a:t>
             </a:r>
             <a:endParaRPr lang="en-US" sz="1200" dirty="0"/>
           </a:p>
@@ -7952,7 +9651,7 @@
         </p:nvSpPr>
         <p:spPr>
           <a:xfrm>
-            <a:off x="812800" y="1000720"/>
+            <a:off x="812800" y="1102320"/>
             <a:ext cx="10883392" cy="444500"/>
           </a:xfrm>
           <a:prstGeom prst="rect">
@@ -7982,7 +9681,7 @@
                 <a:ea typeface="Source Serif 4" pitchFamily="34" charset="-122"/>
                 <a:cs typeface="Source Serif 4" pitchFamily="34" charset="-120"/>
               </a:rPr>
-              <a:t>One planning round, call by call</a:t>
+              <a:t>Where to test next, without repeating itself</a:t>
             </a:r>
             <a:endParaRPr lang="en-US" sz="3000" dirty="0"/>
           </a:p>
@@ -7996,12 +9695,12 @@
         </p:nvSpPr>
         <p:spPr>
           <a:xfrm>
-            <a:off x="815975" y="1562695"/>
-            <a:ext cx="10560050" cy="803870"/>
+            <a:off x="815975" y="1778595"/>
+            <a:ext cx="3380284" cy="1283841"/>
           </a:xfrm>
           <a:prstGeom prst="roundRect">
             <a:avLst>
-              <a:gd name="adj" fmla="val 12244"/>
+              <a:gd name="adj" fmla="val 7666"/>
             </a:avLst>
           </a:prstGeom>
           <a:solidFill>
@@ -8017,36 +9716,14 @@
       </p:sp>
       <p:sp>
         <p:nvSpPr>
-          <p:cNvPr id="5" name="Shape 3"/>
-          <p:cNvSpPr/>
-          <p:nvPr/>
-        </p:nvSpPr>
-        <p:spPr>
-          <a:xfrm>
-            <a:off x="1022350" y="1760141"/>
-            <a:ext cx="1270000" cy="408930"/>
-          </a:xfrm>
-          <a:prstGeom prst="roundRect">
-            <a:avLst>
-              <a:gd name="adj" fmla="val 18634"/>
-            </a:avLst>
-          </a:prstGeom>
-          <a:solidFill>
-            <a:srgbClr val="0F6E94"/>
-          </a:solidFill>
-          <a:ln/>
-        </p:spPr>
-      </p:sp>
-      <p:sp>
-        <p:nvSpPr>
-          <p:cNvPr id="6" name="Text 4"/>
-          <p:cNvSpPr/>
-          <p:nvPr/>
-        </p:nvSpPr>
-        <p:spPr>
-          <a:xfrm>
-            <a:off x="996950" y="1849041"/>
-            <a:ext cx="1320800" cy="256530"/>
+          <p:cNvPr id="5" name="Text 3"/>
+          <p:cNvSpPr/>
+          <p:nvPr/>
+        </p:nvSpPr>
+        <p:spPr>
+          <a:xfrm>
+            <a:off x="996950" y="1959570"/>
+            <a:ext cx="3108884" cy="256530"/>
           </a:xfrm>
           <a:prstGeom prst="rect">
             <a:avLst/>
@@ -8060,37 +9737,37 @@
           </a:bodyPr>
           <a:lstStyle/>
           <a:p>
-            <a:pPr algn="ctr" indent="0" marL="0">
+            <a:pPr algn="l" indent="0" marL="0">
               <a:lnSpc>
                 <a:spcPts val="1820"/>
               </a:lnSpc>
               <a:buNone/>
             </a:pPr>
             <a:r>
-              <a:rPr lang="en-US" sz="1300" b="1" dirty="0">
-                <a:solidFill>
-                  <a:srgbClr val="F6F8F7"/>
+              <a:rPr lang="en-US" sz="1400" b="1" dirty="0">
+                <a:solidFill>
+                  <a:srgbClr val="14303D"/>
                 </a:solidFill>
                 <a:latin typeface="IBM Plex Sans" pitchFamily="34" charset="0"/>
                 <a:ea typeface="IBM Plex Sans" pitchFamily="34" charset="-122"/>
                 <a:cs typeface="IBM Plex Sans" pitchFamily="34" charset="-120"/>
               </a:rPr>
-              <a:t>Calls 1–3</a:t>
-            </a:r>
-            <a:endParaRPr lang="en-US" sz="1300" dirty="0"/>
-          </a:p>
-        </p:txBody>
-      </p:sp>
-      <p:sp>
-        <p:nvSpPr>
-          <p:cNvPr id="7" name="Text 5"/>
-          <p:cNvSpPr/>
-          <p:nvPr/>
-        </p:nvSpPr>
-        <p:spPr>
-          <a:xfrm>
-            <a:off x="2495550" y="1705570"/>
-            <a:ext cx="8934323" cy="292100"/>
+              <a:t>Steered to the gaps</a:t>
+            </a:r>
+            <a:endParaRPr lang="en-US" sz="1400" dirty="0"/>
+          </a:p>
+        </p:txBody>
+      </p:sp>
+      <p:sp>
+        <p:nvSpPr>
+          <p:cNvPr id="6" name="Text 4"/>
+          <p:cNvSpPr/>
+          <p:nvPr/>
+        </p:nvSpPr>
+        <p:spPr>
+          <a:xfrm>
+            <a:off x="996950" y="2241500"/>
+            <a:ext cx="3108884" cy="665361"/>
           </a:xfrm>
           <a:prstGeom prst="rect">
             <a:avLst/>
@@ -8106,64 +9783,20 @@
           <a:p>
             <a:pPr algn="l" indent="0" marL="0">
               <a:lnSpc>
-                <a:spcPts val="2100"/>
-              </a:lnSpc>
-              <a:buNone/>
-            </a:pPr>
-            <a:r>
-              <a:rPr lang="en-US" sz="1500" b="1" dirty="0">
-                <a:solidFill>
-                  <a:srgbClr val="14303D"/>
+                <a:spcPts val="1680"/>
+              </a:lnSpc>
+              <a:buNone/>
+            </a:pPr>
+            <a:r>
+              <a:rPr lang="en-US" sz="1200" dirty="0">
+                <a:solidFill>
+                  <a:srgbClr val="46596A"/>
                 </a:solidFill>
                 <a:latin typeface="IBM Plex Sans" pitchFamily="34" charset="0"/>
                 <a:ea typeface="IBM Plex Sans" pitchFamily="34" charset="-122"/>
                 <a:cs typeface="IBM Plex Sans" pitchFamily="34" charset="-120"/>
               </a:rPr>
-              <a:t>Orient: what is known, and where the gaps are</a:t>
-            </a:r>
-            <a:endParaRPr lang="en-US" sz="1500" dirty="0"/>
-          </a:p>
-        </p:txBody>
-      </p:sp>
-      <p:sp>
-        <p:nvSpPr>
-          <p:cNvPr id="8" name="Text 6"/>
-          <p:cNvSpPr/>
-          <p:nvPr/>
-        </p:nvSpPr>
-        <p:spPr>
-          <a:xfrm>
-            <a:off x="2495550" y="2010370"/>
-            <a:ext cx="8934323" cy="238720"/>
-          </a:xfrm>
-          <a:prstGeom prst="rect">
-            <a:avLst/>
-          </a:prstGeom>
-          <a:noFill/>
-          <a:ln/>
-        </p:spPr>
-        <p:txBody>
-          <a:bodyPr wrap="square" lIns="0" tIns="0" rIns="0" bIns="0" rtlCol="0" anchor="t">
-            <a:normAutofit/>
-          </a:bodyPr>
-          <a:lstStyle/>
-          <a:p>
-            <a:pPr algn="l" indent="0" marL="0">
-              <a:lnSpc>
-                <a:spcPts val="1680"/>
-              </a:lnSpc>
-              <a:buNone/>
-            </a:pPr>
-            <a:r>
-              <a:rPr lang="en-US" sz="1200" dirty="0">
-                <a:solidFill>
-                  <a:srgbClr val="46596A"/>
-                </a:solidFill>
-                <a:latin typeface="IBM Plex Mono" pitchFamily="34" charset="0"/>
-                <a:ea typeface="IBM Plex Mono" pitchFamily="34" charset="-122"/>
-                <a:cs typeface="IBM Plex Mono" pitchFamily="34" charset="-120"/>
-              </a:rPr>
-              <a:t>findings_summary, get_coverage, list_screens</a:t>
+              <a:t>A coverage map and an exploration directive point it at untested requirements and feature areas.</a:t>
             </a:r>
             <a:endParaRPr lang="en-US" sz="1200" dirty="0"/>
           </a:p>
@@ -8171,18 +9804,18 @@
       </p:sp>
       <p:sp>
         <p:nvSpPr>
-          <p:cNvPr id="9" name="Shape 7"/>
-          <p:cNvSpPr/>
-          <p:nvPr/>
-        </p:nvSpPr>
-        <p:spPr>
-          <a:xfrm>
-            <a:off x="815975" y="2512616"/>
-            <a:ext cx="10560050" cy="803870"/>
+          <p:cNvPr id="7" name="Shape 5"/>
+          <p:cNvSpPr/>
+          <p:nvPr/>
+        </p:nvSpPr>
+        <p:spPr>
+          <a:xfrm>
+            <a:off x="4405809" y="1778595"/>
+            <a:ext cx="3380333" cy="1283841"/>
           </a:xfrm>
           <a:prstGeom prst="roundRect">
             <a:avLst>
-              <a:gd name="adj" fmla="val 12244"/>
+              <a:gd name="adj" fmla="val 7666"/>
             </a:avLst>
           </a:prstGeom>
           <a:solidFill>
@@ -8198,36 +9831,14 @@
       </p:sp>
       <p:sp>
         <p:nvSpPr>
-          <p:cNvPr id="10" name="Shape 8"/>
-          <p:cNvSpPr/>
-          <p:nvPr/>
-        </p:nvSpPr>
-        <p:spPr>
-          <a:xfrm>
-            <a:off x="1022350" y="2710061"/>
-            <a:ext cx="1270000" cy="408930"/>
-          </a:xfrm>
-          <a:prstGeom prst="roundRect">
-            <a:avLst>
-              <a:gd name="adj" fmla="val 18634"/>
-            </a:avLst>
-          </a:prstGeom>
-          <a:solidFill>
-            <a:srgbClr val="0F6E94"/>
-          </a:solidFill>
-          <a:ln/>
-        </p:spPr>
-      </p:sp>
-      <p:sp>
-        <p:nvSpPr>
-          <p:cNvPr id="11" name="Text 9"/>
-          <p:cNvSpPr/>
-          <p:nvPr/>
-        </p:nvSpPr>
-        <p:spPr>
-          <a:xfrm>
-            <a:off x="996950" y="2798961"/>
-            <a:ext cx="1320800" cy="256530"/>
+          <p:cNvPr id="8" name="Text 6"/>
+          <p:cNvSpPr/>
+          <p:nvPr/>
+        </p:nvSpPr>
+        <p:spPr>
+          <a:xfrm>
+            <a:off x="4586784" y="1959570"/>
+            <a:ext cx="3108935" cy="256530"/>
           </a:xfrm>
           <a:prstGeom prst="rect">
             <a:avLst/>
@@ -8241,37 +9852,37 @@
           </a:bodyPr>
           <a:lstStyle/>
           <a:p>
-            <a:pPr algn="ctr" indent="0" marL="0">
+            <a:pPr algn="l" indent="0" marL="0">
               <a:lnSpc>
                 <a:spcPts val="1820"/>
               </a:lnSpc>
               <a:buNone/>
             </a:pPr>
             <a:r>
-              <a:rPr lang="en-US" sz="1300" b="1" dirty="0">
-                <a:solidFill>
-                  <a:srgbClr val="F6F8F7"/>
+              <a:rPr lang="en-US" sz="1400" b="1" dirty="0">
+                <a:solidFill>
+                  <a:srgbClr val="14303D"/>
                 </a:solidFill>
                 <a:latin typeface="IBM Plex Sans" pitchFamily="34" charset="0"/>
                 <a:ea typeface="IBM Plex Sans" pitchFamily="34" charset="-122"/>
                 <a:cs typeface="IBM Plex Sans" pitchFamily="34" charset="-120"/>
               </a:rPr>
-              <a:t>Call 4</a:t>
-            </a:r>
-            <a:endParaRPr lang="en-US" sz="1300" dirty="0"/>
-          </a:p>
-        </p:txBody>
-      </p:sp>
-      <p:sp>
-        <p:nvSpPr>
-          <p:cNvPr id="12" name="Text 10"/>
-          <p:cNvSpPr/>
-          <p:nvPr/>
-        </p:nvSpPr>
-        <p:spPr>
-          <a:xfrm>
-            <a:off x="2495550" y="2655491"/>
-            <a:ext cx="8934323" cy="292100"/>
+              <a:t>A cap on every area</a:t>
+            </a:r>
+            <a:endParaRPr lang="en-US" sz="1400" dirty="0"/>
+          </a:p>
+        </p:txBody>
+      </p:sp>
+      <p:sp>
+        <p:nvSpPr>
+          <p:cNvPr id="9" name="Text 7"/>
+          <p:cNvSpPr/>
+          <p:nvPr/>
+        </p:nvSpPr>
+        <p:spPr>
+          <a:xfrm>
+            <a:off x="4586784" y="2241500"/>
+            <a:ext cx="3108935" cy="452041"/>
           </a:xfrm>
           <a:prstGeom prst="rect">
             <a:avLst/>
@@ -8287,64 +9898,20 @@
           <a:p>
             <a:pPr algn="l" indent="0" marL="0">
               <a:lnSpc>
-                <a:spcPts val="2100"/>
-              </a:lnSpc>
-              <a:buNone/>
-            </a:pPr>
-            <a:r>
-              <a:rPr lang="en-US" sz="1500" b="1" dirty="0">
-                <a:solidFill>
-                  <a:srgbClr val="14303D"/>
+                <a:spcPts val="1680"/>
+              </a:lnSpc>
+              <a:buNone/>
+            </a:pPr>
+            <a:r>
+              <a:rPr lang="en-US" sz="1200" dirty="0">
+                <a:solidFill>
+                  <a:srgbClr val="46596A"/>
                 </a:solidFill>
                 <a:latin typeface="IBM Plex Sans" pitchFamily="34" charset="0"/>
                 <a:ea typeface="IBM Plex Sans" pitchFamily="34" charset="-122"/>
                 <a:cs typeface="IBM Plex Sans" pitchFamily="34" charset="-120"/>
               </a:rPr>
-              <a:t>Pick up an unfinished thread</a:t>
-            </a:r>
-            <a:endParaRPr lang="en-US" sz="1500" dirty="0"/>
-          </a:p>
-        </p:txBody>
-      </p:sp>
-      <p:sp>
-        <p:nvSpPr>
-          <p:cNvPr id="13" name="Text 11"/>
-          <p:cNvSpPr/>
-          <p:nvPr/>
-        </p:nvSpPr>
-        <p:spPr>
-          <a:xfrm>
-            <a:off x="2495550" y="2960291"/>
-            <a:ext cx="8934323" cy="238720"/>
-          </a:xfrm>
-          <a:prstGeom prst="rect">
-            <a:avLst/>
-          </a:prstGeom>
-          <a:noFill/>
-          <a:ln/>
-        </p:spPr>
-        <p:txBody>
-          <a:bodyPr wrap="square" lIns="0" tIns="0" rIns="0" bIns="0" rtlCol="0" anchor="t">
-            <a:normAutofit/>
-          </a:bodyPr>
-          <a:lstStyle/>
-          <a:p>
-            <a:pPr algn="l" indent="0" marL="0">
-              <a:lnSpc>
-                <a:spcPts val="1680"/>
-              </a:lnSpc>
-              <a:buNone/>
-            </a:pPr>
-            <a:r>
-              <a:rPr lang="en-US" sz="1200" dirty="0">
-                <a:solidFill>
-                  <a:srgbClr val="46596A"/>
-                </a:solidFill>
-                <a:latin typeface="IBM Plex Mono" pitchFamily="34" charset="0"/>
-                <a:ea typeface="IBM Plex Mono" pitchFamily="34" charset="-122"/>
-                <a:cs typeface="IBM Plex Mono" pitchFamily="34" charset="-120"/>
-              </a:rPr>
-              <a:t>list_open_questions, list_findings</a:t>
+              <a:t>After 5 tests an area is marked spent and is no longer promoted, whatever its results.</a:t>
             </a:r>
             <a:endParaRPr lang="en-US" sz="1200" dirty="0"/>
           </a:p>
@@ -8352,18 +9919,18 @@
       </p:sp>
       <p:sp>
         <p:nvSpPr>
-          <p:cNvPr id="14" name="Shape 12"/>
-          <p:cNvSpPr/>
-          <p:nvPr/>
-        </p:nvSpPr>
-        <p:spPr>
-          <a:xfrm>
-            <a:off x="815975" y="3462536"/>
-            <a:ext cx="10560050" cy="803870"/>
+          <p:cNvPr id="10" name="Shape 8"/>
+          <p:cNvSpPr/>
+          <p:nvPr/>
+        </p:nvSpPr>
+        <p:spPr>
+          <a:xfrm>
+            <a:off x="7995692" y="1778595"/>
+            <a:ext cx="3380333" cy="1283841"/>
           </a:xfrm>
           <a:prstGeom prst="roundRect">
             <a:avLst>
-              <a:gd name="adj" fmla="val 12244"/>
+              <a:gd name="adj" fmla="val 7666"/>
             </a:avLst>
           </a:prstGeom>
           <a:solidFill>
@@ -8379,36 +9946,14 @@
       </p:sp>
       <p:sp>
         <p:nvSpPr>
-          <p:cNvPr id="15" name="Shape 13"/>
-          <p:cNvSpPr/>
-          <p:nvPr/>
-        </p:nvSpPr>
-        <p:spPr>
-          <a:xfrm>
-            <a:off x="1022350" y="3659981"/>
-            <a:ext cx="1270000" cy="408930"/>
-          </a:xfrm>
-          <a:prstGeom prst="roundRect">
-            <a:avLst>
-              <a:gd name="adj" fmla="val 18634"/>
-            </a:avLst>
-          </a:prstGeom>
-          <a:solidFill>
-            <a:srgbClr val="0F6E94"/>
-          </a:solidFill>
-          <a:ln/>
-        </p:spPr>
-      </p:sp>
-      <p:sp>
-        <p:nvSpPr>
-          <p:cNvPr id="16" name="Text 14"/>
-          <p:cNvSpPr/>
-          <p:nvPr/>
-        </p:nvSpPr>
-        <p:spPr>
-          <a:xfrm>
-            <a:off x="996950" y="3748881"/>
-            <a:ext cx="1320800" cy="256530"/>
+          <p:cNvPr id="11" name="Text 9"/>
+          <p:cNvSpPr/>
+          <p:nvPr/>
+        </p:nvSpPr>
+        <p:spPr>
+          <a:xfrm>
+            <a:off x="8176667" y="1959570"/>
+            <a:ext cx="3108935" cy="256530"/>
           </a:xfrm>
           <a:prstGeom prst="rect">
             <a:avLst/>
@@ -8422,37 +9967,37 @@
           </a:bodyPr>
           <a:lstStyle/>
           <a:p>
-            <a:pPr algn="ctr" indent="0" marL="0">
+            <a:pPr algn="l" indent="0" marL="0">
               <a:lnSpc>
                 <a:spcPts val="1820"/>
               </a:lnSpc>
               <a:buNone/>
             </a:pPr>
             <a:r>
-              <a:rPr lang="en-US" sz="1300" b="1" dirty="0">
-                <a:solidFill>
-                  <a:srgbClr val="F6F8F7"/>
+              <a:rPr lang="en-US" sz="1400" b="1" dirty="0">
+                <a:solidFill>
+                  <a:srgbClr val="14303D"/>
                 </a:solidFill>
                 <a:latin typeface="IBM Plex Sans" pitchFamily="34" charset="0"/>
                 <a:ea typeface="IBM Plex Sans" pitchFamily="34" charset="-122"/>
                 <a:cs typeface="IBM Plex Sans" pitchFamily="34" charset="-120"/>
               </a:rPr>
-              <a:t>Call 5 onward</a:t>
-            </a:r>
-            <a:endParaRPr lang="en-US" sz="1300" dirty="0"/>
-          </a:p>
-        </p:txBody>
-      </p:sp>
-      <p:sp>
-        <p:nvSpPr>
-          <p:cNvPr id="17" name="Text 15"/>
-          <p:cNvSpPr/>
-          <p:nvPr/>
-        </p:nvSpPr>
-        <p:spPr>
-          <a:xfrm>
-            <a:off x="2495550" y="3605411"/>
-            <a:ext cx="8934323" cy="292100"/>
+              <a:t>No near-duplicates</a:t>
+            </a:r>
+            <a:endParaRPr lang="en-US" sz="1400" dirty="0"/>
+          </a:p>
+        </p:txBody>
+      </p:sp>
+      <p:sp>
+        <p:nvSpPr>
+          <p:cNvPr id="12" name="Text 10"/>
+          <p:cNvSpPr/>
+          <p:nvPr/>
+        </p:nvSpPr>
+        <p:spPr>
+          <a:xfrm>
+            <a:off x="8176667" y="2241500"/>
+            <a:ext cx="3108935" cy="665361"/>
           </a:xfrm>
           <a:prstGeom prst="rect">
             <a:avLst/>
@@ -8468,64 +10013,20 @@
           <a:p>
             <a:pPr algn="l" indent="0" marL="0">
               <a:lnSpc>
-                <a:spcPts val="2100"/>
-              </a:lnSpc>
-              <a:buNone/>
-            </a:pPr>
-            <a:r>
-              <a:rPr lang="en-US" sz="1500" b="1" dirty="0">
-                <a:solidFill>
-                  <a:srgbClr val="14303D"/>
+                <a:spcPts val="1680"/>
+              </a:lnSpc>
+              <a:buNone/>
+            </a:pPr>
+            <a:r>
+              <a:rPr lang="en-US" sz="1200" dirty="0">
+                <a:solidFill>
+                  <a:srgbClr val="46596A"/>
                 </a:solidFill>
                 <a:latin typeface="IBM Plex Sans" pitchFamily="34" charset="0"/>
                 <a:ea typeface="IBM Plex Sans" pitchFamily="34" charset="-122"/>
                 <a:cs typeface="IBM Plex Sans" pitchFamily="34" charset="-120"/>
               </a:rPr>
-              <a:t>Ground it: a real requirement and a real screen</a:t>
-            </a:r>
-            <a:endParaRPr lang="en-US" sz="1500" dirty="0"/>
-          </a:p>
-        </p:txBody>
-      </p:sp>
-      <p:sp>
-        <p:nvSpPr>
-          <p:cNvPr id="18" name="Text 16"/>
-          <p:cNvSpPr/>
-          <p:nvPr/>
-        </p:nvSpPr>
-        <p:spPr>
-          <a:xfrm>
-            <a:off x="2495550" y="3910211"/>
-            <a:ext cx="8934323" cy="238720"/>
-          </a:xfrm>
-          <a:prstGeom prst="rect">
-            <a:avLst/>
-          </a:prstGeom>
-          <a:noFill/>
-          <a:ln/>
-        </p:spPr>
-        <p:txBody>
-          <a:bodyPr wrap="square" lIns="0" tIns="0" rIns="0" bIns="0" rtlCol="0" anchor="t">
-            <a:normAutofit/>
-          </a:bodyPr>
-          <a:lstStyle/>
-          <a:p>
-            <a:pPr algn="l" indent="0" marL="0">
-              <a:lnSpc>
-                <a:spcPts val="1680"/>
-              </a:lnSpc>
-              <a:buNone/>
-            </a:pPr>
-            <a:r>
-              <a:rPr lang="en-US" sz="1200" dirty="0">
-                <a:solidFill>
-                  <a:srgbClr val="46596A"/>
-                </a:solidFill>
-                <a:latin typeface="IBM Plex Mono" pitchFamily="34" charset="0"/>
-                <a:ea typeface="IBM Plex Mono" pitchFamily="34" charset="-122"/>
-                <a:cs typeface="IBM Plex Mono" pitchFamily="34" charset="-120"/>
-              </a:rPr>
-              <a:t>search_requirements, get_screen</a:t>
+              <a:t>Each new title is compared with every earlier test, by word overlap (0.60) and by meaning (0.90 cosine).</a:t>
             </a:r>
             <a:endParaRPr lang="en-US" sz="1200" dirty="0"/>
           </a:p>
@@ -8533,18 +10034,18 @@
       </p:sp>
       <p:sp>
         <p:nvSpPr>
-          <p:cNvPr id="19" name="Shape 17"/>
-          <p:cNvSpPr/>
-          <p:nvPr/>
-        </p:nvSpPr>
-        <p:spPr>
-          <a:xfrm>
-            <a:off x="815975" y="4412456"/>
-            <a:ext cx="10560050" cy="803870"/>
+          <p:cNvPr id="13" name="Shape 11"/>
+          <p:cNvSpPr/>
+          <p:nvPr/>
+        </p:nvSpPr>
+        <p:spPr>
+          <a:xfrm>
+            <a:off x="815975" y="3271986"/>
+            <a:ext cx="10560050" cy="1070521"/>
           </a:xfrm>
           <a:prstGeom prst="roundRect">
             <a:avLst>
-              <a:gd name="adj" fmla="val 12244"/>
+              <a:gd name="adj" fmla="val 9194"/>
             </a:avLst>
           </a:prstGeom>
           <a:solidFill>
@@ -8560,36 +10061,14 @@
       </p:sp>
       <p:sp>
         <p:nvSpPr>
-          <p:cNvPr id="20" name="Shape 18"/>
-          <p:cNvSpPr/>
-          <p:nvPr/>
-        </p:nvSpPr>
-        <p:spPr>
-          <a:xfrm>
-            <a:off x="1022350" y="4609902"/>
-            <a:ext cx="1270000" cy="408930"/>
-          </a:xfrm>
-          <a:prstGeom prst="roundRect">
-            <a:avLst>
-              <a:gd name="adj" fmla="val 18634"/>
-            </a:avLst>
-          </a:prstGeom>
-          <a:solidFill>
-            <a:srgbClr val="A9502C"/>
-          </a:solidFill>
-          <a:ln/>
-        </p:spPr>
-      </p:sp>
-      <p:sp>
-        <p:nvSpPr>
-          <p:cNvPr id="21" name="Text 19"/>
-          <p:cNvSpPr/>
-          <p:nvPr/>
-        </p:nvSpPr>
-        <p:spPr>
-          <a:xfrm>
-            <a:off x="996950" y="4698802"/>
-            <a:ext cx="1320800" cy="256530"/>
+          <p:cNvPr id="14" name="Text 12"/>
+          <p:cNvSpPr/>
+          <p:nvPr/>
+        </p:nvSpPr>
+        <p:spPr>
+          <a:xfrm>
+            <a:off x="1022350" y="3452961"/>
+            <a:ext cx="10451719" cy="256530"/>
           </a:xfrm>
           <a:prstGeom prst="rect">
             <a:avLst/>
@@ -8603,37 +10082,37 @@
           </a:bodyPr>
           <a:lstStyle/>
           <a:p>
-            <a:pPr algn="ctr" indent="0" marL="0">
+            <a:pPr algn="l" indent="0" marL="0">
               <a:lnSpc>
                 <a:spcPts val="1820"/>
               </a:lnSpc>
               <a:buNone/>
             </a:pPr>
             <a:r>
-              <a:rPr lang="en-US" sz="1300" b="1" dirty="0">
-                <a:solidFill>
-                  <a:srgbClr val="F6F8F7"/>
+              <a:rPr lang="en-US" sz="1400" b="1" dirty="0">
+                <a:solidFill>
+                  <a:srgbClr val="A9502C"/>
                 </a:solidFill>
                 <a:latin typeface="IBM Plex Sans" pitchFamily="34" charset="0"/>
                 <a:ea typeface="IBM Plex Sans" pitchFamily="34" charset="-122"/>
                 <a:cs typeface="IBM Plex Sans" pitchFamily="34" charset="-120"/>
               </a:rPr>
-              <a:t>Turn 7 onward</a:t>
-            </a:r>
-            <a:endParaRPr lang="en-US" sz="1300" dirty="0"/>
-          </a:p>
-        </p:txBody>
-      </p:sp>
-      <p:sp>
-        <p:nvSpPr>
-          <p:cNvPr id="22" name="Text 20"/>
-          <p:cNvSpPr/>
-          <p:nvPr/>
-        </p:nvSpPr>
-        <p:spPr>
-          <a:xfrm>
-            <a:off x="2495550" y="4555331"/>
-            <a:ext cx="8934323" cy="292100"/>
+              <a:t>Why the cap was needed</a:t>
+            </a:r>
+            <a:endParaRPr lang="en-US" sz="1400" dirty="0"/>
+          </a:p>
+        </p:txBody>
+      </p:sp>
+      <p:sp>
+        <p:nvSpPr>
+          <p:cNvPr id="15" name="Text 13"/>
+          <p:cNvSpPr/>
+          <p:nvPr/>
+        </p:nvSpPr>
+        <p:spPr>
+          <a:xfrm>
+            <a:off x="1022350" y="3734891"/>
+            <a:ext cx="10451719" cy="452041"/>
           </a:xfrm>
           <a:prstGeom prst="rect">
             <a:avLst/>
@@ -8649,64 +10128,20 @@
           <a:p>
             <a:pPr algn="l" indent="0" marL="0">
               <a:lnSpc>
-                <a:spcPts val="2100"/>
-              </a:lnSpc>
-              <a:buNone/>
-            </a:pPr>
-            <a:r>
-              <a:rPr lang="en-US" sz="1500" b="1" dirty="0">
-                <a:solidFill>
-                  <a:srgbClr val="14303D"/>
+                <a:spcPts val="1680"/>
+              </a:lnSpc>
+              <a:buNone/>
+            </a:pPr>
+            <a:r>
+              <a:rPr lang="en-US" sz="1200" dirty="0">
+                <a:solidFill>
+                  <a:srgbClr val="46596A"/>
                 </a:solidFill>
                 <a:latin typeface="IBM Plex Sans" pitchFamily="34" charset="0"/>
                 <a:ea typeface="IBM Plex Sans" pitchFamily="34" charset="-122"/>
                 <a:cs typeface="IBM Plex Sans" pitchFamily="34" charset="-120"/>
               </a:rPr>
-              <a:t>Forced to commit, then validated</a:t>
-            </a:r>
-            <a:endParaRPr lang="en-US" sz="1500" dirty="0"/>
-          </a:p>
-        </p:txBody>
-      </p:sp>
-      <p:sp>
-        <p:nvSpPr>
-          <p:cNvPr id="23" name="Text 21"/>
-          <p:cNvSpPr/>
-          <p:nvPr/>
-        </p:nvSpPr>
-        <p:spPr>
-          <a:xfrm>
-            <a:off x="2495550" y="4860131"/>
-            <a:ext cx="8934323" cy="238720"/>
-          </a:xfrm>
-          <a:prstGeom prst="rect">
-            <a:avLst/>
-          </a:prstGeom>
-          <a:noFill/>
-          <a:ln/>
-        </p:spPr>
-        <p:txBody>
-          <a:bodyPr wrap="square" lIns="0" tIns="0" rIns="0" bIns="0" rtlCol="0" anchor="t">
-            <a:normAutofit/>
-          </a:bodyPr>
-          <a:lstStyle/>
-          <a:p>
-            <a:pPr algn="l" indent="0" marL="0">
-              <a:lnSpc>
-                <a:spcPts val="1680"/>
-              </a:lnSpc>
-              <a:buNone/>
-            </a:pPr>
-            <a:r>
-              <a:rPr lang="en-US" sz="1200" dirty="0">
-                <a:solidFill>
-                  <a:srgbClr val="46596A"/>
-                </a:solidFill>
-                <a:latin typeface="IBM Plex Mono" pitchFamily="34" charset="0"/>
-                <a:ea typeface="IBM Plex Mono" pitchFamily="34" charset="-122"/>
-                <a:cs typeface="IBM Plex Mono" pitchFamily="34" charset="-120"/>
-              </a:rPr>
-              <a:t>the tool choice is pinned to propose_test_case</a:t>
+              <a:t>In one 13-round campaign, 9 tests landed on the same screen: a failing area kept being promoted, and nothing ever retired it. The intuitive fix, stopping once an area yields nothing new, would never have fired, because the ninth test was still producing technically new findings.</a:t>
             </a:r>
             <a:endParaRPr lang="en-US" sz="1200" dirty="0"/>
           </a:p>
@@ -8714,14 +10149,14 @@
       </p:sp>
       <p:sp>
         <p:nvSpPr>
-          <p:cNvPr id="24" name="Text 22"/>
-          <p:cNvSpPr/>
-          <p:nvPr/>
-        </p:nvSpPr>
-        <p:spPr>
-          <a:xfrm>
-            <a:off x="812800" y="5359202"/>
-            <a:ext cx="10883392" cy="452041"/>
+          <p:cNvPr id="16" name="Text 14"/>
+          <p:cNvSpPr/>
+          <p:nvPr/>
+        </p:nvSpPr>
+        <p:spPr>
+          <a:xfrm>
+            <a:off x="812800" y="6238280"/>
+            <a:ext cx="3459976" cy="238720"/>
           </a:xfrm>
           <a:prstGeom prst="rect">
             <a:avLst/>
@@ -8750,7 +10185,7 @@
                 <a:ea typeface="IBM Plex Sans" pitchFamily="34" charset="-122"/>
                 <a:cs typeface="IBM Plex Sans" pitchFamily="34" charset="-120"/>
               </a:rPr>
-              <a:t>The most common tool at each position, over 62 rounds on the commerce app; a median of 13 calls per round. Ceiling of 12 turns: left free, the first live run investigated for ten turns and never proposed.</a:t>
+              <a:t>Exploratory Testing Automation · CSE 450 · BUET</a:t>
             </a:r>
             <a:endParaRPr lang="en-US" sz="1200" dirty="0"/>
           </a:p>
@@ -8758,51 +10193,7 @@
       </p:sp>
       <p:sp>
         <p:nvSpPr>
-          <p:cNvPr id="25" name="Text 23"/>
-          <p:cNvSpPr/>
-          <p:nvPr/>
-        </p:nvSpPr>
-        <p:spPr>
-          <a:xfrm>
-            <a:off x="812800" y="6238280"/>
-            <a:ext cx="3459976" cy="238720"/>
-          </a:xfrm>
-          <a:prstGeom prst="rect">
-            <a:avLst/>
-          </a:prstGeom>
-          <a:noFill/>
-          <a:ln/>
-        </p:spPr>
-        <p:txBody>
-          <a:bodyPr wrap="square" lIns="0" tIns="0" rIns="0" bIns="0" rtlCol="0" anchor="t">
-            <a:normAutofit/>
-          </a:bodyPr>
-          <a:lstStyle/>
-          <a:p>
-            <a:pPr algn="l" indent="0" marL="0">
-              <a:lnSpc>
-                <a:spcPts val="1680"/>
-              </a:lnSpc>
-              <a:buNone/>
-            </a:pPr>
-            <a:r>
-              <a:rPr lang="en-US" sz="1200" dirty="0">
-                <a:solidFill>
-                  <a:srgbClr val="55697A"/>
-                </a:solidFill>
-                <a:latin typeface="IBM Plex Sans" pitchFamily="34" charset="0"/>
-                <a:ea typeface="IBM Plex Sans" pitchFamily="34" charset="-122"/>
-                <a:cs typeface="IBM Plex Sans" pitchFamily="34" charset="-120"/>
-              </a:rPr>
-              <a:t>Exploratory Testing Automation · CSE 450 · BUET</a:t>
-            </a:r>
-            <a:endParaRPr lang="en-US" sz="1200" dirty="0"/>
-          </a:p>
-        </p:txBody>
-      </p:sp>
-      <p:sp>
-        <p:nvSpPr>
-          <p:cNvPr id="26" name="Text 24"/>
+          <p:cNvPr id="17" name="Text 15"/>
           <p:cNvSpPr/>
           <p:nvPr/>
         </p:nvSpPr>
@@ -9010,7 +10401,7 @@
       </p:sp>
       <p:sp>
         <p:nvSpPr>
-          <p:cNvPr id="5" name="Shape 3"/>
+          <p:cNvPr id="5" name="Text 3"/>
           <p:cNvSpPr/>
           <p:nvPr/>
         </p:nvSpPr>
@@ -9029,26 +10420,8 @@
           </a:solidFill>
           <a:ln/>
         </p:spPr>
-      </p:sp>
-      <p:sp>
-        <p:nvSpPr>
-          <p:cNvPr id="6" name="Text 4"/>
-          <p:cNvSpPr/>
-          <p:nvPr/>
-        </p:nvSpPr>
-        <p:spPr>
-          <a:xfrm>
-            <a:off x="1092200" y="2115741"/>
-            <a:ext cx="3479546" cy="2345333"/>
-          </a:xfrm>
-          <a:prstGeom prst="rect">
-            <a:avLst/>
-          </a:prstGeom>
-          <a:noFill/>
-          <a:ln/>
-        </p:spPr>
-        <p:txBody>
-          <a:bodyPr wrap="square" lIns="0" tIns="0" rIns="0" bIns="0" rtlCol="0" anchor="t">
+        <p:txBody>
+          <a:bodyPr wrap="square" lIns="249642" tIns="198842" rIns="148296" bIns="173442" rtlCol="0" anchor="t">
             <a:normAutofit/>
           </a:bodyPr>
           <a:lstStyle/>
@@ -9236,7 +10609,7 @@
       </p:sp>
       <p:sp>
         <p:nvSpPr>
-          <p:cNvPr id="7" name="Shape 5"/>
+          <p:cNvPr id="6" name="Shape 4"/>
           <p:cNvSpPr/>
           <p:nvPr/>
         </p:nvSpPr>
@@ -9263,7 +10636,7 @@
       </p:sp>
       <p:sp>
         <p:nvSpPr>
-          <p:cNvPr id="8" name="Text 6"/>
+          <p:cNvPr id="7" name="Text 5"/>
           <p:cNvSpPr/>
           <p:nvPr/>
         </p:nvSpPr>
@@ -9307,7 +10680,7 @@
       </p:sp>
       <p:sp>
         <p:nvSpPr>
-          <p:cNvPr id="9" name="Text 7"/>
+          <p:cNvPr id="8" name="Text 6"/>
           <p:cNvSpPr/>
           <p:nvPr/>
         </p:nvSpPr>
@@ -9351,7 +10724,7 @@
       </p:sp>
       <p:sp>
         <p:nvSpPr>
-          <p:cNvPr id="10" name="Text 8"/>
+          <p:cNvPr id="9" name="Text 7"/>
           <p:cNvSpPr/>
           <p:nvPr/>
         </p:nvSpPr>
@@ -9395,7 +10768,7 @@
       </p:sp>
       <p:sp>
         <p:nvSpPr>
-          <p:cNvPr id="11" name="Text 9"/>
+          <p:cNvPr id="10" name="Text 8"/>
           <p:cNvSpPr/>
           <p:nvPr/>
         </p:nvSpPr>
@@ -9439,7 +10812,7 @@
       </p:sp>
       <p:sp>
         <p:nvSpPr>
-          <p:cNvPr id="12" name="Text 10"/>
+          <p:cNvPr id="11" name="Text 9"/>
           <p:cNvSpPr/>
           <p:nvPr/>
         </p:nvSpPr>
@@ -9483,7 +10856,7 @@
       </p:sp>
       <p:sp>
         <p:nvSpPr>
-          <p:cNvPr id="13" name="Text 11"/>
+          <p:cNvPr id="12" name="Text 10"/>
           <p:cNvSpPr/>
           <p:nvPr/>
         </p:nvSpPr>
@@ -9527,7 +10900,7 @@
       </p:sp>
       <p:sp>
         <p:nvSpPr>
-          <p:cNvPr id="14" name="Text 12"/>
+          <p:cNvPr id="13" name="Text 11"/>
           <p:cNvSpPr/>
           <p:nvPr/>
         </p:nvSpPr>
@@ -9571,7 +10944,7 @@
       </p:sp>
       <p:sp>
         <p:nvSpPr>
-          <p:cNvPr id="15" name="Text 13"/>
+          <p:cNvPr id="14" name="Text 12"/>
           <p:cNvSpPr/>
           <p:nvPr/>
         </p:nvSpPr>
@@ -9637,7 +11010,7 @@
       </p:sp>
       <p:sp>
         <p:nvSpPr>
-          <p:cNvPr id="16" name="Text 14"/>
+          <p:cNvPr id="15" name="Text 13"/>
           <p:cNvSpPr/>
           <p:nvPr/>
         </p:nvSpPr>
@@ -9681,7 +11054,7 @@
       </p:sp>
       <p:sp>
         <p:nvSpPr>
-          <p:cNvPr id="17" name="Text 15"/>
+          <p:cNvPr id="16" name="Text 14"/>
           <p:cNvSpPr/>
           <p:nvPr/>
         </p:nvSpPr>
@@ -9734,674 +11107,6 @@
 <file path=ppt/slides/slide18.xml><?xml version="1.0" encoding="utf-8"?>
 <p:sld xmlns:a="http://schemas.openxmlformats.org/drawingml/2006/main" xmlns:r="http://schemas.openxmlformats.org/officeDocument/2006/relationships" xmlns:p="http://schemas.openxmlformats.org/presentationml/2006/main">
   <p:cSld name="Slide 18">
-    <p:bg>
-      <p:bgPr>
-        <a:solidFill>
-          <a:srgbClr val="F6F8F7"/>
-        </a:solidFill>
-      </p:bgPr>
-    </p:bg>
-    <p:spTree>
-      <p:nvGrpSpPr>
-        <p:cNvPr id="1" name=""/>
-        <p:cNvGrpSpPr/>
-        <p:nvPr/>
-      </p:nvGrpSpPr>
-      <p:grpSpPr>
-        <a:xfrm>
-          <a:off x="0" y="0"/>
-          <a:ext cx="0" cy="0"/>
-          <a:chOff x="0" y="0"/>
-          <a:chExt cx="0" cy="0"/>
-        </a:xfrm>
-      </p:grpSpPr>
-      <p:sp>
-        <p:nvSpPr>
-          <p:cNvPr id="2" name="Text 0"/>
-          <p:cNvSpPr/>
-          <p:nvPr/>
-        </p:nvSpPr>
-        <p:spPr>
-          <a:xfrm>
-            <a:off x="812800" y="812800"/>
-            <a:ext cx="10883392" cy="238720"/>
-          </a:xfrm>
-          <a:prstGeom prst="rect">
-            <a:avLst/>
-          </a:prstGeom>
-          <a:noFill/>
-          <a:ln/>
-        </p:spPr>
-        <p:txBody>
-          <a:bodyPr wrap="square" lIns="0" tIns="0" rIns="0" bIns="0" rtlCol="0" anchor="t">
-            <a:normAutofit/>
-          </a:bodyPr>
-          <a:lstStyle/>
-          <a:p>
-            <a:pPr algn="l" indent="0" marL="0">
-              <a:lnSpc>
-                <a:spcPts val="1680"/>
-              </a:lnSpc>
-              <a:buNone/>
-            </a:pPr>
-            <a:r>
-              <a:rPr lang="en-US" sz="1200" b="1" spc="100" kern="0" dirty="0">
-                <a:solidFill>
-                  <a:srgbClr val="0B6A8F"/>
-                </a:solidFill>
-                <a:latin typeface="IBM Plex Sans" pitchFamily="34" charset="0"/>
-                <a:ea typeface="IBM Plex Sans" pitchFamily="34" charset="-122"/>
-                <a:cs typeface="IBM Plex Sans" pitchFamily="34" charset="-120"/>
-              </a:rPr>
-              <a:t>PLANNER · WHERE TO GO NEXT</a:t>
-            </a:r>
-            <a:endParaRPr lang="en-US" sz="1200" dirty="0"/>
-          </a:p>
-        </p:txBody>
-      </p:sp>
-      <p:sp>
-        <p:nvSpPr>
-          <p:cNvPr id="3" name="Text 1"/>
-          <p:cNvSpPr/>
-          <p:nvPr/>
-        </p:nvSpPr>
-        <p:spPr>
-          <a:xfrm>
-            <a:off x="812800" y="1102320"/>
-            <a:ext cx="10883392" cy="444500"/>
-          </a:xfrm>
-          <a:prstGeom prst="rect">
-            <a:avLst/>
-          </a:prstGeom>
-          <a:noFill/>
-          <a:ln/>
-        </p:spPr>
-        <p:txBody>
-          <a:bodyPr wrap="square" lIns="0" tIns="0" rIns="0" bIns="0" rtlCol="0" anchor="t">
-            <a:normAutofit/>
-          </a:bodyPr>
-          <a:lstStyle/>
-          <a:p>
-            <a:pPr algn="l" indent="0" marL="0">
-              <a:lnSpc>
-                <a:spcPts val="3300"/>
-              </a:lnSpc>
-              <a:buNone/>
-            </a:pPr>
-            <a:r>
-              <a:rPr lang="en-US" sz="3000" b="1" dirty="0">
-                <a:solidFill>
-                  <a:srgbClr val="14303D"/>
-                </a:solidFill>
-                <a:latin typeface="Source Serif 4" pitchFamily="34" charset="0"/>
-                <a:ea typeface="Source Serif 4" pitchFamily="34" charset="-122"/>
-                <a:cs typeface="Source Serif 4" pitchFamily="34" charset="-120"/>
-              </a:rPr>
-              <a:t>Where to test next, without repeating itself</a:t>
-            </a:r>
-            <a:endParaRPr lang="en-US" sz="3000" dirty="0"/>
-          </a:p>
-        </p:txBody>
-      </p:sp>
-      <p:sp>
-        <p:nvSpPr>
-          <p:cNvPr id="4" name="Shape 2"/>
-          <p:cNvSpPr/>
-          <p:nvPr/>
-        </p:nvSpPr>
-        <p:spPr>
-          <a:xfrm>
-            <a:off x="815975" y="1778595"/>
-            <a:ext cx="3380284" cy="1283841"/>
-          </a:xfrm>
-          <a:prstGeom prst="roundRect">
-            <a:avLst>
-              <a:gd name="adj" fmla="val 7666"/>
-            </a:avLst>
-          </a:prstGeom>
-          <a:solidFill>
-            <a:srgbClr val="FDFEFE"/>
-          </a:solidFill>
-          <a:ln w="6350">
-            <a:solidFill>
-              <a:srgbClr val="D6E1E6"/>
-            </a:solidFill>
-            <a:prstDash val="solid"/>
-          </a:ln>
-        </p:spPr>
-      </p:sp>
-      <p:sp>
-        <p:nvSpPr>
-          <p:cNvPr id="5" name="Text 3"/>
-          <p:cNvSpPr/>
-          <p:nvPr/>
-        </p:nvSpPr>
-        <p:spPr>
-          <a:xfrm>
-            <a:off x="996950" y="1959570"/>
-            <a:ext cx="3108884" cy="256530"/>
-          </a:xfrm>
-          <a:prstGeom prst="rect">
-            <a:avLst/>
-          </a:prstGeom>
-          <a:noFill/>
-          <a:ln/>
-        </p:spPr>
-        <p:txBody>
-          <a:bodyPr wrap="square" lIns="0" tIns="0" rIns="0" bIns="0" rtlCol="0" anchor="t">
-            <a:normAutofit/>
-          </a:bodyPr>
-          <a:lstStyle/>
-          <a:p>
-            <a:pPr algn="l" indent="0" marL="0">
-              <a:lnSpc>
-                <a:spcPts val="1820"/>
-              </a:lnSpc>
-              <a:buNone/>
-            </a:pPr>
-            <a:r>
-              <a:rPr lang="en-US" sz="1400" b="1" dirty="0">
-                <a:solidFill>
-                  <a:srgbClr val="14303D"/>
-                </a:solidFill>
-                <a:latin typeface="IBM Plex Sans" pitchFamily="34" charset="0"/>
-                <a:ea typeface="IBM Plex Sans" pitchFamily="34" charset="-122"/>
-                <a:cs typeface="IBM Plex Sans" pitchFamily="34" charset="-120"/>
-              </a:rPr>
-              <a:t>Steered to the gaps</a:t>
-            </a:r>
-            <a:endParaRPr lang="en-US" sz="1400" dirty="0"/>
-          </a:p>
-        </p:txBody>
-      </p:sp>
-      <p:sp>
-        <p:nvSpPr>
-          <p:cNvPr id="6" name="Text 4"/>
-          <p:cNvSpPr/>
-          <p:nvPr/>
-        </p:nvSpPr>
-        <p:spPr>
-          <a:xfrm>
-            <a:off x="996950" y="2241500"/>
-            <a:ext cx="3108884" cy="665361"/>
-          </a:xfrm>
-          <a:prstGeom prst="rect">
-            <a:avLst/>
-          </a:prstGeom>
-          <a:noFill/>
-          <a:ln/>
-        </p:spPr>
-        <p:txBody>
-          <a:bodyPr wrap="square" lIns="0" tIns="0" rIns="0" bIns="0" rtlCol="0" anchor="t">
-            <a:normAutofit/>
-          </a:bodyPr>
-          <a:lstStyle/>
-          <a:p>
-            <a:pPr algn="l" indent="0" marL="0">
-              <a:lnSpc>
-                <a:spcPts val="1680"/>
-              </a:lnSpc>
-              <a:buNone/>
-            </a:pPr>
-            <a:r>
-              <a:rPr lang="en-US" sz="1200" dirty="0">
-                <a:solidFill>
-                  <a:srgbClr val="46596A"/>
-                </a:solidFill>
-                <a:latin typeface="IBM Plex Sans" pitchFamily="34" charset="0"/>
-                <a:ea typeface="IBM Plex Sans" pitchFamily="34" charset="-122"/>
-                <a:cs typeface="IBM Plex Sans" pitchFamily="34" charset="-120"/>
-              </a:rPr>
-              <a:t>A coverage map and an exploration directive point it at untested requirements and feature areas.</a:t>
-            </a:r>
-            <a:endParaRPr lang="en-US" sz="1200" dirty="0"/>
-          </a:p>
-        </p:txBody>
-      </p:sp>
-      <p:sp>
-        <p:nvSpPr>
-          <p:cNvPr id="7" name="Shape 5"/>
-          <p:cNvSpPr/>
-          <p:nvPr/>
-        </p:nvSpPr>
-        <p:spPr>
-          <a:xfrm>
-            <a:off x="4405809" y="1778595"/>
-            <a:ext cx="3380333" cy="1283841"/>
-          </a:xfrm>
-          <a:prstGeom prst="roundRect">
-            <a:avLst>
-              <a:gd name="adj" fmla="val 7666"/>
-            </a:avLst>
-          </a:prstGeom>
-          <a:solidFill>
-            <a:srgbClr val="FDFEFE"/>
-          </a:solidFill>
-          <a:ln w="6350">
-            <a:solidFill>
-              <a:srgbClr val="D6E1E6"/>
-            </a:solidFill>
-            <a:prstDash val="solid"/>
-          </a:ln>
-        </p:spPr>
-      </p:sp>
-      <p:sp>
-        <p:nvSpPr>
-          <p:cNvPr id="8" name="Text 6"/>
-          <p:cNvSpPr/>
-          <p:nvPr/>
-        </p:nvSpPr>
-        <p:spPr>
-          <a:xfrm>
-            <a:off x="4586784" y="1959570"/>
-            <a:ext cx="3108935" cy="256530"/>
-          </a:xfrm>
-          <a:prstGeom prst="rect">
-            <a:avLst/>
-          </a:prstGeom>
-          <a:noFill/>
-          <a:ln/>
-        </p:spPr>
-        <p:txBody>
-          <a:bodyPr wrap="square" lIns="0" tIns="0" rIns="0" bIns="0" rtlCol="0" anchor="t">
-            <a:normAutofit/>
-          </a:bodyPr>
-          <a:lstStyle/>
-          <a:p>
-            <a:pPr algn="l" indent="0" marL="0">
-              <a:lnSpc>
-                <a:spcPts val="1820"/>
-              </a:lnSpc>
-              <a:buNone/>
-            </a:pPr>
-            <a:r>
-              <a:rPr lang="en-US" sz="1400" b="1" dirty="0">
-                <a:solidFill>
-                  <a:srgbClr val="14303D"/>
-                </a:solidFill>
-                <a:latin typeface="IBM Plex Sans" pitchFamily="34" charset="0"/>
-                <a:ea typeface="IBM Plex Sans" pitchFamily="34" charset="-122"/>
-                <a:cs typeface="IBM Plex Sans" pitchFamily="34" charset="-120"/>
-              </a:rPr>
-              <a:t>A cap on every area</a:t>
-            </a:r>
-            <a:endParaRPr lang="en-US" sz="1400" dirty="0"/>
-          </a:p>
-        </p:txBody>
-      </p:sp>
-      <p:sp>
-        <p:nvSpPr>
-          <p:cNvPr id="9" name="Text 7"/>
-          <p:cNvSpPr/>
-          <p:nvPr/>
-        </p:nvSpPr>
-        <p:spPr>
-          <a:xfrm>
-            <a:off x="4586784" y="2241500"/>
-            <a:ext cx="3108935" cy="452041"/>
-          </a:xfrm>
-          <a:prstGeom prst="rect">
-            <a:avLst/>
-          </a:prstGeom>
-          <a:noFill/>
-          <a:ln/>
-        </p:spPr>
-        <p:txBody>
-          <a:bodyPr wrap="square" lIns="0" tIns="0" rIns="0" bIns="0" rtlCol="0" anchor="t">
-            <a:normAutofit/>
-          </a:bodyPr>
-          <a:lstStyle/>
-          <a:p>
-            <a:pPr algn="l" indent="0" marL="0">
-              <a:lnSpc>
-                <a:spcPts val="1680"/>
-              </a:lnSpc>
-              <a:buNone/>
-            </a:pPr>
-            <a:r>
-              <a:rPr lang="en-US" sz="1200" dirty="0">
-                <a:solidFill>
-                  <a:srgbClr val="46596A"/>
-                </a:solidFill>
-                <a:latin typeface="IBM Plex Sans" pitchFamily="34" charset="0"/>
-                <a:ea typeface="IBM Plex Sans" pitchFamily="34" charset="-122"/>
-                <a:cs typeface="IBM Plex Sans" pitchFamily="34" charset="-120"/>
-              </a:rPr>
-              <a:t>After 5 tests an area is marked spent and is no longer promoted, whatever its results.</a:t>
-            </a:r>
-            <a:endParaRPr lang="en-US" sz="1200" dirty="0"/>
-          </a:p>
-        </p:txBody>
-      </p:sp>
-      <p:sp>
-        <p:nvSpPr>
-          <p:cNvPr id="10" name="Shape 8"/>
-          <p:cNvSpPr/>
-          <p:nvPr/>
-        </p:nvSpPr>
-        <p:spPr>
-          <a:xfrm>
-            <a:off x="7995692" y="1778595"/>
-            <a:ext cx="3380333" cy="1283841"/>
-          </a:xfrm>
-          <a:prstGeom prst="roundRect">
-            <a:avLst>
-              <a:gd name="adj" fmla="val 7666"/>
-            </a:avLst>
-          </a:prstGeom>
-          <a:solidFill>
-            <a:srgbClr val="FDFEFE"/>
-          </a:solidFill>
-          <a:ln w="6350">
-            <a:solidFill>
-              <a:srgbClr val="D6E1E6"/>
-            </a:solidFill>
-            <a:prstDash val="solid"/>
-          </a:ln>
-        </p:spPr>
-      </p:sp>
-      <p:sp>
-        <p:nvSpPr>
-          <p:cNvPr id="11" name="Text 9"/>
-          <p:cNvSpPr/>
-          <p:nvPr/>
-        </p:nvSpPr>
-        <p:spPr>
-          <a:xfrm>
-            <a:off x="8176667" y="1959570"/>
-            <a:ext cx="3108935" cy="256530"/>
-          </a:xfrm>
-          <a:prstGeom prst="rect">
-            <a:avLst/>
-          </a:prstGeom>
-          <a:noFill/>
-          <a:ln/>
-        </p:spPr>
-        <p:txBody>
-          <a:bodyPr wrap="square" lIns="0" tIns="0" rIns="0" bIns="0" rtlCol="0" anchor="t">
-            <a:normAutofit/>
-          </a:bodyPr>
-          <a:lstStyle/>
-          <a:p>
-            <a:pPr algn="l" indent="0" marL="0">
-              <a:lnSpc>
-                <a:spcPts val="1820"/>
-              </a:lnSpc>
-              <a:buNone/>
-            </a:pPr>
-            <a:r>
-              <a:rPr lang="en-US" sz="1400" b="1" dirty="0">
-                <a:solidFill>
-                  <a:srgbClr val="14303D"/>
-                </a:solidFill>
-                <a:latin typeface="IBM Plex Sans" pitchFamily="34" charset="0"/>
-                <a:ea typeface="IBM Plex Sans" pitchFamily="34" charset="-122"/>
-                <a:cs typeface="IBM Plex Sans" pitchFamily="34" charset="-120"/>
-              </a:rPr>
-              <a:t>No near-duplicates</a:t>
-            </a:r>
-            <a:endParaRPr lang="en-US" sz="1400" dirty="0"/>
-          </a:p>
-        </p:txBody>
-      </p:sp>
-      <p:sp>
-        <p:nvSpPr>
-          <p:cNvPr id="12" name="Text 10"/>
-          <p:cNvSpPr/>
-          <p:nvPr/>
-        </p:nvSpPr>
-        <p:spPr>
-          <a:xfrm>
-            <a:off x="8176667" y="2241500"/>
-            <a:ext cx="3108935" cy="665361"/>
-          </a:xfrm>
-          <a:prstGeom prst="rect">
-            <a:avLst/>
-          </a:prstGeom>
-          <a:noFill/>
-          <a:ln/>
-        </p:spPr>
-        <p:txBody>
-          <a:bodyPr wrap="square" lIns="0" tIns="0" rIns="0" bIns="0" rtlCol="0" anchor="t">
-            <a:normAutofit/>
-          </a:bodyPr>
-          <a:lstStyle/>
-          <a:p>
-            <a:pPr algn="l" indent="0" marL="0">
-              <a:lnSpc>
-                <a:spcPts val="1680"/>
-              </a:lnSpc>
-              <a:buNone/>
-            </a:pPr>
-            <a:r>
-              <a:rPr lang="en-US" sz="1200" dirty="0">
-                <a:solidFill>
-                  <a:srgbClr val="46596A"/>
-                </a:solidFill>
-                <a:latin typeface="IBM Plex Sans" pitchFamily="34" charset="0"/>
-                <a:ea typeface="IBM Plex Sans" pitchFamily="34" charset="-122"/>
-                <a:cs typeface="IBM Plex Sans" pitchFamily="34" charset="-120"/>
-              </a:rPr>
-              <a:t>Each new title is compared with every earlier test, by word overlap (0.60) and by meaning (0.90 cosine).</a:t>
-            </a:r>
-            <a:endParaRPr lang="en-US" sz="1200" dirty="0"/>
-          </a:p>
-        </p:txBody>
-      </p:sp>
-      <p:sp>
-        <p:nvSpPr>
-          <p:cNvPr id="13" name="Shape 11"/>
-          <p:cNvSpPr/>
-          <p:nvPr/>
-        </p:nvSpPr>
-        <p:spPr>
-          <a:xfrm>
-            <a:off x="815975" y="3271986"/>
-            <a:ext cx="10560050" cy="1070521"/>
-          </a:xfrm>
-          <a:prstGeom prst="roundRect">
-            <a:avLst>
-              <a:gd name="adj" fmla="val 9194"/>
-            </a:avLst>
-          </a:prstGeom>
-          <a:solidFill>
-            <a:srgbClr val="FDFEFE"/>
-          </a:solidFill>
-          <a:ln w="6350">
-            <a:solidFill>
-              <a:srgbClr val="D6E1E6"/>
-            </a:solidFill>
-            <a:prstDash val="solid"/>
-          </a:ln>
-        </p:spPr>
-      </p:sp>
-      <p:sp>
-        <p:nvSpPr>
-          <p:cNvPr id="14" name="Text 12"/>
-          <p:cNvSpPr/>
-          <p:nvPr/>
-        </p:nvSpPr>
-        <p:spPr>
-          <a:xfrm>
-            <a:off x="1022350" y="3452961"/>
-            <a:ext cx="10451719" cy="256530"/>
-          </a:xfrm>
-          <a:prstGeom prst="rect">
-            <a:avLst/>
-          </a:prstGeom>
-          <a:noFill/>
-          <a:ln/>
-        </p:spPr>
-        <p:txBody>
-          <a:bodyPr wrap="square" lIns="0" tIns="0" rIns="0" bIns="0" rtlCol="0" anchor="t">
-            <a:normAutofit/>
-          </a:bodyPr>
-          <a:lstStyle/>
-          <a:p>
-            <a:pPr algn="l" indent="0" marL="0">
-              <a:lnSpc>
-                <a:spcPts val="1820"/>
-              </a:lnSpc>
-              <a:buNone/>
-            </a:pPr>
-            <a:r>
-              <a:rPr lang="en-US" sz="1400" b="1" dirty="0">
-                <a:solidFill>
-                  <a:srgbClr val="A9502C"/>
-                </a:solidFill>
-                <a:latin typeface="IBM Plex Sans" pitchFamily="34" charset="0"/>
-                <a:ea typeface="IBM Plex Sans" pitchFamily="34" charset="-122"/>
-                <a:cs typeface="IBM Plex Sans" pitchFamily="34" charset="-120"/>
-              </a:rPr>
-              <a:t>Why the cap was needed</a:t>
-            </a:r>
-            <a:endParaRPr lang="en-US" sz="1400" dirty="0"/>
-          </a:p>
-        </p:txBody>
-      </p:sp>
-      <p:sp>
-        <p:nvSpPr>
-          <p:cNvPr id="15" name="Text 13"/>
-          <p:cNvSpPr/>
-          <p:nvPr/>
-        </p:nvSpPr>
-        <p:spPr>
-          <a:xfrm>
-            <a:off x="1022350" y="3734891"/>
-            <a:ext cx="10451719" cy="452041"/>
-          </a:xfrm>
-          <a:prstGeom prst="rect">
-            <a:avLst/>
-          </a:prstGeom>
-          <a:noFill/>
-          <a:ln/>
-        </p:spPr>
-        <p:txBody>
-          <a:bodyPr wrap="square" lIns="0" tIns="0" rIns="0" bIns="0" rtlCol="0" anchor="t">
-            <a:normAutofit/>
-          </a:bodyPr>
-          <a:lstStyle/>
-          <a:p>
-            <a:pPr algn="l" indent="0" marL="0">
-              <a:lnSpc>
-                <a:spcPts val="1680"/>
-              </a:lnSpc>
-              <a:buNone/>
-            </a:pPr>
-            <a:r>
-              <a:rPr lang="en-US" sz="1200" dirty="0">
-                <a:solidFill>
-                  <a:srgbClr val="46596A"/>
-                </a:solidFill>
-                <a:latin typeface="IBM Plex Sans" pitchFamily="34" charset="0"/>
-                <a:ea typeface="IBM Plex Sans" pitchFamily="34" charset="-122"/>
-                <a:cs typeface="IBM Plex Sans" pitchFamily="34" charset="-120"/>
-              </a:rPr>
-              <a:t>In one 13-round campaign, 9 tests landed on the same screen: a failing area kept being promoted, and nothing ever retired it. The intuitive fix, stopping once an area yields nothing new, would never have fired, because the ninth test was still producing technically new findings.</a:t>
-            </a:r>
-            <a:endParaRPr lang="en-US" sz="1200" dirty="0"/>
-          </a:p>
-        </p:txBody>
-      </p:sp>
-      <p:sp>
-        <p:nvSpPr>
-          <p:cNvPr id="16" name="Text 14"/>
-          <p:cNvSpPr/>
-          <p:nvPr/>
-        </p:nvSpPr>
-        <p:spPr>
-          <a:xfrm>
-            <a:off x="812800" y="6238280"/>
-            <a:ext cx="3459976" cy="238720"/>
-          </a:xfrm>
-          <a:prstGeom prst="rect">
-            <a:avLst/>
-          </a:prstGeom>
-          <a:noFill/>
-          <a:ln/>
-        </p:spPr>
-        <p:txBody>
-          <a:bodyPr wrap="square" lIns="0" tIns="0" rIns="0" bIns="0" rtlCol="0" anchor="t">
-            <a:normAutofit/>
-          </a:bodyPr>
-          <a:lstStyle/>
-          <a:p>
-            <a:pPr algn="l" indent="0" marL="0">
-              <a:lnSpc>
-                <a:spcPts val="1680"/>
-              </a:lnSpc>
-              <a:buNone/>
-            </a:pPr>
-            <a:r>
-              <a:rPr lang="en-US" sz="1200" dirty="0">
-                <a:solidFill>
-                  <a:srgbClr val="55697A"/>
-                </a:solidFill>
-                <a:latin typeface="IBM Plex Sans" pitchFamily="34" charset="0"/>
-                <a:ea typeface="IBM Plex Sans" pitchFamily="34" charset="-122"/>
-                <a:cs typeface="IBM Plex Sans" pitchFamily="34" charset="-120"/>
-              </a:rPr>
-              <a:t>Exploratory Testing Automation · CSE 450 · BUET</a:t>
-            </a:r>
-            <a:endParaRPr lang="en-US" sz="1200" dirty="0"/>
-          </a:p>
-        </p:txBody>
-      </p:sp>
-      <p:sp>
-        <p:nvSpPr>
-          <p:cNvPr id="17" name="Text 15"/>
-          <p:cNvSpPr/>
-          <p:nvPr/>
-        </p:nvSpPr>
-        <p:spPr>
-          <a:xfrm>
-            <a:off x="11196290" y="6238280"/>
-            <a:ext cx="233710" cy="238720"/>
-          </a:xfrm>
-          <a:prstGeom prst="rect">
-            <a:avLst/>
-          </a:prstGeom>
-          <a:noFill/>
-          <a:ln/>
-        </p:spPr>
-        <p:txBody>
-          <a:bodyPr wrap="square" lIns="0" tIns="0" rIns="0" bIns="0" rtlCol="0" anchor="t">
-            <a:normAutofit/>
-          </a:bodyPr>
-          <a:lstStyle/>
-          <a:p>
-            <a:pPr algn="l" indent="0" marL="0">
-              <a:lnSpc>
-                <a:spcPts val="1680"/>
-              </a:lnSpc>
-              <a:buNone/>
-            </a:pPr>
-            <a:r>
-              <a:rPr lang="en-US" sz="1200" dirty="0">
-                <a:solidFill>
-                  <a:srgbClr val="55697A"/>
-                </a:solidFill>
-                <a:latin typeface="IBM Plex Sans" pitchFamily="34" charset="0"/>
-                <a:ea typeface="IBM Plex Sans" pitchFamily="34" charset="-122"/>
-                <a:cs typeface="IBM Plex Sans" pitchFamily="34" charset="-120"/>
-              </a:rPr>
-              <a:t>18</a:t>
-            </a:r>
-            <a:endParaRPr lang="en-US" sz="1200" dirty="0"/>
-          </a:p>
-        </p:txBody>
-      </p:sp>
-    </p:spTree>
-  </p:cSld>
-  <p:clrMapOvr>
-    <a:masterClrMapping/>
-  </p:clrMapOvr>
-</p:sld>
-</file>
-
-<file path=ppt/slides/slide19.xml><?xml version="1.0" encoding="utf-8"?>
-<p:sld xmlns:a="http://schemas.openxmlformats.org/drawingml/2006/main" xmlns:r="http://schemas.openxmlformats.org/officeDocument/2006/relationships" xmlns:p="http://schemas.openxmlformats.org/presentationml/2006/main">
-  <p:cSld name="Slide 19">
     <p:bg>
       <p:bgPr>
         <a:solidFill>
@@ -11774,7 +12479,7 @@
                 <a:ea typeface="IBM Plex Sans" pitchFamily="34" charset="-122"/>
                 <a:cs typeface="IBM Plex Sans" pitchFamily="34" charset="-120"/>
               </a:rPr>
-              <a:t>19</a:t>
+              <a:t>18</a:t>
             </a:r>
             <a:endParaRPr lang="en-US" sz="1200" dirty="0"/>
           </a:p>
